--- a/presentaties/fabrieksbezoek-china-2026/uitvoer/Wellshave_Factory_Visit_FANKE.pptx
+++ b/presentaties/fabrieksbezoek-china-2026/uitvoer/Wellshave_Factory_Visit_FANKE.pptx
@@ -114,25 +114,25 @@
   <p:extLst>
     <p:ext uri="{521415D9-36F7-43E2-AB2F-B90AF26B5E84}">
       <p14:sectionLst xmlns:p14="http://schemas.microsoft.com/office/powerpoint/2010/main">
-        <p14:section name="Introduction" id="{5725b1ad-2257-b183-2282-07540cd7515d}">
+        <p14:section name="Introduction" id="{6cab8bc2-5ac3-6738-9161-cab698a43633}">
           <p14:sldIdLst>
             <p14:sldId id="256"/>
           </p14:sldIdLst>
         </p14:section>
-        <p14:section name="About Wellshave" id="{2f02d7b9-d076-cb4b-f50d-d0aca34c466a}">
+        <p14:section name="About Wellshave" id="{58eb8cab-391a-bcbc-fdd3-9becfb289b83}">
           <p14:sldIdLst>
             <p14:sldId id="257"/>
             <p14:sldId id="258"/>
           </p14:sldIdLst>
         </p14:section>
-        <p14:section name="The visit" id="{e061b23a-bc2e-4903-bc6e-2e1c8c5468e3}">
+        <p14:section name="The visit" id="{420365e4-7c7d-7d71-53cb-ebfceb4af7bf}">
           <p14:sldIdLst>
             <p14:sldId id="259"/>
             <p14:sldId id="260"/>
             <p14:sldId id="261"/>
           </p14:sldIdLst>
         </p14:section>
-        <p14:section name="Our products with you" id="{eebd3555-7cfe-024a-394e-9b6cfc2c92b9}">
+        <p14:section name="Our products with you" id="{83729c62-228b-a7f4-4102-b4ac1bef250b}">
           <p14:sldIdLst>
             <p14:sldId id="262"/>
             <p14:sldId id="263"/>
@@ -982,7 +982,7 @@
           <a:p>
             <a:r>
               <a:rPr lang="en-US" dirty="0"/>
-              <a:t/>
+              <a:t>Fixed-cable adapter: from now on every device ships with a charger whose cable is fixed to the adapter, so customers always charge with the right adapter for that device. Wrong adapters damage batteries and lead to returns.</a:t>
             </a:r>
             <a:endParaRPr lang="en-US" dirty="0"/>
           </a:p>
@@ -6800,11 +6800,11 @@
         <p:spPr>
           <a:xfrm>
             <a:off x="548640" y="1755648"/>
-            <a:ext cx="3515258" cy="3401568"/>
+            <a:ext cx="3515258" cy="3639312"/>
           </a:xfrm>
           <a:prstGeom prst="roundRect">
             <a:avLst>
-              <a:gd name="adj" fmla="val 4301"/>
+              <a:gd name="adj" fmla="val 4162"/>
             </a:avLst>
           </a:prstGeom>
           <a:solidFill>
@@ -6984,7 +6984,7 @@
         <p:spPr>
           <a:xfrm>
             <a:off x="822960" y="3474720"/>
-            <a:ext cx="3058058" cy="1627632"/>
+            <a:ext cx="3058058" cy="1828800"/>
           </a:xfrm>
           <a:prstGeom prst="rect">
             <a:avLst/>
@@ -6998,7 +6998,7 @@
           <a:p>
             <a:pPr indent="0" marL="0">
               <a:spcAft>
-                <a:spcPts val="1000"/>
+                <a:spcPts val="800"/>
               </a:spcAft>
               <a:buNone/>
             </a:pPr>
@@ -7008,12 +7008,12 @@
                   <a:schemeClr val="bg1"/>
                 </a:solidFill>
               </a:rPr>
-              <a:t>Longer battery life per charge</a:t>
+              <a:t>Longer battery life and lifespan</a:t>
             </a:r>
             <a:br/>
             <a:pPr indent="0" marL="0">
               <a:spcAft>
-                <a:spcPts val="1000"/>
+                <a:spcPts val="800"/>
               </a:spcAft>
               <a:buNone/>
             </a:pPr>
@@ -7026,14 +7026,14 @@
                 <a:ea typeface="Microsoft YaHei" pitchFamily="34" charset="-122"/>
                 <a:cs typeface="Microsoft YaHei" pitchFamily="34" charset="-120"/>
               </a:rPr>
-              <a:t>单次充电续航更长</a:t>
+              <a:t>续航更长，电池寿命更长</a:t>
             </a:r>
             <a:endParaRPr lang="en-US" sz="1400" dirty="0"/>
           </a:p>
           <a:p>
             <a:pPr indent="0" marL="0">
               <a:spcAft>
-                <a:spcPts val="1000"/>
+                <a:spcPts val="800"/>
               </a:spcAft>
               <a:buNone/>
             </a:pPr>
@@ -7043,12 +7043,12 @@
                   <a:schemeClr val="bg1"/>
                 </a:solidFill>
               </a:rPr>
-              <a:t>Longer battery lifespan</a:t>
+              <a:t>Fixed-cable adapter as standard</a:t>
             </a:r>
             <a:br/>
             <a:pPr indent="0" marL="0">
               <a:spcAft>
-                <a:spcPts val="1000"/>
+                <a:spcPts val="800"/>
               </a:spcAft>
               <a:buNone/>
             </a:pPr>
@@ -7061,41 +7061,74 @@
                 <a:ea typeface="Microsoft YaHei" pitchFamily="34" charset="-122"/>
                 <a:cs typeface="Microsoft YaHei" pitchFamily="34" charset="-120"/>
               </a:rPr>
-              <a:t>电池使用寿命更长</a:t>
-            </a:r>
-            <a:endParaRPr lang="en-US" sz="1400" dirty="0"/>
-          </a:p>
-          <a:p>
-            <a:pPr indent="0" marL="0">
-              <a:spcAft>
-                <a:spcPts val="1000"/>
-              </a:spcAft>
-              <a:buNone/>
-            </a:pPr>
-            <a:r>
-              <a:rPr lang="en-US" sz="1400" dirty="0">
-                <a:solidFill>
-                  <a:schemeClr val="bg1"/>
-                </a:solidFill>
-              </a:rPr>
-              <a:t>Fewer defects and returns</a:t>
+              <a:t>今后标配线缆固定的一体式适配器</a:t>
             </a:r>
             <a:br/>
             <a:pPr indent="0" marL="0">
               <a:spcAft>
-                <a:spcPts val="1000"/>
-              </a:spcAft>
-              <a:buNone/>
-            </a:pPr>
-            <a:r>
-              <a:rPr lang="en-US" sz="1300" dirty="0">
-                <a:solidFill>
-                  <a:schemeClr val="accent3"/>
+                <a:spcPts val="800"/>
+              </a:spcAft>
+              <a:buNone/>
+            </a:pPr>
+            <a:r>
+              <a:rPr lang="en-US" sz="1100" dirty="0">
+                <a:solidFill>
+                  <a:schemeClr val="accent2"/>
+                </a:solidFill>
+              </a:rPr>
+              <a:t>So the right adapter is always used</a:t>
+            </a:r>
+            <a:br/>
+            <a:pPr indent="0" marL="0">
+              <a:spcAft>
+                <a:spcPts val="800"/>
+              </a:spcAft>
+              <a:buNone/>
+            </a:pPr>
+            <a:r>
+              <a:rPr lang="en-US" sz="1100" dirty="0">
+                <a:solidFill>
+                  <a:schemeClr val="accent2"/>
                 </a:solidFill>
                 <a:latin typeface="Microsoft YaHei" pitchFamily="34" charset="0"/>
                 <a:ea typeface="Microsoft YaHei" pitchFamily="34" charset="-122"/>
                 <a:cs typeface="Microsoft YaHei" pitchFamily="34" charset="-120"/>
               </a:rPr>
+              <a:t>确保客户始终使用与设备匹配的适配器</a:t>
+            </a:r>
+            <a:endParaRPr lang="en-US" sz="1400" dirty="0"/>
+          </a:p>
+          <a:p>
+            <a:pPr indent="0" marL="0">
+              <a:spcAft>
+                <a:spcPts val="800"/>
+              </a:spcAft>
+              <a:buNone/>
+            </a:pPr>
+            <a:r>
+              <a:rPr lang="en-US" sz="1400" dirty="0">
+                <a:solidFill>
+                  <a:schemeClr val="bg1"/>
+                </a:solidFill>
+              </a:rPr>
+              <a:t>Fewer defects and returns</a:t>
+            </a:r>
+            <a:br/>
+            <a:pPr indent="0" marL="0">
+              <a:spcAft>
+                <a:spcPts val="800"/>
+              </a:spcAft>
+              <a:buNone/>
+            </a:pPr>
+            <a:r>
+              <a:rPr lang="en-US" sz="1300" dirty="0">
+                <a:solidFill>
+                  <a:schemeClr val="accent3"/>
+                </a:solidFill>
+                <a:latin typeface="Microsoft YaHei" pitchFamily="34" charset="0"/>
+                <a:ea typeface="Microsoft YaHei" pitchFamily="34" charset="-122"/>
+                <a:cs typeface="Microsoft YaHei" pitchFamily="34" charset="-120"/>
+              </a:rPr>
               <a:t>减少故障和退货</a:t>
             </a:r>
             <a:endParaRPr lang="en-US" sz="1400" dirty="0"/>
@@ -7111,11 +7144,11 @@
         <p:spPr>
           <a:xfrm>
             <a:off x="4338218" y="1755648"/>
-            <a:ext cx="3515258" cy="3401568"/>
+            <a:ext cx="3515258" cy="3639312"/>
           </a:xfrm>
           <a:prstGeom prst="roundRect">
             <a:avLst>
-              <a:gd name="adj" fmla="val 4301"/>
+              <a:gd name="adj" fmla="val 4162"/>
             </a:avLst>
           </a:prstGeom>
           <a:solidFill>
@@ -7295,7 +7328,7 @@
         <p:spPr>
           <a:xfrm>
             <a:off x="4612538" y="3474720"/>
-            <a:ext cx="3058058" cy="1627632"/>
+            <a:ext cx="3058058" cy="1828800"/>
           </a:xfrm>
           <a:prstGeom prst="rect">
             <a:avLst/>
@@ -7309,7 +7342,7 @@
           <a:p>
             <a:pPr indent="0" marL="0">
               <a:spcAft>
-                <a:spcPts val="1000"/>
+                <a:spcPts val="800"/>
               </a:spcAft>
               <a:buNone/>
             </a:pPr>
@@ -7324,7 +7357,7 @@
             <a:br/>
             <a:pPr indent="0" marL="0">
               <a:spcAft>
-                <a:spcPts val="1000"/>
+                <a:spcPts val="800"/>
               </a:spcAft>
               <a:buNone/>
             </a:pPr>
@@ -7344,7 +7377,7 @@
           <a:p>
             <a:pPr indent="0" marL="0">
               <a:spcAft>
-                <a:spcPts val="1000"/>
+                <a:spcPts val="800"/>
               </a:spcAft>
               <a:buNone/>
             </a:pPr>
@@ -7359,7 +7392,7 @@
             <a:br/>
             <a:pPr indent="0" marL="0">
               <a:spcAft>
-                <a:spcPts val="1000"/>
+                <a:spcPts val="800"/>
               </a:spcAft>
               <a:buNone/>
             </a:pPr>
@@ -7379,7 +7412,7 @@
           <a:p>
             <a:pPr indent="0" marL="0">
               <a:spcAft>
-                <a:spcPts val="1000"/>
+                <a:spcPts val="800"/>
               </a:spcAft>
               <a:buNone/>
             </a:pPr>
@@ -7394,7 +7427,7 @@
             <a:br/>
             <a:pPr indent="0" marL="0">
               <a:spcAft>
-                <a:spcPts val="1000"/>
+                <a:spcPts val="800"/>
               </a:spcAft>
               <a:buNone/>
             </a:pPr>
@@ -7422,11 +7455,11 @@
         <p:spPr>
           <a:xfrm>
             <a:off x="8127797" y="1755648"/>
-            <a:ext cx="3515258" cy="3401568"/>
+            <a:ext cx="3515258" cy="3639312"/>
           </a:xfrm>
           <a:prstGeom prst="roundRect">
             <a:avLst>
-              <a:gd name="adj" fmla="val 4301"/>
+              <a:gd name="adj" fmla="val 4162"/>
             </a:avLst>
           </a:prstGeom>
           <a:solidFill>
@@ -7606,7 +7639,7 @@
         <p:spPr>
           <a:xfrm>
             <a:off x="8402117" y="3474720"/>
-            <a:ext cx="3058058" cy="1627632"/>
+            <a:ext cx="3058058" cy="1828800"/>
           </a:xfrm>
           <a:prstGeom prst="rect">
             <a:avLst/>
@@ -7620,7 +7653,7 @@
           <a:p>
             <a:pPr indent="0" marL="0">
               <a:spcAft>
-                <a:spcPts val="1000"/>
+                <a:spcPts val="800"/>
               </a:spcAft>
               <a:buNone/>
             </a:pPr>
@@ -7635,7 +7668,7 @@
             <a:br/>
             <a:pPr indent="0" marL="0">
               <a:spcAft>
-                <a:spcPts val="1000"/>
+                <a:spcPts val="800"/>
               </a:spcAft>
               <a:buNone/>
             </a:pPr>
@@ -7655,7 +7688,7 @@
           <a:p>
             <a:pPr indent="0" marL="0">
               <a:spcAft>
-                <a:spcPts val="1000"/>
+                <a:spcPts val="800"/>
               </a:spcAft>
               <a:buNone/>
             </a:pPr>
@@ -7670,7 +7703,7 @@
             <a:br/>
             <a:pPr indent="0" marL="0">
               <a:spcAft>
-                <a:spcPts val="1000"/>
+                <a:spcPts val="800"/>
               </a:spcAft>
               <a:buNone/>
             </a:pPr>
@@ -7690,7 +7723,7 @@
           <a:p>
             <a:pPr indent="0" marL="0">
               <a:spcAft>
-                <a:spcPts val="1000"/>
+                <a:spcPts val="800"/>
               </a:spcAft>
               <a:buNone/>
             </a:pPr>
@@ -7705,7 +7738,7 @@
             <a:br/>
             <a:pPr indent="0" marL="0">
               <a:spcAft>
-                <a:spcPts val="1000"/>
+                <a:spcPts val="800"/>
               </a:spcAft>
               <a:buNone/>
             </a:pPr>
@@ -7732,7 +7765,7 @@
         </p:nvSpPr>
         <p:spPr>
           <a:xfrm>
-            <a:off x="548640" y="5394960"/>
+            <a:off x="548640" y="5559552"/>
             <a:ext cx="11094415" cy="621792"/>
           </a:xfrm>
           <a:prstGeom prst="rect">

--- a/presentaties/fabrieksbezoek-china-2026/uitvoer/Wellshave_Factory_Visit_FANKE.pptx
+++ b/presentaties/fabrieksbezoek-china-2026/uitvoer/Wellshave_Factory_Visit_FANKE.pptx
@@ -13,9 +13,10 @@
     <p:sldId id="261" r:id="rId7"/>
     <p:sldId id="262" r:id="rId8"/>
     <p:sldId id="263" r:id="rId9"/>
+    <p:sldId id="264" r:id="rId10"/>
   </p:sldIdLst>
   <p:notesMasterIdLst>
-    <p:notesMasterId r:id="rId10"/>
+    <p:notesMasterId r:id="rId11"/>
   </p:notesMasterIdLst>
   <p:sldSz cx="12192000" cy="6858000"/>
   <p:notesSz cx="6858000" cy="12192000"/>
@@ -114,28 +115,33 @@
   <p:extLst>
     <p:ext uri="{521415D9-36F7-43E2-AB2F-B90AF26B5E84}">
       <p14:sectionLst xmlns:p14="http://schemas.microsoft.com/office/powerpoint/2010/main">
-        <p14:section name="Introduction" id="{6cab8bc2-5ac3-6738-9161-cab698a43633}">
+        <p14:section name="Introduction" id="{53ff374a-2f9a-195a-8628-b59511299e76}">
           <p14:sldIdLst>
             <p14:sldId id="256"/>
           </p14:sldIdLst>
         </p14:section>
-        <p14:section name="About Wellshave" id="{58eb8cab-391a-bcbc-fdd3-9becfb289b83}">
+        <p14:section name="About Wellshave" id="{3d01a6c5-f89b-9c31-d751-2893ef61b39b}">
           <p14:sldIdLst>
             <p14:sldId id="257"/>
             <p14:sldId id="258"/>
           </p14:sldIdLst>
         </p14:section>
-        <p14:section name="The visit" id="{420365e4-7c7d-7d71-53cb-ebfceb4af7bf}">
+        <p14:section name="The visit" id="{a4ca6d59-a039-5975-788f-4029d842120f}">
           <p14:sldIdLst>
             <p14:sldId id="259"/>
             <p14:sldId id="260"/>
-            <p14:sldId id="261"/>
           </p14:sldIdLst>
         </p14:section>
-        <p14:section name="Our products with you" id="{83729c62-228b-a7f4-4102-b4ac1bef250b}">
+        <p14:section name="Your products" id="{aafb3f6b-58e8-1e91-9908-1a3baf9a52a8}">
           <p14:sldIdLst>
+            <p14:sldId id="261"/>
             <p14:sldId id="262"/>
+          </p14:sldIdLst>
+        </p14:section>
+        <p14:section name="Working together" id="{e76117a3-a1b2-7b15-6ef6-516005be7756}">
+          <p14:sldIdLst>
             <p14:sldId id="263"/>
+            <p14:sldId id="264"/>
           </p14:sldIdLst>
         </p14:section>
       </p14:sectionLst>
@@ -982,7 +988,7 @@
           <a:p>
             <a:r>
               <a:rPr lang="en-US" dirty="0"/>
-              <a:t>Fixed-cable adapter: from now on every device ships with a charger whose cable is fixed to the adapter, so customers always charge with the right adapter for that device. Wrong adapters damage batteries and lead to returns.</a:t>
+              <a:t>Only the products we buy through this partner. Sales are bol.com units (about 80% of our revenue).</a:t>
             </a:r>
             <a:endParaRPr lang="en-US" dirty="0"/>
           </a:p>
@@ -1070,7 +1076,7 @@
           <a:p>
             <a:r>
               <a:rPr lang="en-US" dirty="0"/>
-              <a:t>Fill in the products and volumes for this factory before sharing.</a:t>
+              <a:t>Themes are tagged by hand from the bol.com review texts. Quotes are translated from Dutch.</a:t>
             </a:r>
             <a:endParaRPr lang="en-US" dirty="0"/>
           </a:p>
@@ -1158,7 +1164,7 @@
           <a:p>
             <a:r>
               <a:rPr lang="en-US" dirty="0"/>
-              <a:t/>
+              <a:t>Fixed-cable adapter: from now on every device ships with a charger whose cable is fixed to the adapter, so customers always charge with the right adapter for that device. Wrong adapters damage batteries and lead to returns.</a:t>
             </a:r>
             <a:endParaRPr lang="en-US" dirty="0"/>
           </a:p>
@@ -1182,6 +1188,94 @@
             <a:fld id="{F7021451-1387-4CA6-816F-3879F97B5CBC}" type="slidenum">
               <a:rPr lang="en-US"/>
               <a:t>8</a:t>
+            </a:fld>
+            <a:endParaRPr lang="en-US"/>
+          </a:p>
+        </p:txBody>
+      </p:sp>
+    </p:spTree>
+    <p:extLst>
+      <p:ext uri="{BB962C8B-B14F-4D97-AF65-F5344CB8AC3E}">
+        <p14:creationId xmlns:p14="http://schemas.microsoft.com/office/powerpoint/2010/main" val="1024086991"/>
+      </p:ext>
+    </p:extLst>
+  </p:cSld>
+  <p:clrMapOvr>
+    <a:masterClrMapping/>
+  </p:clrMapOvr>
+</p:notes>
+</file>
+
+<file path=ppt/notesSlides/notesSlide9.xml><?xml version="1.0" encoding="utf-8"?>
+<p:notes xmlns:a="http://schemas.openxmlformats.org/drawingml/2006/main" xmlns:r="http://schemas.openxmlformats.org/officeDocument/2006/relationships" xmlns:p="http://schemas.openxmlformats.org/presentationml/2006/main">
+  <p:cSld>
+    <p:spTree>
+      <p:nvGrpSpPr>
+        <p:cNvPr id="1" name=""/>
+        <p:cNvGrpSpPr/>
+        <p:nvPr/>
+      </p:nvGrpSpPr>
+      <p:grpSpPr>
+        <a:xfrm>
+          <a:off x="0" y="0"/>
+          <a:ext cx="0" cy="0"/>
+          <a:chOff x="0" y="0"/>
+          <a:chExt cx="0" cy="0"/>
+        </a:xfrm>
+      </p:grpSpPr>
+      <p:sp>
+        <p:nvSpPr>
+          <p:cNvPr id="2" name="Slide Image Placeholder 1"/>
+          <p:cNvSpPr>
+            <a:spLocks noGrp="1" noRot="1" noChangeAspect="1"/>
+          </p:cNvSpPr>
+          <p:nvPr>
+            <p:ph type="sldImg"/>
+          </p:nvPr>
+        </p:nvSpPr>
+        <p:spPr/>
+      </p:sp>
+      <p:sp>
+        <p:nvSpPr>
+          <p:cNvPr id="3" name="Notes Placeholder 2"/>
+          <p:cNvSpPr>
+            <a:spLocks noGrp="1"/>
+          </p:cNvSpPr>
+          <p:nvPr>
+            <p:ph type="body" idx="1"/>
+          </p:nvPr>
+        </p:nvSpPr>
+        <p:spPr/>
+        <p:txBody>
+          <a:bodyPr/>
+          <a:lstStyle/>
+          <a:p>
+            <a:r>
+              <a:rPr lang="en-US" dirty="0"/>
+              <a:t/>
+            </a:r>
+            <a:endParaRPr lang="en-US" dirty="0"/>
+          </a:p>
+        </p:txBody>
+      </p:sp>
+      <p:sp>
+        <p:nvSpPr>
+          <p:cNvPr id="4" name="Slide Number Placeholder 3"/>
+          <p:cNvSpPr>
+            <a:spLocks noGrp="1"/>
+          </p:cNvSpPr>
+          <p:nvPr>
+            <p:ph type="sldNum" sz="quarter" idx="10"/>
+          </p:nvPr>
+        </p:nvSpPr>
+        <p:spPr/>
+        <p:txBody>
+          <a:bodyPr/>
+          <a:lstStyle/>
+          <a:p>
+            <a:fld id="{F7021451-1387-4CA6-816F-3879F97B5CBC}" type="slidenum">
+              <a:rPr lang="en-US"/>
+              <a:t>9</a:t>
             </a:fld>
             <a:endParaRPr lang="en-US"/>
           </a:p>
@@ -1994,7 +2088,7 @@
       </p:pic>
       <p:pic>
         <p:nvPicPr>
-          <p:cNvPr id="3" name="Logo" descr="/home/user/design/presentaties/fabrieksbezoek-china-2026/assets/logo_light.png">    </p:cNvPr>
+          <p:cNvPr id="3" name="Logo" descr="Wellshave logo">    </p:cNvPr>
           <p:cNvPicPr>
             <a:picLocks noChangeAspect="1"/>
           </p:cNvPicPr>
@@ -2244,14 +2338,14 @@
       </p:sp>
       <p:sp>
         <p:nvSpPr>
-          <p:cNvPr id="8" name="Visit"/>
+          <p:cNvPr id="8" name="Prepared for"/>
           <p:cNvSpPr txBox="1"/>
           <p:nvPr/>
         </p:nvSpPr>
         <p:spPr>
           <a:xfrm>
-            <a:off x="685800" y="5806440"/>
-            <a:ext cx="5486400" cy="548640"/>
+            <a:off x="685800" y="5394960"/>
+            <a:ext cx="5486400" cy="1051560"/>
           </a:xfrm>
           <a:prstGeom prst="rect">
             <a:avLst/>
@@ -2270,12 +2364,12 @@
               <a:buNone/>
             </a:pPr>
             <a:r>
-              <a:rPr lang="en-US" sz="1200" dirty="0">
-                <a:solidFill>
-                  <a:schemeClr val="accent3"/>
-                </a:solidFill>
-              </a:rPr>
-              <a:t>Prepared for  </a:t>
+              <a:rPr lang="en-US" sz="1000" b="1" spc="300" kern="0" dirty="0">
+                <a:solidFill>
+                  <a:schemeClr val="accent2"/>
+                </a:solidFill>
+              </a:rPr>
+              <a:t>PREPARED FOR</a:t>
             </a:r>
             <a:pPr indent="0" marL="0">
               <a:spcAft>
@@ -2284,47 +2378,19 @@
               <a:buNone/>
             </a:pPr>
             <a:r>
-              <a:rPr lang="en-US" sz="1200" b="1" dirty="0">
-                <a:solidFill>
-                  <a:schemeClr val="bg1"/>
-                </a:solidFill>
-              </a:rPr>
-              <a:t>FANKE</a:t>
-            </a:r>
-            <a:pPr indent="0" marL="0">
-              <a:spcAft>
-                <a:spcPts val="300"/>
-              </a:spcAft>
-              <a:buNone/>
-            </a:pPr>
-            <a:r>
-              <a:rPr lang="en-US" sz="1200" dirty="0">
-                <a:solidFill>
-                  <a:schemeClr val="accent3"/>
-                </a:solidFill>
-              </a:rPr>
-              <a:t>   ·   October 2026</a:t>
-            </a:r>
-            <a:endParaRPr lang="en-US" sz="1200" dirty="0"/>
-          </a:p>
-          <a:p>
-            <a:pPr indent="0" marL="0">
-              <a:spcAft>
-                <a:spcPts val="300"/>
-              </a:spcAft>
-              <a:buNone/>
-            </a:pPr>
-            <a:r>
-              <a:rPr lang="en-US" sz="1200" dirty="0">
-                <a:solidFill>
-                  <a:schemeClr val="accent3"/>
+              <a:rPr lang="en-US" sz="1000" b="1" dirty="0">
+                <a:solidFill>
+                  <a:schemeClr val="accent2"/>
                 </a:solidFill>
                 <a:latin typeface="Microsoft YaHei" pitchFamily="34" charset="0"/>
                 <a:ea typeface="Microsoft YaHei" pitchFamily="34" charset="-122"/>
                 <a:cs typeface="Microsoft YaHei" pitchFamily="34" charset="-120"/>
               </a:rPr>
-              <a:t>拜访工厂：</a:t>
-            </a:r>
+              <a:t>   ·   拜访对象</a:t>
+            </a:r>
+            <a:endParaRPr lang="en-US" sz="1000" dirty="0"/>
+          </a:p>
+          <a:p>
             <a:pPr indent="0" marL="0">
               <a:spcAft>
                 <a:spcPts val="300"/>
@@ -2332,13 +2398,16 @@
               <a:buNone/>
             </a:pPr>
             <a:r>
-              <a:rPr lang="en-US" sz="1200" b="1" dirty="0">
+              <a:rPr lang="en-US" sz="1300" b="1" dirty="0">
                 <a:solidFill>
                   <a:schemeClr val="bg1"/>
                 </a:solidFill>
               </a:rPr>
-              <a:t>FANKE</a:t>
-            </a:r>
+              <a:t>Wenzhou Fanke Electric Appliance Co., Ltd.</a:t>
+            </a:r>
+            <a:endParaRPr lang="en-US" sz="1000" dirty="0"/>
+          </a:p>
+          <a:p>
             <a:pPr indent="0" marL="0">
               <a:spcAft>
                 <a:spcPts val="300"/>
@@ -2354,9 +2423,60 @@
                 <a:ea typeface="Microsoft YaHei" pitchFamily="34" charset="-122"/>
                 <a:cs typeface="Microsoft YaHei" pitchFamily="34" charset="-120"/>
               </a:rPr>
+              <a:t>温州凡科电器有限公司</a:t>
+            </a:r>
+            <a:pPr indent="0" marL="0">
+              <a:spcAft>
+                <a:spcPts val="300"/>
+              </a:spcAft>
+              <a:buNone/>
+            </a:pPr>
+            <a:r>
+              <a:rPr lang="en-US" sz="1200" dirty="0">
+                <a:solidFill>
+                  <a:schemeClr val="accent3"/>
+                </a:solidFill>
+                <a:latin typeface="Microsoft YaHei" pitchFamily="34" charset="0"/>
+                <a:ea typeface="Microsoft YaHei" pitchFamily="34" charset="-122"/>
+                <a:cs typeface="Microsoft YaHei" pitchFamily="34" charset="-120"/>
+              </a:rPr>
+              <a:t>   ·   He Ting 何婷</a:t>
+            </a:r>
+            <a:endParaRPr lang="en-US" sz="1000" dirty="0"/>
+          </a:p>
+          <a:p>
+            <a:pPr indent="0" marL="0">
+              <a:spcAft>
+                <a:spcPts val="300"/>
+              </a:spcAft>
+              <a:buNone/>
+            </a:pPr>
+            <a:r>
+              <a:rPr lang="en-US" sz="1100" dirty="0">
+                <a:solidFill>
+                  <a:schemeClr val="accent3"/>
+                </a:solidFill>
+              </a:rPr>
+              <a:t>October 2026</a:t>
+            </a:r>
+            <a:pPr indent="0" marL="0">
+              <a:spcAft>
+                <a:spcPts val="300"/>
+              </a:spcAft>
+              <a:buNone/>
+            </a:pPr>
+            <a:r>
+              <a:rPr lang="en-US" sz="1100" dirty="0">
+                <a:solidFill>
+                  <a:schemeClr val="accent3"/>
+                </a:solidFill>
+                <a:latin typeface="Microsoft YaHei" pitchFamily="34" charset="0"/>
+                <a:ea typeface="Microsoft YaHei" pitchFamily="34" charset="-122"/>
+                <a:cs typeface="Microsoft YaHei" pitchFamily="34" charset="-120"/>
+              </a:rPr>
               <a:t>   ·   2026 年 10 月</a:t>
             </a:r>
-            <a:endParaRPr lang="en-US" sz="1200" dirty="0"/>
+            <a:endParaRPr lang="en-US" sz="1000" dirty="0"/>
           </a:p>
         </p:txBody>
       </p:sp>
@@ -3037,7 +3157,7 @@
                   <a:schemeClr val="accent6"/>
                 </a:solidFill>
               </a:rPr>
-              <a:t>Founded</a:t>
+              <a:t>Founded in Helmond (NL)</a:t>
             </a:r>
             <a:endParaRPr lang="en-US" sz="1100" dirty="0"/>
           </a:p>
@@ -3054,7 +3174,7 @@
                 <a:ea typeface="Microsoft YaHei" pitchFamily="34" charset="-122"/>
                 <a:cs typeface="Microsoft YaHei" pitchFamily="34" charset="-120"/>
               </a:rPr>
-              <a:t>成立年份</a:t>
+              <a:t>成立于荷兰海尔蒙德</a:t>
             </a:r>
             <a:endParaRPr lang="en-US" sz="1100" dirty="0"/>
           </a:p>
@@ -4839,14 +4959,14 @@
               <a:buNone/>
             </a:pPr>
             <a:r>
-              <a:rPr lang="en-US" sz="2200" b="1" dirty="0">
+              <a:rPr lang="en-US" sz="2000" b="1" dirty="0">
                 <a:solidFill>
                   <a:schemeClr val="tx1"/>
                 </a:solidFill>
               </a:rPr>
               <a:t>Dustin Gibson</a:t>
             </a:r>
-            <a:endParaRPr lang="en-US" sz="2200" dirty="0"/>
+            <a:endParaRPr lang="en-US" sz="2000" dirty="0"/>
           </a:p>
         </p:txBody>
       </p:sp>
@@ -5097,7 +5217,7 @@
                   <a:schemeClr val="tx2"/>
                 </a:solidFill>
               </a:rPr>
-              <a:t>W</a:t>
+              <a:t>WG</a:t>
             </a:r>
             <a:endParaRPr lang="en-US" sz="2400" dirty="0"/>
           </a:p>
@@ -5128,14 +5248,14 @@
               <a:buNone/>
             </a:pPr>
             <a:r>
-              <a:rPr lang="en-US" sz="2200" b="1" dirty="0">
+              <a:rPr lang="en-US" sz="2000" b="1" dirty="0">
                 <a:solidFill>
                   <a:schemeClr val="tx1"/>
                 </a:solidFill>
               </a:rPr>
-              <a:t>Willem</a:t>
-            </a:r>
-            <a:endParaRPr lang="en-US" sz="2200" dirty="0"/>
+              <a:t>Willem de Groot</a:t>
+            </a:r>
+            <a:endParaRPr lang="en-US" sz="2000" dirty="0"/>
           </a:p>
         </p:txBody>
       </p:sp>
@@ -5417,14 +5537,14 @@
               <a:buNone/>
             </a:pPr>
             <a:r>
-              <a:rPr lang="en-US" sz="2200" b="1" dirty="0">
+              <a:rPr lang="en-US" sz="2000" b="1" dirty="0">
                 <a:solidFill>
                   <a:schemeClr val="tx1"/>
                 </a:solidFill>
               </a:rPr>
               <a:t>Leo</a:t>
             </a:r>
-            <a:endParaRPr lang="en-US" sz="2200" dirty="0"/>
+            <a:endParaRPr lang="en-US" sz="2000" dirty="0"/>
           </a:p>
         </p:txBody>
       </p:sp>
@@ -6741,10 +6861,10 @@
             <a:r>
               <a:rPr lang="en-US" sz="3200" b="1" dirty="0">
                 <a:solidFill>
-                  <a:schemeClr val="bg1"/>
-                </a:solidFill>
-              </a:rPr>
-              <a:t>What we want to improve together</a:t>
+                  <a:schemeClr val="tx1"/>
+                </a:solidFill>
+              </a:rPr>
+              <a:t>Your products at Wellshave</a:t>
             </a:r>
             <a:endParaRPr lang="en-US" sz="3200" dirty="0"/>
           </a:p>
@@ -6779,1246 +6899,41 @@
             <a:r>
               <a:rPr lang="en-US" sz="2000" b="1" dirty="0">
                 <a:solidFill>
-                  <a:schemeClr val="accent2"/>
+                  <a:schemeClr val="accent1"/>
                 </a:solidFill>
                 <a:latin typeface="Microsoft YaHei" pitchFamily="34" charset="0"/>
                 <a:ea typeface="Microsoft YaHei" pitchFamily="34" charset="-122"/>
                 <a:cs typeface="Microsoft YaHei" pitchFamily="34" charset="-120"/>
               </a:rPr>
-              <a:t>我们希望共同改进的方向</a:t>
-            </a:r>
-            <a:endParaRPr lang="en-US" sz="2000" dirty="0"/>
-          </a:p>
-        </p:txBody>
-      </p:sp>
-      <p:sp>
-        <p:nvSpPr>
-          <p:cNvPr id="4" name="Priority card 1"/>
-          <p:cNvSpPr/>
-          <p:nvPr/>
-        </p:nvSpPr>
-        <p:spPr>
-          <a:xfrm>
-            <a:off x="548640" y="1755648"/>
-            <a:ext cx="3515258" cy="3639312"/>
-          </a:xfrm>
-          <a:prstGeom prst="roundRect">
-            <a:avLst>
-              <a:gd name="adj" fmla="val 4162"/>
-            </a:avLst>
-          </a:prstGeom>
-          <a:solidFill>
-            <a:srgbClr val="24221F"/>
-          </a:solidFill>
-          <a:ln/>
-        </p:spPr>
-      </p:sp>
-      <p:sp>
-        <p:nvSpPr>
-          <p:cNvPr id="5" name="Priority badge 1"/>
-          <p:cNvSpPr/>
-          <p:nvPr/>
-        </p:nvSpPr>
-        <p:spPr>
-          <a:xfrm>
-            <a:off x="822960" y="2029968"/>
-            <a:ext cx="658368" cy="658368"/>
-          </a:xfrm>
-          <a:prstGeom prst="ellipse">
-            <a:avLst/>
-          </a:prstGeom>
-          <a:solidFill>
-            <a:schemeClr val="accent2"/>
-          </a:solidFill>
-          <a:ln/>
-        </p:spPr>
-      </p:sp>
-      <p:pic>
-        <p:nvPicPr>
-          <p:cNvPr id="6" name="Priority icon 1" descr="preencoded.png">    </p:cNvPr>
-          <p:cNvPicPr>
-            <a:picLocks noChangeAspect="1"/>
-          </p:cNvPicPr>
-          <p:nvPr/>
-        </p:nvPicPr>
-        <p:blipFill>
-          <a:blip r:embed="rId1"/>
-          <a:stretch>
-            <a:fillRect/>
-          </a:stretch>
-        </p:blipFill>
-        <p:spPr>
-          <a:xfrm>
-            <a:off x="969264" y="2176272"/>
-            <a:ext cx="365760" cy="365760"/>
-          </a:xfrm>
-          <a:prstGeom prst="rect">
-            <a:avLst/>
-          </a:prstGeom>
-        </p:spPr>
-      </p:pic>
-      <p:sp>
-        <p:nvSpPr>
-          <p:cNvPr id="7" name="Priority title 1"/>
-          <p:cNvSpPr txBox="1"/>
-          <p:nvPr/>
-        </p:nvSpPr>
-        <p:spPr>
-          <a:xfrm>
-            <a:off x="1645920" y="1993392"/>
-            <a:ext cx="2235098" cy="777240"/>
-          </a:xfrm>
-          <a:prstGeom prst="rect">
-            <a:avLst/>
-          </a:prstGeom>
-          <a:noFill/>
-          <a:ln/>
-        </p:spPr>
-        <p:txBody>
-          <a:bodyPr wrap="square" lIns="0" tIns="0" rIns="0" bIns="0" rtlCol="0" anchor="t"/>
-          <a:lstStyle/>
-          <a:p>
-            <a:pPr indent="0" marL="0">
-              <a:spcAft>
-                <a:spcPts val="100"/>
-              </a:spcAft>
+              <a:t>贵司产品在 </a:t>
+            </a:r>
+            <a:pPr algn="l" indent="0" marL="0">
               <a:buNone/>
             </a:pPr>
             <a:r>
               <a:rPr lang="en-US" sz="2000" b="1" dirty="0">
                 <a:solidFill>
-                  <a:schemeClr val="bg1"/>
-                </a:solidFill>
-              </a:rPr>
-              <a:t>Better quality</a:t>
-            </a:r>
-            <a:endParaRPr lang="en-US" sz="2000" dirty="0"/>
-          </a:p>
-          <a:p>
-            <a:pPr indent="0" marL="0">
-              <a:spcAft>
-                <a:spcPts val="100"/>
-              </a:spcAft>
-              <a:buNone/>
-            </a:pPr>
-            <a:r>
-              <a:rPr lang="en-US" sz="1700" b="1" dirty="0">
-                <a:solidFill>
-                  <a:schemeClr val="accent2"/>
+                  <a:schemeClr val="accent1"/>
+                </a:solidFill>
+                <a:latin typeface="Montserrat" pitchFamily="34" charset="0"/>
+                <a:ea typeface="Montserrat" pitchFamily="34" charset="-122"/>
+                <a:cs typeface="Montserrat" pitchFamily="34" charset="-120"/>
+              </a:rPr>
+              <a:t>Wellshave</a:t>
+            </a:r>
+            <a:pPr algn="l" indent="0" marL="0">
+              <a:buNone/>
+            </a:pPr>
+            <a:r>
+              <a:rPr lang="en-US" sz="2000" b="1" dirty="0">
+                <a:solidFill>
+                  <a:schemeClr val="accent1"/>
                 </a:solidFill>
                 <a:latin typeface="Microsoft YaHei" pitchFamily="34" charset="0"/>
                 <a:ea typeface="Microsoft YaHei" pitchFamily="34" charset="-122"/>
                 <a:cs typeface="Microsoft YaHei" pitchFamily="34" charset="-120"/>
               </a:rPr>
-              <a:t>更好的品质</a:t>
-            </a:r>
-            <a:endParaRPr lang="en-US" sz="2000" dirty="0"/>
-          </a:p>
-        </p:txBody>
-      </p:sp>
-      <p:sp>
-        <p:nvSpPr>
-          <p:cNvPr id="8" name="Priority focus 1"/>
-          <p:cNvSpPr txBox="1"/>
-          <p:nvPr/>
-        </p:nvSpPr>
-        <p:spPr>
-          <a:xfrm>
-            <a:off x="822960" y="2871216"/>
-            <a:ext cx="3058058" cy="457200"/>
-          </a:xfrm>
-          <a:prstGeom prst="rect">
-            <a:avLst/>
-          </a:prstGeom>
-          <a:noFill/>
-          <a:ln/>
-        </p:spPr>
-        <p:txBody>
-          <a:bodyPr wrap="square" lIns="0" tIns="0" rIns="0" bIns="0" rtlCol="0" anchor="t"/>
-          <a:lstStyle/>
-          <a:p>
-            <a:pPr indent="0" marL="0">
-              <a:spcAft>
-                <a:spcPts val="100"/>
-              </a:spcAft>
-              <a:buNone/>
-            </a:pPr>
-            <a:r>
-              <a:rPr lang="en-US" sz="1000" b="1" spc="100" kern="0" dirty="0">
-                <a:solidFill>
-                  <a:schemeClr val="accent2"/>
-                </a:solidFill>
-              </a:rPr>
-              <a:t>FOCUS: BATTERIES &amp; CHARGING</a:t>
-            </a:r>
-            <a:endParaRPr lang="en-US" sz="1000" dirty="0"/>
-          </a:p>
-          <a:p>
-            <a:pPr indent="0" marL="0">
-              <a:spcAft>
-                <a:spcPts val="100"/>
-              </a:spcAft>
-              <a:buNone/>
-            </a:pPr>
-            <a:r>
-              <a:rPr lang="en-US" sz="1100" b="1" dirty="0">
-                <a:solidFill>
-                  <a:schemeClr val="accent2"/>
-                </a:solidFill>
-                <a:latin typeface="Microsoft YaHei" pitchFamily="34" charset="0"/>
-                <a:ea typeface="Microsoft YaHei" pitchFamily="34" charset="-122"/>
-                <a:cs typeface="Microsoft YaHei" pitchFamily="34" charset="-120"/>
-              </a:rPr>
-              <a:t>重点：电池与充电</a:t>
-            </a:r>
-            <a:endParaRPr lang="en-US" sz="1000" dirty="0"/>
-          </a:p>
-        </p:txBody>
-      </p:sp>
-      <p:sp>
-        <p:nvSpPr>
-          <p:cNvPr id="9" name="Priority points 1"/>
-          <p:cNvSpPr txBox="1"/>
-          <p:nvPr/>
-        </p:nvSpPr>
-        <p:spPr>
-          <a:xfrm>
-            <a:off x="822960" y="3474720"/>
-            <a:ext cx="3058058" cy="1828800"/>
-          </a:xfrm>
-          <a:prstGeom prst="rect">
-            <a:avLst/>
-          </a:prstGeom>
-          <a:noFill/>
-          <a:ln/>
-        </p:spPr>
-        <p:txBody>
-          <a:bodyPr wrap="square" lIns="0" tIns="0" rIns="0" bIns="0" rtlCol="0" anchor="t"/>
-          <a:lstStyle/>
-          <a:p>
-            <a:pPr indent="0" marL="0">
-              <a:spcAft>
-                <a:spcPts val="800"/>
-              </a:spcAft>
-              <a:buNone/>
-            </a:pPr>
-            <a:r>
-              <a:rPr lang="en-US" sz="1400" dirty="0">
-                <a:solidFill>
-                  <a:schemeClr val="bg1"/>
-                </a:solidFill>
-              </a:rPr>
-              <a:t>Longer battery life and lifespan</a:t>
-            </a:r>
-            <a:br/>
-            <a:pPr indent="0" marL="0">
-              <a:spcAft>
-                <a:spcPts val="800"/>
-              </a:spcAft>
-              <a:buNone/>
-            </a:pPr>
-            <a:r>
-              <a:rPr lang="en-US" sz="1300" dirty="0">
-                <a:solidFill>
-                  <a:schemeClr val="accent3"/>
-                </a:solidFill>
-                <a:latin typeface="Microsoft YaHei" pitchFamily="34" charset="0"/>
-                <a:ea typeface="Microsoft YaHei" pitchFamily="34" charset="-122"/>
-                <a:cs typeface="Microsoft YaHei" pitchFamily="34" charset="-120"/>
-              </a:rPr>
-              <a:t>续航更长，电池寿命更长</a:t>
-            </a:r>
-            <a:endParaRPr lang="en-US" sz="1400" dirty="0"/>
-          </a:p>
-          <a:p>
-            <a:pPr indent="0" marL="0">
-              <a:spcAft>
-                <a:spcPts val="800"/>
-              </a:spcAft>
-              <a:buNone/>
-            </a:pPr>
-            <a:r>
-              <a:rPr lang="en-US" sz="1400" dirty="0">
-                <a:solidFill>
-                  <a:schemeClr val="bg1"/>
-                </a:solidFill>
-              </a:rPr>
-              <a:t>Fixed-cable adapter as standard</a:t>
-            </a:r>
-            <a:br/>
-            <a:pPr indent="0" marL="0">
-              <a:spcAft>
-                <a:spcPts val="800"/>
-              </a:spcAft>
-              <a:buNone/>
-            </a:pPr>
-            <a:r>
-              <a:rPr lang="en-US" sz="1300" dirty="0">
-                <a:solidFill>
-                  <a:schemeClr val="accent3"/>
-                </a:solidFill>
-                <a:latin typeface="Microsoft YaHei" pitchFamily="34" charset="0"/>
-                <a:ea typeface="Microsoft YaHei" pitchFamily="34" charset="-122"/>
-                <a:cs typeface="Microsoft YaHei" pitchFamily="34" charset="-120"/>
-              </a:rPr>
-              <a:t>今后标配线缆固定的一体式适配器</a:t>
-            </a:r>
-            <a:br/>
-            <a:pPr indent="0" marL="0">
-              <a:spcAft>
-                <a:spcPts val="800"/>
-              </a:spcAft>
-              <a:buNone/>
-            </a:pPr>
-            <a:r>
-              <a:rPr lang="en-US" sz="1100" dirty="0">
-                <a:solidFill>
-                  <a:schemeClr val="accent2"/>
-                </a:solidFill>
-              </a:rPr>
-              <a:t>So the right adapter is always used</a:t>
-            </a:r>
-            <a:br/>
-            <a:pPr indent="0" marL="0">
-              <a:spcAft>
-                <a:spcPts val="800"/>
-              </a:spcAft>
-              <a:buNone/>
-            </a:pPr>
-            <a:r>
-              <a:rPr lang="en-US" sz="1100" dirty="0">
-                <a:solidFill>
-                  <a:schemeClr val="accent2"/>
-                </a:solidFill>
-                <a:latin typeface="Microsoft YaHei" pitchFamily="34" charset="0"/>
-                <a:ea typeface="Microsoft YaHei" pitchFamily="34" charset="-122"/>
-                <a:cs typeface="Microsoft YaHei" pitchFamily="34" charset="-120"/>
-              </a:rPr>
-              <a:t>确保客户始终使用与设备匹配的适配器</a:t>
-            </a:r>
-            <a:endParaRPr lang="en-US" sz="1400" dirty="0"/>
-          </a:p>
-          <a:p>
-            <a:pPr indent="0" marL="0">
-              <a:spcAft>
-                <a:spcPts val="800"/>
-              </a:spcAft>
-              <a:buNone/>
-            </a:pPr>
-            <a:r>
-              <a:rPr lang="en-US" sz="1400" dirty="0">
-                <a:solidFill>
-                  <a:schemeClr val="bg1"/>
-                </a:solidFill>
-              </a:rPr>
-              <a:t>Fewer defects and returns</a:t>
-            </a:r>
-            <a:br/>
-            <a:pPr indent="0" marL="0">
-              <a:spcAft>
-                <a:spcPts val="800"/>
-              </a:spcAft>
-              <a:buNone/>
-            </a:pPr>
-            <a:r>
-              <a:rPr lang="en-US" sz="1300" dirty="0">
-                <a:solidFill>
-                  <a:schemeClr val="accent3"/>
-                </a:solidFill>
-                <a:latin typeface="Microsoft YaHei" pitchFamily="34" charset="0"/>
-                <a:ea typeface="Microsoft YaHei" pitchFamily="34" charset="-122"/>
-                <a:cs typeface="Microsoft YaHei" pitchFamily="34" charset="-120"/>
-              </a:rPr>
-              <a:t>减少故障和退货</a:t>
-            </a:r>
-            <a:endParaRPr lang="en-US" sz="1400" dirty="0"/>
-          </a:p>
-        </p:txBody>
-      </p:sp>
-      <p:sp>
-        <p:nvSpPr>
-          <p:cNvPr id="10" name="Priority card 2"/>
-          <p:cNvSpPr/>
-          <p:nvPr/>
-        </p:nvSpPr>
-        <p:spPr>
-          <a:xfrm>
-            <a:off x="4338218" y="1755648"/>
-            <a:ext cx="3515258" cy="3639312"/>
-          </a:xfrm>
-          <a:prstGeom prst="roundRect">
-            <a:avLst>
-              <a:gd name="adj" fmla="val 4162"/>
-            </a:avLst>
-          </a:prstGeom>
-          <a:solidFill>
-            <a:srgbClr val="24221F"/>
-          </a:solidFill>
-          <a:ln/>
-        </p:spPr>
-      </p:sp>
-      <p:sp>
-        <p:nvSpPr>
-          <p:cNvPr id="11" name="Priority badge 2"/>
-          <p:cNvSpPr/>
-          <p:nvPr/>
-        </p:nvSpPr>
-        <p:spPr>
-          <a:xfrm>
-            <a:off x="4612538" y="2029968"/>
-            <a:ext cx="658368" cy="658368"/>
-          </a:xfrm>
-          <a:prstGeom prst="ellipse">
-            <a:avLst/>
-          </a:prstGeom>
-          <a:solidFill>
-            <a:schemeClr val="accent2"/>
-          </a:solidFill>
-          <a:ln/>
-        </p:spPr>
-      </p:sp>
-      <p:pic>
-        <p:nvPicPr>
-          <p:cNvPr id="12" name="Priority icon 2" descr="preencoded.png">    </p:cNvPr>
-          <p:cNvPicPr>
-            <a:picLocks noChangeAspect="1"/>
-          </p:cNvPicPr>
-          <p:nvPr/>
-        </p:nvPicPr>
-        <p:blipFill>
-          <a:blip r:embed="rId2"/>
-          <a:stretch>
-            <a:fillRect/>
-          </a:stretch>
-        </p:blipFill>
-        <p:spPr>
-          <a:xfrm>
-            <a:off x="4758842" y="2176272"/>
-            <a:ext cx="365760" cy="365760"/>
-          </a:xfrm>
-          <a:prstGeom prst="rect">
-            <a:avLst/>
-          </a:prstGeom>
-        </p:spPr>
-      </p:pic>
-      <p:sp>
-        <p:nvSpPr>
-          <p:cNvPr id="13" name="Priority title 2"/>
-          <p:cNvSpPr txBox="1"/>
-          <p:nvPr/>
-        </p:nvSpPr>
-        <p:spPr>
-          <a:xfrm>
-            <a:off x="5435498" y="1993392"/>
-            <a:ext cx="2235098" cy="777240"/>
-          </a:xfrm>
-          <a:prstGeom prst="rect">
-            <a:avLst/>
-          </a:prstGeom>
-          <a:noFill/>
-          <a:ln/>
-        </p:spPr>
-        <p:txBody>
-          <a:bodyPr wrap="square" lIns="0" tIns="0" rIns="0" bIns="0" rtlCol="0" anchor="t"/>
-          <a:lstStyle/>
-          <a:p>
-            <a:pPr indent="0" marL="0">
-              <a:spcAft>
-                <a:spcPts val="100"/>
-              </a:spcAft>
-              <a:buNone/>
-            </a:pPr>
-            <a:r>
-              <a:rPr lang="en-US" sz="2000" b="1" dirty="0">
-                <a:solidFill>
-                  <a:schemeClr val="bg1"/>
-                </a:solidFill>
-              </a:rPr>
-              <a:t>Better prices</a:t>
-            </a:r>
-            <a:endParaRPr lang="en-US" sz="2000" dirty="0"/>
-          </a:p>
-          <a:p>
-            <a:pPr indent="0" marL="0">
-              <a:spcAft>
-                <a:spcPts val="100"/>
-              </a:spcAft>
-              <a:buNone/>
-            </a:pPr>
-            <a:r>
-              <a:rPr lang="en-US" sz="1700" b="1" dirty="0">
-                <a:solidFill>
-                  <a:schemeClr val="accent2"/>
-                </a:solidFill>
-                <a:latin typeface="Microsoft YaHei" pitchFamily="34" charset="0"/>
-                <a:ea typeface="Microsoft YaHei" pitchFamily="34" charset="-122"/>
-                <a:cs typeface="Microsoft YaHei" pitchFamily="34" charset="-120"/>
-              </a:rPr>
-              <a:t>更优的价格</a:t>
-            </a:r>
-            <a:endParaRPr lang="en-US" sz="2000" dirty="0"/>
-          </a:p>
-        </p:txBody>
-      </p:sp>
-      <p:sp>
-        <p:nvSpPr>
-          <p:cNvPr id="14" name="Priority focus 2"/>
-          <p:cNvSpPr txBox="1"/>
-          <p:nvPr/>
-        </p:nvSpPr>
-        <p:spPr>
-          <a:xfrm>
-            <a:off x="4612538" y="2871216"/>
-            <a:ext cx="3058058" cy="457200"/>
-          </a:xfrm>
-          <a:prstGeom prst="rect">
-            <a:avLst/>
-          </a:prstGeom>
-          <a:noFill/>
-          <a:ln/>
-        </p:spPr>
-        <p:txBody>
-          <a:bodyPr wrap="square" lIns="0" tIns="0" rIns="0" bIns="0" rtlCol="0" anchor="t"/>
-          <a:lstStyle/>
-          <a:p>
-            <a:pPr indent="0" marL="0">
-              <a:spcAft>
-                <a:spcPts val="100"/>
-              </a:spcAft>
-              <a:buNone/>
-            </a:pPr>
-            <a:r>
-              <a:rPr lang="en-US" sz="1000" b="1" spc="100" kern="0" dirty="0">
-                <a:solidFill>
-                  <a:schemeClr val="accent2"/>
-                </a:solidFill>
-              </a:rPr>
-              <a:t>FOCUS: CURRENT RANGE</a:t>
-            </a:r>
-            <a:endParaRPr lang="en-US" sz="1000" dirty="0"/>
-          </a:p>
-          <a:p>
-            <a:pPr indent="0" marL="0">
-              <a:spcAft>
-                <a:spcPts val="100"/>
-              </a:spcAft>
-              <a:buNone/>
-            </a:pPr>
-            <a:r>
-              <a:rPr lang="en-US" sz="1100" b="1" dirty="0">
-                <a:solidFill>
-                  <a:schemeClr val="accent2"/>
-                </a:solidFill>
-                <a:latin typeface="Microsoft YaHei" pitchFamily="34" charset="0"/>
-                <a:ea typeface="Microsoft YaHei" pitchFamily="34" charset="-122"/>
-                <a:cs typeface="Microsoft YaHei" pitchFamily="34" charset="-120"/>
-              </a:rPr>
-              <a:t>重点：现有产品</a:t>
-            </a:r>
-            <a:endParaRPr lang="en-US" sz="1000" dirty="0"/>
-          </a:p>
-        </p:txBody>
-      </p:sp>
-      <p:sp>
-        <p:nvSpPr>
-          <p:cNvPr id="15" name="Priority points 2"/>
-          <p:cNvSpPr txBox="1"/>
-          <p:nvPr/>
-        </p:nvSpPr>
-        <p:spPr>
-          <a:xfrm>
-            <a:off x="4612538" y="3474720"/>
-            <a:ext cx="3058058" cy="1828800"/>
-          </a:xfrm>
-          <a:prstGeom prst="rect">
-            <a:avLst/>
-          </a:prstGeom>
-          <a:noFill/>
-          <a:ln/>
-        </p:spPr>
-        <p:txBody>
-          <a:bodyPr wrap="square" lIns="0" tIns="0" rIns="0" bIns="0" rtlCol="0" anchor="t"/>
-          <a:lstStyle/>
-          <a:p>
-            <a:pPr indent="0" marL="0">
-              <a:spcAft>
-                <a:spcPts val="800"/>
-              </a:spcAft>
-              <a:buNone/>
-            </a:pPr>
-            <a:r>
-              <a:rPr lang="en-US" sz="1400" dirty="0">
-                <a:solidFill>
-                  <a:schemeClr val="bg1"/>
-                </a:solidFill>
-              </a:rPr>
-              <a:t>Lower purchase prices</a:t>
-            </a:r>
-            <a:br/>
-            <a:pPr indent="0" marL="0">
-              <a:spcAft>
-                <a:spcPts val="800"/>
-              </a:spcAft>
-              <a:buNone/>
-            </a:pPr>
-            <a:r>
-              <a:rPr lang="en-US" sz="1300" dirty="0">
-                <a:solidFill>
-                  <a:schemeClr val="accent3"/>
-                </a:solidFill>
-                <a:latin typeface="Microsoft YaHei" pitchFamily="34" charset="0"/>
-                <a:ea typeface="Microsoft YaHei" pitchFamily="34" charset="-122"/>
-                <a:cs typeface="Microsoft YaHei" pitchFamily="34" charset="-120"/>
-              </a:rPr>
-              <a:t>降低现有产品的采购价格</a:t>
-            </a:r>
-            <a:endParaRPr lang="en-US" sz="1400" dirty="0"/>
-          </a:p>
-          <a:p>
-            <a:pPr indent="0" marL="0">
-              <a:spcAft>
-                <a:spcPts val="800"/>
-              </a:spcAft>
-              <a:buNone/>
-            </a:pPr>
-            <a:r>
-              <a:rPr lang="en-US" sz="1400" dirty="0">
-                <a:solidFill>
-                  <a:schemeClr val="bg1"/>
-                </a:solidFill>
-              </a:rPr>
-              <a:t>Cost ideas that keep the quality</a:t>
-            </a:r>
-            <a:br/>
-            <a:pPr indent="0" marL="0">
-              <a:spcAft>
-                <a:spcPts val="800"/>
-              </a:spcAft>
-              <a:buNone/>
-            </a:pPr>
-            <a:r>
-              <a:rPr lang="en-US" sz="1300" dirty="0">
-                <a:solidFill>
-                  <a:schemeClr val="accent3"/>
-                </a:solidFill>
-                <a:latin typeface="Microsoft YaHei" pitchFamily="34" charset="0"/>
-                <a:ea typeface="Microsoft YaHei" pitchFamily="34" charset="-122"/>
-                <a:cs typeface="Microsoft YaHei" pitchFamily="34" charset="-120"/>
-              </a:rPr>
-              <a:t>在保证品质前提下的降本方案</a:t>
-            </a:r>
-            <a:endParaRPr lang="en-US" sz="1400" dirty="0"/>
-          </a:p>
-          <a:p>
-            <a:pPr indent="0" marL="0">
-              <a:spcAft>
-                <a:spcPts val="800"/>
-              </a:spcAft>
-              <a:buNone/>
-            </a:pPr>
-            <a:r>
-              <a:rPr lang="en-US" sz="1400" dirty="0">
-                <a:solidFill>
-                  <a:schemeClr val="bg1"/>
-                </a:solidFill>
-              </a:rPr>
-              <a:t>Prices based on 2027 volumes</a:t>
-            </a:r>
-            <a:br/>
-            <a:pPr indent="0" marL="0">
-              <a:spcAft>
-                <a:spcPts val="800"/>
-              </a:spcAft>
-              <a:buNone/>
-            </a:pPr>
-            <a:r>
-              <a:rPr lang="en-US" sz="1300" dirty="0">
-                <a:solidFill>
-                  <a:schemeClr val="accent3"/>
-                </a:solidFill>
-                <a:latin typeface="Microsoft YaHei" pitchFamily="34" charset="0"/>
-                <a:ea typeface="Microsoft YaHei" pitchFamily="34" charset="-122"/>
-                <a:cs typeface="Microsoft YaHei" pitchFamily="34" charset="-120"/>
-              </a:rPr>
-              <a:t>基于 2027 年采购量报价</a:t>
-            </a:r>
-            <a:endParaRPr lang="en-US" sz="1400" dirty="0"/>
-          </a:p>
-        </p:txBody>
-      </p:sp>
-      <p:sp>
-        <p:nvSpPr>
-          <p:cNvPr id="16" name="Priority card 3"/>
-          <p:cNvSpPr/>
-          <p:nvPr/>
-        </p:nvSpPr>
-        <p:spPr>
-          <a:xfrm>
-            <a:off x="8127797" y="1755648"/>
-            <a:ext cx="3515258" cy="3639312"/>
-          </a:xfrm>
-          <a:prstGeom prst="roundRect">
-            <a:avLst>
-              <a:gd name="adj" fmla="val 4162"/>
-            </a:avLst>
-          </a:prstGeom>
-          <a:solidFill>
-            <a:srgbClr val="24221F"/>
-          </a:solidFill>
-          <a:ln/>
-        </p:spPr>
-      </p:sp>
-      <p:sp>
-        <p:nvSpPr>
-          <p:cNvPr id="17" name="Priority badge 3"/>
-          <p:cNvSpPr/>
-          <p:nvPr/>
-        </p:nvSpPr>
-        <p:spPr>
-          <a:xfrm>
-            <a:off x="8402117" y="2029968"/>
-            <a:ext cx="658368" cy="658368"/>
-          </a:xfrm>
-          <a:prstGeom prst="ellipse">
-            <a:avLst/>
-          </a:prstGeom>
-          <a:solidFill>
-            <a:schemeClr val="accent2"/>
-          </a:solidFill>
-          <a:ln/>
-        </p:spPr>
-      </p:sp>
-      <p:pic>
-        <p:nvPicPr>
-          <p:cNvPr id="18" name="Priority icon 3" descr="preencoded.png">    </p:cNvPr>
-          <p:cNvPicPr>
-            <a:picLocks noChangeAspect="1"/>
-          </p:cNvPicPr>
-          <p:nvPr/>
-        </p:nvPicPr>
-        <p:blipFill>
-          <a:blip r:embed="rId3"/>
-          <a:stretch>
-            <a:fillRect/>
-          </a:stretch>
-        </p:blipFill>
-        <p:spPr>
-          <a:xfrm>
-            <a:off x="8548421" y="2176272"/>
-            <a:ext cx="365760" cy="365760"/>
-          </a:xfrm>
-          <a:prstGeom prst="rect">
-            <a:avLst/>
-          </a:prstGeom>
-        </p:spPr>
-      </p:pic>
-      <p:sp>
-        <p:nvSpPr>
-          <p:cNvPr id="19" name="Priority title 3"/>
-          <p:cNvSpPr txBox="1"/>
-          <p:nvPr/>
-        </p:nvSpPr>
-        <p:spPr>
-          <a:xfrm>
-            <a:off x="9225077" y="1993392"/>
-            <a:ext cx="2235098" cy="777240"/>
-          </a:xfrm>
-          <a:prstGeom prst="rect">
-            <a:avLst/>
-          </a:prstGeom>
-          <a:noFill/>
-          <a:ln/>
-        </p:spPr>
-        <p:txBody>
-          <a:bodyPr wrap="square" lIns="0" tIns="0" rIns="0" bIns="0" rtlCol="0" anchor="t"/>
-          <a:lstStyle/>
-          <a:p>
-            <a:pPr indent="0" marL="0">
-              <a:spcAft>
-                <a:spcPts val="100"/>
-              </a:spcAft>
-              <a:buNone/>
-            </a:pPr>
-            <a:r>
-              <a:rPr lang="en-US" sz="2000" b="1" dirty="0">
-                <a:solidFill>
-                  <a:schemeClr val="bg1"/>
-                </a:solidFill>
-              </a:rPr>
-              <a:t>New models</a:t>
-            </a:r>
-            <a:endParaRPr lang="en-US" sz="2000" dirty="0"/>
-          </a:p>
-          <a:p>
-            <a:pPr indent="0" marL="0">
-              <a:spcAft>
-                <a:spcPts val="100"/>
-              </a:spcAft>
-              <a:buNone/>
-            </a:pPr>
-            <a:r>
-              <a:rPr lang="en-US" sz="1700" b="1" dirty="0">
-                <a:solidFill>
-                  <a:schemeClr val="accent2"/>
-                </a:solidFill>
-                <a:latin typeface="Microsoft YaHei" pitchFamily="34" charset="0"/>
-                <a:ea typeface="Microsoft YaHei" pitchFamily="34" charset="-122"/>
-                <a:cs typeface="Microsoft YaHei" pitchFamily="34" charset="-120"/>
-              </a:rPr>
-              <a:t>新款产品</a:t>
-            </a:r>
-            <a:endParaRPr lang="en-US" sz="2000" dirty="0"/>
-          </a:p>
-        </p:txBody>
-      </p:sp>
-      <p:sp>
-        <p:nvSpPr>
-          <p:cNvPr id="20" name="Priority focus 3"/>
-          <p:cNvSpPr txBox="1"/>
-          <p:nvPr/>
-        </p:nvSpPr>
-        <p:spPr>
-          <a:xfrm>
-            <a:off x="8402117" y="2871216"/>
-            <a:ext cx="3058058" cy="457200"/>
-          </a:xfrm>
-          <a:prstGeom prst="rect">
-            <a:avLst/>
-          </a:prstGeom>
-          <a:noFill/>
-          <a:ln/>
-        </p:spPr>
-        <p:txBody>
-          <a:bodyPr wrap="square" lIns="0" tIns="0" rIns="0" bIns="0" rtlCol="0" anchor="t"/>
-          <a:lstStyle/>
-          <a:p>
-            <a:pPr indent="0" marL="0">
-              <a:spcAft>
-                <a:spcPts val="100"/>
-              </a:spcAft>
-              <a:buNone/>
-            </a:pPr>
-            <a:r>
-              <a:rPr lang="en-US" sz="1000" b="1" spc="100" kern="0" dirty="0">
-                <a:solidFill>
-                  <a:schemeClr val="accent2"/>
-                </a:solidFill>
-              </a:rPr>
-              <a:t>FOCUS: CO-DEVELOPMENT</a:t>
-            </a:r>
-            <a:endParaRPr lang="en-US" sz="1000" dirty="0"/>
-          </a:p>
-          <a:p>
-            <a:pPr indent="0" marL="0">
-              <a:spcAft>
-                <a:spcPts val="100"/>
-              </a:spcAft>
-              <a:buNone/>
-            </a:pPr>
-            <a:r>
-              <a:rPr lang="en-US" sz="1100" b="1" dirty="0">
-                <a:solidFill>
-                  <a:schemeClr val="accent2"/>
-                </a:solidFill>
-                <a:latin typeface="Microsoft YaHei" pitchFamily="34" charset="0"/>
-                <a:ea typeface="Microsoft YaHei" pitchFamily="34" charset="-122"/>
-                <a:cs typeface="Microsoft YaHei" pitchFamily="34" charset="-120"/>
-              </a:rPr>
-              <a:t>重点：共同开发</a:t>
-            </a:r>
-            <a:endParaRPr lang="en-US" sz="1000" dirty="0"/>
-          </a:p>
-        </p:txBody>
-      </p:sp>
-      <p:sp>
-        <p:nvSpPr>
-          <p:cNvPr id="21" name="Priority points 3"/>
-          <p:cNvSpPr txBox="1"/>
-          <p:nvPr/>
-        </p:nvSpPr>
-        <p:spPr>
-          <a:xfrm>
-            <a:off x="8402117" y="3474720"/>
-            <a:ext cx="3058058" cy="1828800"/>
-          </a:xfrm>
-          <a:prstGeom prst="rect">
-            <a:avLst/>
-          </a:prstGeom>
-          <a:noFill/>
-          <a:ln/>
-        </p:spPr>
-        <p:txBody>
-          <a:bodyPr wrap="square" lIns="0" tIns="0" rIns="0" bIns="0" rtlCol="0" anchor="t"/>
-          <a:lstStyle/>
-          <a:p>
-            <a:pPr indent="0" marL="0">
-              <a:spcAft>
-                <a:spcPts val="800"/>
-              </a:spcAft>
-              <a:buNone/>
-            </a:pPr>
-            <a:r>
-              <a:rPr lang="en-US" sz="1400" dirty="0">
-                <a:solidFill>
-                  <a:schemeClr val="bg1"/>
-                </a:solidFill>
-              </a:rPr>
-              <a:t>Develop new models together</a:t>
-            </a:r>
-            <a:br/>
-            <a:pPr indent="0" marL="0">
-              <a:spcAft>
-                <a:spcPts val="800"/>
-              </a:spcAft>
-              <a:buNone/>
-            </a:pPr>
-            <a:r>
-              <a:rPr lang="en-US" sz="1300" dirty="0">
-                <a:solidFill>
-                  <a:schemeClr val="accent3"/>
-                </a:solidFill>
-                <a:latin typeface="Microsoft YaHei" pitchFamily="34" charset="0"/>
-                <a:ea typeface="Microsoft YaHei" pitchFamily="34" charset="-122"/>
-                <a:cs typeface="Microsoft YaHei" pitchFamily="34" charset="-120"/>
-              </a:rPr>
-              <a:t>共同开发新款产品</a:t>
-            </a:r>
-            <a:endParaRPr lang="en-US" sz="1400" dirty="0"/>
-          </a:p>
-          <a:p>
-            <a:pPr indent="0" marL="0">
-              <a:spcAft>
-                <a:spcPts val="800"/>
-              </a:spcAft>
-              <a:buNone/>
-            </a:pPr>
-            <a:r>
-              <a:rPr lang="en-US" sz="1400" dirty="0">
-                <a:solidFill>
-                  <a:schemeClr val="bg1"/>
-                </a:solidFill>
-              </a:rPr>
-              <a:t>Upgrades of our best-sellers</a:t>
-            </a:r>
-            <a:br/>
-            <a:pPr indent="0" marL="0">
-              <a:spcAft>
-                <a:spcPts val="800"/>
-              </a:spcAft>
-              <a:buNone/>
-            </a:pPr>
-            <a:r>
-              <a:rPr lang="en-US" sz="1300" dirty="0">
-                <a:solidFill>
-                  <a:schemeClr val="accent3"/>
-                </a:solidFill>
-                <a:latin typeface="Microsoft YaHei" pitchFamily="34" charset="0"/>
-                <a:ea typeface="Microsoft YaHei" pitchFamily="34" charset="-122"/>
-                <a:cs typeface="Microsoft YaHei" pitchFamily="34" charset="-120"/>
-              </a:rPr>
-              <a:t>升级我们的畅销款</a:t>
-            </a:r>
-            <a:endParaRPr lang="en-US" sz="1400" dirty="0"/>
-          </a:p>
-          <a:p>
-            <a:pPr indent="0" marL="0">
-              <a:spcAft>
-                <a:spcPts val="800"/>
-              </a:spcAft>
-              <a:buNone/>
-            </a:pPr>
-            <a:r>
-              <a:rPr lang="en-US" sz="1400" dirty="0">
-                <a:solidFill>
-                  <a:schemeClr val="bg1"/>
-                </a:solidFill>
-              </a:rPr>
-              <a:t>Your newest technology</a:t>
-            </a:r>
-            <a:br/>
-            <a:pPr indent="0" marL="0">
-              <a:spcAft>
-                <a:spcPts val="800"/>
-              </a:spcAft>
-              <a:buNone/>
-            </a:pPr>
-            <a:r>
-              <a:rPr lang="en-US" sz="1300" dirty="0">
-                <a:solidFill>
-                  <a:schemeClr val="accent3"/>
-                </a:solidFill>
-                <a:latin typeface="Microsoft YaHei" pitchFamily="34" charset="0"/>
-                <a:ea typeface="Microsoft YaHei" pitchFamily="34" charset="-122"/>
-                <a:cs typeface="Microsoft YaHei" pitchFamily="34" charset="-120"/>
-              </a:rPr>
-              <a:t>贵司的最新技术</a:t>
-            </a:r>
-            <a:endParaRPr lang="en-US" sz="1400" dirty="0"/>
-          </a:p>
-        </p:txBody>
-      </p:sp>
-      <p:sp>
-        <p:nvSpPr>
-          <p:cNvPr id="22" name="Why it matters"/>
-          <p:cNvSpPr txBox="1"/>
-          <p:nvPr/>
-        </p:nvSpPr>
-        <p:spPr>
-          <a:xfrm>
-            <a:off x="548640" y="5559552"/>
-            <a:ext cx="11094415" cy="621792"/>
-          </a:xfrm>
-          <a:prstGeom prst="rect">
-            <a:avLst/>
-          </a:prstGeom>
-          <a:noFill/>
-          <a:ln/>
-        </p:spPr>
-        <p:txBody>
-          <a:bodyPr wrap="square" lIns="0" tIns="0" rIns="0" bIns="0" rtlCol="0" anchor="t"/>
-          <a:lstStyle/>
-          <a:p>
-            <a:pPr indent="0" marL="0">
-              <a:spcAft>
-                <a:spcPts val="300"/>
-              </a:spcAft>
-              <a:buNone/>
-            </a:pPr>
-            <a:r>
-              <a:rPr lang="en-US" sz="1300" b="1" dirty="0">
-                <a:solidFill>
-                  <a:schemeClr val="accent2"/>
-                </a:solidFill>
-              </a:rPr>
-              <a:t>Why this matters: </a:t>
-            </a:r>
-            <a:pPr indent="0" marL="0">
-              <a:spcAft>
-                <a:spcPts val="300"/>
-              </a:spcAft>
-              <a:buNone/>
-            </a:pPr>
-            <a:r>
-              <a:rPr lang="en-US" sz="1300" dirty="0">
-                <a:solidFill>
-                  <a:schemeClr val="bg1"/>
-                </a:solidFill>
-              </a:rPr>
-              <a:t>our customers get a 100-day trial and a 2-year warranty, so every weak battery becomes a return and a bad review.</a:t>
-            </a:r>
-            <a:endParaRPr lang="en-US" sz="1300" dirty="0"/>
-          </a:p>
-          <a:p>
-            <a:pPr indent="0" marL="0">
-              <a:spcAft>
-                <a:spcPts val="300"/>
-              </a:spcAft>
-              <a:buNone/>
-            </a:pPr>
-            <a:r>
-              <a:rPr lang="en-US" sz="1300" b="1" dirty="0">
-                <a:solidFill>
-                  <a:schemeClr val="accent2"/>
-                </a:solidFill>
-                <a:latin typeface="Microsoft YaHei" pitchFamily="34" charset="0"/>
-                <a:ea typeface="Microsoft YaHei" pitchFamily="34" charset="-122"/>
-                <a:cs typeface="Microsoft YaHei" pitchFamily="34" charset="-120"/>
-              </a:rPr>
-              <a:t>原因：</a:t>
-            </a:r>
-            <a:pPr indent="0" marL="0">
-              <a:spcAft>
-                <a:spcPts val="300"/>
-              </a:spcAft>
-              <a:buNone/>
-            </a:pPr>
-            <a:r>
-              <a:rPr lang="en-US" sz="1300" dirty="0">
-                <a:solidFill>
-                  <a:schemeClr val="accent3"/>
-                </a:solidFill>
-                <a:latin typeface="Microsoft YaHei" pitchFamily="34" charset="0"/>
-                <a:ea typeface="Microsoft YaHei" pitchFamily="34" charset="-122"/>
-                <a:cs typeface="Microsoft YaHei" pitchFamily="34" charset="-120"/>
-              </a:rPr>
-              <a:t>我们为客户提供 100 天试用和 2 年保修，每一个电池问题都会变成退货和差评。</a:t>
-            </a:r>
-            <a:endParaRPr lang="en-US" sz="1300" dirty="0"/>
-          </a:p>
-        </p:txBody>
-      </p:sp>
-      <p:sp>
-        <p:nvSpPr>
-          <p:cNvPr id="25" name="Slide Number Placeholder 0"/>
-          <p:cNvSpPr>
-            <a:spLocks noGrp="1"/>
-          </p:cNvSpPr>
-          <p:nvPr>
-            <p:ph type="sldNum" sz="quarter" idx="4294967295"/>
-          </p:nvPr>
-        </p:nvSpPr>
-        <p:spPr>
-          <a:xfrm>
-            <a:off x="11094415" y="6345936"/>
-            <a:ext cx="548640" cy="274320"/>
-          </a:xfrm>
-          <a:prstGeom prst="rect">
-            <a:avLst/>
-          </a:prstGeom>
-          <a:extLst>
-            <a:ext uri="{C572A759-6A51-4108-AA02-DFA0A04FC94B}">
-              <ma14:wrappingTextBoxFlag xmlns:ma14="http://schemas.microsoft.com/office/mac/drawingml/2011/main" val="0"/>
-            </a:ext>
-          </a:extLst>
-        </p:spPr>
-        <p:txBody>
-          <a:bodyPr lIns="0" tIns="0" rIns="0" bIns="0"/>
-          <a:lstStyle>
-            <a:lvl1pPr>
-              <a:defRPr sz="1000">
-                <a:solidFill>
-                  <a:schemeClr val="accent3"/>
-                </a:solidFill>
-              </a:defRPr>
-            </a:lvl1pPr>
-          </a:lstStyle>
-          <a:p>
-            <a:pPr algn="r"/>
-            <a:fld id="{F7021451-1387-4CA6-816F-3879F97B5CBC}" type="slidenum">
-              <a:rPr b="0" lang="en-US"/>
-              <a:t>6</a:t>
-            </a:fld>
-            <a:endParaRPr lang="en-US"/>
-          </a:p>
-        </p:txBody>
-      </p:sp>
-    </p:spTree>
-  </p:cSld>
-  <p:clrMapOvr>
-    <a:masterClrMapping/>
-  </p:clrMapOvr>
-</p:sld>
-</file>
-
-<file path=ppt/slides/slide7.xml><?xml version="1.0" encoding="utf-8"?>
-<p:sld xmlns:a="http://schemas.openxmlformats.org/drawingml/2006/main" xmlns:r="http://schemas.openxmlformats.org/officeDocument/2006/relationships" xmlns:p="http://schemas.openxmlformats.org/presentationml/2006/main">
-  <p:cSld name="Slide 7">
-    <p:spTree>
-      <p:nvGrpSpPr>
-        <p:cNvPr id="1" name=""/>
-        <p:cNvGrpSpPr/>
-        <p:nvPr/>
-      </p:nvGrpSpPr>
-      <p:grpSpPr>
-        <a:xfrm>
-          <a:off x="0" y="0"/>
-          <a:ext cx="0" cy="0"/>
-          <a:chOff x="0" y="0"/>
-          <a:chExt cx="0" cy="0"/>
-        </a:xfrm>
-      </p:grpSpPr>
-      <p:sp>
-        <p:nvSpPr>
-          <p:cNvPr id="2" name="Text 0"/>
-          <p:cNvSpPr/>
-          <p:nvPr>
-            <p:ph idx="100" type="title" hasCustomPrompt="1"/>
-          </p:nvPr>
-        </p:nvSpPr>
-        <p:spPr>
-          <a:xfrm>
-            <a:off x="548640" y="384048"/>
-            <a:ext cx="11094415" cy="603504"/>
-          </a:xfrm>
-          <a:prstGeom prst="rect">
-            <a:avLst/>
-          </a:prstGeom>
-          <a:noFill/>
-          <a:ln/>
-        </p:spPr>
-        <p:txBody>
-          <a:bodyPr wrap="square" lIns="0" tIns="0" rIns="0" bIns="0" rtlCol="0" anchor="b"/>
-          <a:lstStyle/>
-          <a:p>
-            <a:pPr algn="l" indent="0" marL="0">
-              <a:buNone/>
-            </a:pPr>
-            <a:r>
-              <a:rPr lang="en-US" sz="3200" b="1" dirty="0">
-                <a:solidFill>
-                  <a:schemeClr val="tx1"/>
-                </a:solidFill>
-              </a:rPr>
-              <a:t>Our products with FANKE</a:t>
-            </a:r>
-            <a:endParaRPr lang="en-US" sz="3200" dirty="0"/>
-          </a:p>
-        </p:txBody>
-      </p:sp>
-      <p:sp>
-        <p:nvSpPr>
-          <p:cNvPr id="3" name="Text 0"/>
-          <p:cNvSpPr/>
-          <p:nvPr>
-            <p:ph idx="101" type="body" hasCustomPrompt="1"/>
-          </p:nvPr>
-        </p:nvSpPr>
-        <p:spPr>
-          <a:xfrm>
-            <a:off x="548640" y="1005840"/>
-            <a:ext cx="11094415" cy="438912"/>
-          </a:xfrm>
-          <a:prstGeom prst="rect">
-            <a:avLst/>
-          </a:prstGeom>
-          <a:noFill/>
-          <a:ln/>
-        </p:spPr>
-        <p:txBody>
-          <a:bodyPr wrap="square" lIns="0" tIns="0" rIns="0" bIns="0" rtlCol="0" anchor="t"/>
-          <a:lstStyle/>
-          <a:p>
-            <a:pPr algn="l" indent="0" marL="0">
-              <a:buNone/>
-            </a:pPr>
-            <a:r>
-              <a:rPr lang="en-US" sz="2000" b="1" dirty="0">
-                <a:solidFill>
-                  <a:schemeClr val="accent1"/>
-                </a:solidFill>
-                <a:latin typeface="Microsoft YaHei" pitchFamily="34" charset="0"/>
-                <a:ea typeface="Microsoft YaHei" pitchFamily="34" charset="-122"/>
-                <a:cs typeface="Microsoft YaHei" pitchFamily="34" charset="-120"/>
-              </a:rPr>
-              <a:t>我们向 </a:t>
-            </a:r>
-            <a:pPr algn="l" indent="0" marL="0">
-              <a:buNone/>
-            </a:pPr>
-            <a:r>
-              <a:rPr lang="en-US" sz="2000" b="1" dirty="0">
-                <a:solidFill>
-                  <a:schemeClr val="accent1"/>
-                </a:solidFill>
-                <a:latin typeface="Montserrat" pitchFamily="34" charset="0"/>
-                <a:ea typeface="Montserrat" pitchFamily="34" charset="-122"/>
-                <a:cs typeface="Montserrat" pitchFamily="34" charset="-120"/>
-              </a:rPr>
-              <a:t>FANKE</a:t>
-            </a:r>
-            <a:pPr algn="l" indent="0" marL="0">
-              <a:buNone/>
-            </a:pPr>
-            <a:r>
-              <a:rPr lang="en-US" sz="2000" b="1" dirty="0">
-                <a:solidFill>
-                  <a:schemeClr val="accent1"/>
-                </a:solidFill>
-                <a:latin typeface="Microsoft YaHei" pitchFamily="34" charset="0"/>
-                <a:ea typeface="Microsoft YaHei" pitchFamily="34" charset="-122"/>
-                <a:cs typeface="Microsoft YaHei" pitchFamily="34" charset="-120"/>
-              </a:rPr>
-              <a:t> 采购的产品</a:t>
+              <a:t> 的表现</a:t>
             </a:r>
             <a:endParaRPr lang="en-US" sz="2000" dirty="0"/>
           </a:p>
@@ -8026,7 +6941,7 @@
       </p:sp>
       <p:graphicFrame>
         <p:nvGraphicFramePr>
-          <p:cNvPr id="8" name="Products table"/>
+          <p:cNvPr id="7" name="Products table"/>
           <p:cNvGraphicFramePr>
             <a:graphicFrameLocks noGrp="1"/>
           </p:cNvGraphicFramePr>
@@ -8047,10 +6962,10 @@
             <a:tbl>
               <a:tblPr/>
               <a:tblGrid>
-                <a:gridCol w="3657600"/>
-                <a:gridCol w="2148840"/>
-                <a:gridCol w="2148840"/>
-                <a:gridCol w="3136392"/>
+                <a:gridCol w="4572000"/>
+                <a:gridCol w="2377440"/>
+                <a:gridCol w="2103120"/>
+                <a:gridCol w="2039112"/>
               </a:tblGrid>
               <a:tr h="658368">
                 <a:tc>
@@ -8058,7 +6973,7 @@
                     <a:bodyPr/>
                     <a:lstStyle/>
                     <a:p>
-                      <a:pPr indent="0" marL="0">
+                      <a:pPr algn="l" indent="0" marL="0">
                         <a:buNone/>
                       </a:pPr>
                       <a:r>
@@ -8079,7 +6994,7 @@
                       </a:endParaRPr>
                     </a:p>
                     <a:p>
-                      <a:pPr indent="0" marL="0">
+                      <a:pPr algn="l" indent="0" marL="0">
                         <a:buNone/>
                       </a:pPr>
                       <a:r>
@@ -8100,7 +7015,7 @@
                       </a:endParaRPr>
                     </a:p>
                   </a:txBody>
-                  <a:tcPr marL="137160" marR="137160" marT="73152" marB="73152" anchor="ctr">
+                  <a:tcPr marL="137160" marR="137160" marT="54864" marB="54864" anchor="ctr">
                     <a:lnL w="12700" cap="flat" cmpd="sng" algn="ctr">
                       <a:solidFill>
                         <a:srgbClr val="EDE6DA"/>
@@ -8147,7 +7062,7 @@
                     <a:bodyPr/>
                     <a:lstStyle/>
                     <a:p>
-                      <a:pPr indent="0" marL="0">
+                      <a:pPr algn="l" indent="0" marL="0">
                         <a:buNone/>
                       </a:pPr>
                       <a:r>
@@ -8159,7 +7074,7 @@
                           <a:ea typeface="Montserrat" pitchFamily="34" charset="-122"/>
                           <a:cs typeface="Montserrat" pitchFamily="34" charset="-120"/>
                         </a:rPr>
-                        <a:t>Volume 2026</a:t>
+                        <a:t>Model</a:t>
                       </a:r>
                       <a:endParaRPr lang="en-US" sz="1200" dirty="0">
                         <a:latin typeface="Montserrat" charset="0"/>
@@ -8168,7 +7083,7 @@
                       </a:endParaRPr>
                     </a:p>
                     <a:p>
-                      <a:pPr indent="0" marL="0">
+                      <a:pPr algn="l" indent="0" marL="0">
                         <a:buNone/>
                       </a:pPr>
                       <a:r>
@@ -8180,7 +7095,7 @@
                           <a:ea typeface="Microsoft YaHei" pitchFamily="34" charset="-122"/>
                           <a:cs typeface="Microsoft YaHei" pitchFamily="34" charset="-120"/>
                         </a:rPr>
-                        <a:t>2026 年采购量</a:t>
+                        <a:t>型号</a:t>
                       </a:r>
                       <a:endParaRPr lang="en-US" sz="1200" dirty="0">
                         <a:latin typeface="Montserrat" charset="0"/>
@@ -8189,7 +7104,7 @@
                       </a:endParaRPr>
                     </a:p>
                   </a:txBody>
-                  <a:tcPr marL="137160" marR="137160" marT="73152" marB="73152" anchor="ctr">
+                  <a:tcPr marL="137160" marR="137160" marT="54864" marB="54864" anchor="ctr">
                     <a:lnL w="12700" cap="flat" cmpd="sng" algn="ctr">
                       <a:solidFill>
                         <a:srgbClr val="EDE6DA"/>
@@ -8236,7 +7151,7 @@
                     <a:bodyPr/>
                     <a:lstStyle/>
                     <a:p>
-                      <a:pPr indent="0" marL="0">
+                      <a:pPr algn="r" indent="0" marL="0">
                         <a:buNone/>
                       </a:pPr>
                       <a:r>
@@ -8248,7 +7163,7 @@
                           <a:ea typeface="Montserrat" pitchFamily="34" charset="-122"/>
                           <a:cs typeface="Montserrat" pitchFamily="34" charset="-120"/>
                         </a:rPr>
-                        <a:t>Forecast 2027</a:t>
+                        <a:t>Sold in 2026 *</a:t>
                       </a:r>
                       <a:endParaRPr lang="en-US" sz="1200" dirty="0">
                         <a:latin typeface="Montserrat" charset="0"/>
@@ -8257,7 +7172,7 @@
                       </a:endParaRPr>
                     </a:p>
                     <a:p>
-                      <a:pPr indent="0" marL="0">
+                      <a:pPr algn="r" indent="0" marL="0">
                         <a:buNone/>
                       </a:pPr>
                       <a:r>
@@ -8269,7 +7184,7 @@
                           <a:ea typeface="Microsoft YaHei" pitchFamily="34" charset="-122"/>
                           <a:cs typeface="Microsoft YaHei" pitchFamily="34" charset="-120"/>
                         </a:rPr>
-                        <a:t>2027 年预测</a:t>
+                        <a:t>2026 年销量 *</a:t>
                       </a:r>
                       <a:endParaRPr lang="en-US" sz="1200" dirty="0">
                         <a:latin typeface="Montserrat" charset="0"/>
@@ -8278,7 +7193,7 @@
                       </a:endParaRPr>
                     </a:p>
                   </a:txBody>
-                  <a:tcPr marL="137160" marR="137160" marT="73152" marB="73152" anchor="ctr">
+                  <a:tcPr marL="137160" marR="137160" marT="54864" marB="54864" anchor="ctr">
                     <a:lnL w="12700" cap="flat" cmpd="sng" algn="ctr">
                       <a:solidFill>
                         <a:srgbClr val="EDE6DA"/>
@@ -8325,7 +7240,7 @@
                     <a:bodyPr/>
                     <a:lstStyle/>
                     <a:p>
-                      <a:pPr indent="0" marL="0">
+                      <a:pPr algn="r" indent="0" marL="0">
                         <a:buNone/>
                       </a:pPr>
                       <a:r>
@@ -8337,7 +7252,7 @@
                           <a:ea typeface="Montserrat" pitchFamily="34" charset="-122"/>
                           <a:cs typeface="Montserrat" pitchFamily="34" charset="-120"/>
                         </a:rPr>
-                        <a:t>Focus for this visit</a:t>
+                        <a:t>Return rate *</a:t>
                       </a:r>
                       <a:endParaRPr lang="en-US" sz="1200" dirty="0">
                         <a:latin typeface="Montserrat" charset="0"/>
@@ -8346,7 +7261,7 @@
                       </a:endParaRPr>
                     </a:p>
                     <a:p>
-                      <a:pPr indent="0" marL="0">
+                      <a:pPr algn="r" indent="0" marL="0">
                         <a:buNone/>
                       </a:pPr>
                       <a:r>
@@ -8358,7 +7273,7 @@
                           <a:ea typeface="Microsoft YaHei" pitchFamily="34" charset="-122"/>
                           <a:cs typeface="Microsoft YaHei" pitchFamily="34" charset="-120"/>
                         </a:rPr>
-                        <a:t>本次重点</a:t>
+                        <a:t>退货率 *</a:t>
                       </a:r>
                       <a:endParaRPr lang="en-US" sz="1200" dirty="0">
                         <a:latin typeface="Montserrat" charset="0"/>
@@ -8367,7 +7282,7 @@
                       </a:endParaRPr>
                     </a:p>
                   </a:txBody>
-                  <a:tcPr marL="137160" marR="137160" marT="73152" marB="73152" anchor="ctr">
+                  <a:tcPr marL="137160" marR="137160" marT="54864" marB="54864" anchor="ctr">
                     <a:lnL w="12700" cap="flat" cmpd="sng" algn="ctr">
                       <a:solidFill>
                         <a:srgbClr val="EDE6DA"/>
@@ -8410,7 +7325,7 @@
                   </a:tcPr>
                 </a:tc>
               </a:tr>
-              <a:tr h="566928">
+              <a:tr h="512064">
                 <a:tc>
                   <a:txBody>
                     <a:bodyPr/>
@@ -8420,15 +7335,15 @@
                         <a:buNone/>
                       </a:pPr>
                       <a:r>
-                        <a:rPr lang="en-US" sz="1300" i="1" dirty="0">
+                        <a:rPr lang="en-US" sz="1300" b="1" dirty="0">
                           <a:solidFill>
-                            <a:schemeClr val="accent4"/>
+                            <a:schemeClr val="tx1"/>
                           </a:solidFill>
                           <a:latin typeface="Montserrat" pitchFamily="34" charset="0"/>
                           <a:ea typeface="Montserrat" pitchFamily="34" charset="-122"/>
                           <a:cs typeface="Montserrat" pitchFamily="34" charset="-120"/>
                         </a:rPr>
-                        <a:t>[Product name]</a:t>
+                        <a:t>4-in-1 Shaver Elite</a:t>
                       </a:r>
                       <a:endParaRPr lang="en-US" sz="1300" dirty="0">
                         <a:latin typeface="Montserrat" charset="0"/>
@@ -8437,7 +7352,7 @@
                       </a:endParaRPr>
                     </a:p>
                   </a:txBody>
-                  <a:tcPr marL="137160" marR="137160" marT="73152" marB="73152" anchor="ctr">
+                  <a:tcPr marL="137160" marR="137160" marT="54864" marB="54864" anchor="ctr">
                     <a:lnL w="12700" cap="flat" cmpd="sng" algn="ctr">
                       <a:solidFill>
                         <a:srgbClr val="EDE6DA"/>
@@ -8475,7 +7390,7 @@
                       <a:tailEnd type="none" w="med" len="med"/>
                     </a:lnB>
                     <a:solidFill>
-                      <a:srgbClr val="F7EBD3"/>
+                      <a:schemeClr val="bg1"/>
                     </a:solidFill>
                   </a:tcPr>
                 </a:tc>
@@ -8488,24 +7403,24 @@
                         <a:buNone/>
                       </a:pPr>
                       <a:r>
-                        <a:rPr lang="en-US" sz="1300" i="1" dirty="0">
+                        <a:rPr lang="en-US" sz="1200" dirty="0">
                           <a:solidFill>
-                            <a:schemeClr val="accent4"/>
+                            <a:schemeClr val="accent6"/>
                           </a:solidFill>
                           <a:latin typeface="Montserrat" pitchFamily="34" charset="0"/>
                           <a:ea typeface="Montserrat" pitchFamily="34" charset="-122"/>
                           <a:cs typeface="Montserrat" pitchFamily="34" charset="-120"/>
                         </a:rPr>
-                        <a:t>[pcs]</a:t>
+                        <a:t>8600 / WS-SA3</a:t>
                       </a:r>
-                      <a:endParaRPr lang="en-US" sz="1300" dirty="0">
+                      <a:endParaRPr lang="en-US" sz="1200" dirty="0">
                         <a:latin typeface="Montserrat" charset="0"/>
                         <a:ea typeface="Montserrat" charset="0"/>
                         <a:cs typeface="Montserrat" charset="0"/>
                       </a:endParaRPr>
                     </a:p>
                   </a:txBody>
-                  <a:tcPr marL="137160" marR="137160" marT="73152" marB="73152" anchor="ctr">
+                  <a:tcPr marL="137160" marR="137160" marT="54864" marB="54864" anchor="ctr">
                     <a:lnL w="12700" cap="flat" cmpd="sng" algn="ctr">
                       <a:solidFill>
                         <a:srgbClr val="EDE6DA"/>
@@ -8543,7 +7458,7 @@
                       <a:tailEnd type="none" w="med" len="med"/>
                     </a:lnB>
                     <a:solidFill>
-                      <a:srgbClr val="F7EBD3"/>
+                      <a:schemeClr val="bg1"/>
                     </a:solidFill>
                   </a:tcPr>
                 </a:tc>
@@ -8552,19 +7467,19 @@
                     <a:bodyPr/>
                     <a:lstStyle/>
                     <a:p>
-                      <a:pPr indent="0" marL="0">
+                      <a:pPr algn="r" indent="0" marL="0">
                         <a:buNone/>
                       </a:pPr>
                       <a:r>
-                        <a:rPr lang="en-US" sz="1300" i="1" dirty="0">
+                        <a:rPr lang="en-US" sz="1300" dirty="0">
                           <a:solidFill>
-                            <a:schemeClr val="accent4"/>
+                            <a:schemeClr val="tx1"/>
                           </a:solidFill>
                           <a:latin typeface="Montserrat" pitchFamily="34" charset="0"/>
                           <a:ea typeface="Montserrat" pitchFamily="34" charset="-122"/>
                           <a:cs typeface="Montserrat" pitchFamily="34" charset="-120"/>
                         </a:rPr>
-                        <a:t>[pcs]</a:t>
+                        <a:t>4,567</a:t>
                       </a:r>
                       <a:endParaRPr lang="en-US" sz="1300" dirty="0">
                         <a:latin typeface="Montserrat" charset="0"/>
@@ -8573,7 +7488,7 @@
                       </a:endParaRPr>
                     </a:p>
                   </a:txBody>
-                  <a:tcPr marL="137160" marR="137160" marT="73152" marB="73152" anchor="ctr">
+                  <a:tcPr marL="137160" marR="137160" marT="54864" marB="54864" anchor="ctr">
                     <a:lnL w="12700" cap="flat" cmpd="sng" algn="ctr">
                       <a:solidFill>
                         <a:srgbClr val="EDE6DA"/>
@@ -8611,7 +7526,7 @@
                       <a:tailEnd type="none" w="med" len="med"/>
                     </a:lnB>
                     <a:solidFill>
-                      <a:srgbClr val="F7EBD3"/>
+                      <a:schemeClr val="bg1"/>
                     </a:solidFill>
                   </a:tcPr>
                 </a:tc>
@@ -8620,19 +7535,19 @@
                     <a:bodyPr/>
                     <a:lstStyle/>
                     <a:p>
-                      <a:pPr indent="0" marL="0">
+                      <a:pPr algn="r" indent="0" marL="0">
                         <a:buNone/>
                       </a:pPr>
                       <a:r>
-                        <a:rPr lang="en-US" sz="1300" i="1" dirty="0">
+                        <a:rPr lang="en-US" sz="1300" dirty="0">
                           <a:solidFill>
-                            <a:schemeClr val="accent4"/>
+                            <a:schemeClr val="tx1"/>
                           </a:solidFill>
                           <a:latin typeface="Montserrat" pitchFamily="34" charset="0"/>
                           <a:ea typeface="Montserrat" pitchFamily="34" charset="-122"/>
                           <a:cs typeface="Montserrat" pitchFamily="34" charset="-120"/>
                         </a:rPr>
-                        <a:t>[quality / price / new model]</a:t>
+                        <a:t>5.2%</a:t>
                       </a:r>
                       <a:endParaRPr lang="en-US" sz="1300" dirty="0">
                         <a:latin typeface="Montserrat" charset="0"/>
@@ -8641,7 +7556,7 @@
                       </a:endParaRPr>
                     </a:p>
                   </a:txBody>
-                  <a:tcPr marL="137160" marR="137160" marT="73152" marB="73152" anchor="ctr">
+                  <a:tcPr marL="137160" marR="137160" marT="54864" marB="54864" anchor="ctr">
                     <a:lnL w="12700" cap="flat" cmpd="sng" algn="ctr">
                       <a:solidFill>
                         <a:srgbClr val="EDE6DA"/>
@@ -8679,12 +7594,12 @@
                       <a:tailEnd type="none" w="med" len="med"/>
                     </a:lnB>
                     <a:solidFill>
-                      <a:srgbClr val="F7EBD3"/>
+                      <a:schemeClr val="bg1"/>
                     </a:solidFill>
                   </a:tcPr>
                 </a:tc>
               </a:tr>
-              <a:tr h="566928">
+              <a:tr h="512064">
                 <a:tc>
                   <a:txBody>
                     <a:bodyPr/>
@@ -8694,15 +7609,15 @@
                         <a:buNone/>
                       </a:pPr>
                       <a:r>
-                        <a:rPr lang="en-US" sz="1300" i="1" dirty="0">
+                        <a:rPr lang="en-US" sz="1300" b="1" dirty="0">
                           <a:solidFill>
-                            <a:schemeClr val="accent4"/>
+                            <a:schemeClr val="tx1"/>
                           </a:solidFill>
                           <a:latin typeface="Montserrat" pitchFamily="34" charset="0"/>
                           <a:ea typeface="Montserrat" pitchFamily="34" charset="-122"/>
                           <a:cs typeface="Montserrat" pitchFamily="34" charset="-120"/>
                         </a:rPr>
-                        <a:t>[Product name]</a:t>
+                        <a:t>6-in-1 Beard Trimmer Supreme</a:t>
                       </a:r>
                       <a:endParaRPr lang="en-US" sz="1300" dirty="0">
                         <a:latin typeface="Montserrat" charset="0"/>
@@ -8711,7 +7626,7 @@
                       </a:endParaRPr>
                     </a:p>
                   </a:txBody>
-                  <a:tcPr marL="137160" marR="137160" marT="73152" marB="73152" anchor="ctr">
+                  <a:tcPr marL="137160" marR="137160" marT="54864" marB="54864" anchor="ctr">
                     <a:lnL w="12700" cap="flat" cmpd="sng" algn="ctr">
                       <a:solidFill>
                         <a:srgbClr val="EDE6DA"/>
@@ -8749,7 +7664,7 @@
                       <a:tailEnd type="none" w="med" len="med"/>
                     </a:lnB>
                     <a:solidFill>
-                      <a:srgbClr val="F7EBD3"/>
+                      <a:schemeClr val="bg1"/>
                     </a:solidFill>
                   </a:tcPr>
                 </a:tc>
@@ -8762,24 +7677,24 @@
                         <a:buNone/>
                       </a:pPr>
                       <a:r>
-                        <a:rPr lang="en-US" sz="1300" i="1" dirty="0">
+                        <a:rPr lang="en-US" sz="1200" dirty="0">
                           <a:solidFill>
-                            <a:schemeClr val="accent4"/>
+                            <a:schemeClr val="accent6"/>
                           </a:solidFill>
                           <a:latin typeface="Montserrat" pitchFamily="34" charset="0"/>
                           <a:ea typeface="Montserrat" pitchFamily="34" charset="-122"/>
                           <a:cs typeface="Montserrat" pitchFamily="34" charset="-120"/>
                         </a:rPr>
-                        <a:t>[pcs]</a:t>
+                        <a:t>8988 / WS-BTG2</a:t>
                       </a:r>
-                      <a:endParaRPr lang="en-US" sz="1300" dirty="0">
+                      <a:endParaRPr lang="en-US" sz="1200" dirty="0">
                         <a:latin typeface="Montserrat" charset="0"/>
                         <a:ea typeface="Montserrat" charset="0"/>
                         <a:cs typeface="Montserrat" charset="0"/>
                       </a:endParaRPr>
                     </a:p>
                   </a:txBody>
-                  <a:tcPr marL="137160" marR="137160" marT="73152" marB="73152" anchor="ctr">
+                  <a:tcPr marL="137160" marR="137160" marT="54864" marB="54864" anchor="ctr">
                     <a:lnL w="12700" cap="flat" cmpd="sng" algn="ctr">
                       <a:solidFill>
                         <a:srgbClr val="EDE6DA"/>
@@ -8817,7 +7732,7 @@
                       <a:tailEnd type="none" w="med" len="med"/>
                     </a:lnB>
                     <a:solidFill>
-                      <a:srgbClr val="F7EBD3"/>
+                      <a:schemeClr val="bg1"/>
                     </a:solidFill>
                   </a:tcPr>
                 </a:tc>
@@ -8826,19 +7741,19 @@
                     <a:bodyPr/>
                     <a:lstStyle/>
                     <a:p>
-                      <a:pPr indent="0" marL="0">
+                      <a:pPr algn="r" indent="0" marL="0">
                         <a:buNone/>
                       </a:pPr>
                       <a:r>
-                        <a:rPr lang="en-US" sz="1300" i="1" dirty="0">
+                        <a:rPr lang="en-US" sz="1300" dirty="0">
                           <a:solidFill>
-                            <a:schemeClr val="accent4"/>
+                            <a:schemeClr val="tx1"/>
                           </a:solidFill>
                           <a:latin typeface="Montserrat" pitchFamily="34" charset="0"/>
                           <a:ea typeface="Montserrat" pitchFamily="34" charset="-122"/>
                           <a:cs typeface="Montserrat" pitchFamily="34" charset="-120"/>
                         </a:rPr>
-                        <a:t>[pcs]</a:t>
+                        <a:t>3,143</a:t>
                       </a:r>
                       <a:endParaRPr lang="en-US" sz="1300" dirty="0">
                         <a:latin typeface="Montserrat" charset="0"/>
@@ -8847,7 +7762,7 @@
                       </a:endParaRPr>
                     </a:p>
                   </a:txBody>
-                  <a:tcPr marL="137160" marR="137160" marT="73152" marB="73152" anchor="ctr">
+                  <a:tcPr marL="137160" marR="137160" marT="54864" marB="54864" anchor="ctr">
                     <a:lnL w="12700" cap="flat" cmpd="sng" algn="ctr">
                       <a:solidFill>
                         <a:srgbClr val="EDE6DA"/>
@@ -8885,7 +7800,7 @@
                       <a:tailEnd type="none" w="med" len="med"/>
                     </a:lnB>
                     <a:solidFill>
-                      <a:srgbClr val="F7EBD3"/>
+                      <a:schemeClr val="bg1"/>
                     </a:solidFill>
                   </a:tcPr>
                 </a:tc>
@@ -8894,19 +7809,19 @@
                     <a:bodyPr/>
                     <a:lstStyle/>
                     <a:p>
-                      <a:pPr indent="0" marL="0">
+                      <a:pPr algn="r" indent="0" marL="0">
                         <a:buNone/>
                       </a:pPr>
                       <a:r>
-                        <a:rPr lang="en-US" sz="1300" i="1" dirty="0">
+                        <a:rPr lang="en-US" sz="1300" dirty="0">
                           <a:solidFill>
-                            <a:schemeClr val="accent4"/>
+                            <a:schemeClr val="tx1"/>
                           </a:solidFill>
                           <a:latin typeface="Montserrat" pitchFamily="34" charset="0"/>
                           <a:ea typeface="Montserrat" pitchFamily="34" charset="-122"/>
                           <a:cs typeface="Montserrat" pitchFamily="34" charset="-120"/>
                         </a:rPr>
-                        <a:t>[quality / price / new model]</a:t>
+                        <a:t>3.5%</a:t>
                       </a:r>
                       <a:endParaRPr lang="en-US" sz="1300" dirty="0">
                         <a:latin typeface="Montserrat" charset="0"/>
@@ -8915,7 +7830,7 @@
                       </a:endParaRPr>
                     </a:p>
                   </a:txBody>
-                  <a:tcPr marL="137160" marR="137160" marT="73152" marB="73152" anchor="ctr">
+                  <a:tcPr marL="137160" marR="137160" marT="54864" marB="54864" anchor="ctr">
                     <a:lnL w="12700" cap="flat" cmpd="sng" algn="ctr">
                       <a:solidFill>
                         <a:srgbClr val="EDE6DA"/>
@@ -8953,12 +7868,12 @@
                       <a:tailEnd type="none" w="med" len="med"/>
                     </a:lnB>
                     <a:solidFill>
-                      <a:srgbClr val="F7EBD3"/>
+                      <a:schemeClr val="bg1"/>
                     </a:solidFill>
                   </a:tcPr>
                 </a:tc>
               </a:tr>
-              <a:tr h="566928">
+              <a:tr h="512064">
                 <a:tc>
                   <a:txBody>
                     <a:bodyPr/>
@@ -8968,15 +7883,15 @@
                         <a:buNone/>
                       </a:pPr>
                       <a:r>
-                        <a:rPr lang="en-US" sz="1300" i="1" dirty="0">
+                        <a:rPr lang="en-US" sz="1300" b="1" dirty="0">
                           <a:solidFill>
-                            <a:schemeClr val="accent4"/>
+                            <a:schemeClr val="tx1"/>
                           </a:solidFill>
                           <a:latin typeface="Montserrat" pitchFamily="34" charset="0"/>
                           <a:ea typeface="Montserrat" pitchFamily="34" charset="-122"/>
                           <a:cs typeface="Montserrat" pitchFamily="34" charset="-120"/>
                         </a:rPr>
-                        <a:t>[Product name]</a:t>
+                        <a:t>5-in-1 Beard Trimmer Pro</a:t>
                       </a:r>
                       <a:endParaRPr lang="en-US" sz="1300" dirty="0">
                         <a:latin typeface="Montserrat" charset="0"/>
@@ -8985,7 +7900,7 @@
                       </a:endParaRPr>
                     </a:p>
                   </a:txBody>
-                  <a:tcPr marL="137160" marR="137160" marT="73152" marB="73152" anchor="ctr">
+                  <a:tcPr marL="137160" marR="137160" marT="54864" marB="54864" anchor="ctr">
                     <a:lnL w="12700" cap="flat" cmpd="sng" algn="ctr">
                       <a:solidFill>
                         <a:srgbClr val="EDE6DA"/>
@@ -9023,7 +7938,7 @@
                       <a:tailEnd type="none" w="med" len="med"/>
                     </a:lnB>
                     <a:solidFill>
-                      <a:srgbClr val="F7EBD3"/>
+                      <a:schemeClr val="bg1"/>
                     </a:solidFill>
                   </a:tcPr>
                 </a:tc>
@@ -9036,24 +7951,24 @@
                         <a:buNone/>
                       </a:pPr>
                       <a:r>
-                        <a:rPr lang="en-US" sz="1300" i="1" dirty="0">
+                        <a:rPr lang="en-US" sz="1200" dirty="0">
                           <a:solidFill>
-                            <a:schemeClr val="accent4"/>
+                            <a:schemeClr val="accent6"/>
                           </a:solidFill>
                           <a:latin typeface="Montserrat" pitchFamily="34" charset="0"/>
                           <a:ea typeface="Montserrat" pitchFamily="34" charset="-122"/>
                           <a:cs typeface="Montserrat" pitchFamily="34" charset="-120"/>
                         </a:rPr>
-                        <a:t>[pcs]</a:t>
+                        <a:t>8188 / WS-BTG1</a:t>
                       </a:r>
-                      <a:endParaRPr lang="en-US" sz="1300" dirty="0">
+                      <a:endParaRPr lang="en-US" sz="1200" dirty="0">
                         <a:latin typeface="Montserrat" charset="0"/>
                         <a:ea typeface="Montserrat" charset="0"/>
                         <a:cs typeface="Montserrat" charset="0"/>
                       </a:endParaRPr>
                     </a:p>
                   </a:txBody>
-                  <a:tcPr marL="137160" marR="137160" marT="73152" marB="73152" anchor="ctr">
+                  <a:tcPr marL="137160" marR="137160" marT="54864" marB="54864" anchor="ctr">
                     <a:lnL w="12700" cap="flat" cmpd="sng" algn="ctr">
                       <a:solidFill>
                         <a:srgbClr val="EDE6DA"/>
@@ -9091,7 +8006,7 @@
                       <a:tailEnd type="none" w="med" len="med"/>
                     </a:lnB>
                     <a:solidFill>
-                      <a:srgbClr val="F7EBD3"/>
+                      <a:schemeClr val="bg1"/>
                     </a:solidFill>
                   </a:tcPr>
                 </a:tc>
@@ -9100,19 +8015,19 @@
                     <a:bodyPr/>
                     <a:lstStyle/>
                     <a:p>
-                      <a:pPr indent="0" marL="0">
+                      <a:pPr algn="r" indent="0" marL="0">
                         <a:buNone/>
                       </a:pPr>
                       <a:r>
-                        <a:rPr lang="en-US" sz="1300" i="1" dirty="0">
+                        <a:rPr lang="en-US" sz="1300" dirty="0">
                           <a:solidFill>
-                            <a:schemeClr val="accent4"/>
+                            <a:schemeClr val="tx1"/>
                           </a:solidFill>
                           <a:latin typeface="Montserrat" pitchFamily="34" charset="0"/>
                           <a:ea typeface="Montserrat" pitchFamily="34" charset="-122"/>
                           <a:cs typeface="Montserrat" pitchFamily="34" charset="-120"/>
                         </a:rPr>
-                        <a:t>[pcs]</a:t>
+                        <a:t>2,179</a:t>
                       </a:r>
                       <a:endParaRPr lang="en-US" sz="1300" dirty="0">
                         <a:latin typeface="Montserrat" charset="0"/>
@@ -9121,7 +8036,7 @@
                       </a:endParaRPr>
                     </a:p>
                   </a:txBody>
-                  <a:tcPr marL="137160" marR="137160" marT="73152" marB="73152" anchor="ctr">
+                  <a:tcPr marL="137160" marR="137160" marT="54864" marB="54864" anchor="ctr">
                     <a:lnL w="12700" cap="flat" cmpd="sng" algn="ctr">
                       <a:solidFill>
                         <a:srgbClr val="EDE6DA"/>
@@ -9159,7 +8074,7 @@
                       <a:tailEnd type="none" w="med" len="med"/>
                     </a:lnB>
                     <a:solidFill>
-                      <a:srgbClr val="F7EBD3"/>
+                      <a:schemeClr val="bg1"/>
                     </a:solidFill>
                   </a:tcPr>
                 </a:tc>
@@ -9168,19 +8083,19 @@
                     <a:bodyPr/>
                     <a:lstStyle/>
                     <a:p>
-                      <a:pPr indent="0" marL="0">
+                      <a:pPr algn="r" indent="0" marL="0">
                         <a:buNone/>
                       </a:pPr>
                       <a:r>
-                        <a:rPr lang="en-US" sz="1300" i="1" dirty="0">
+                        <a:rPr lang="en-US" sz="1300" dirty="0">
                           <a:solidFill>
-                            <a:schemeClr val="accent4"/>
+                            <a:schemeClr val="tx1"/>
                           </a:solidFill>
                           <a:latin typeface="Montserrat" pitchFamily="34" charset="0"/>
                           <a:ea typeface="Montserrat" pitchFamily="34" charset="-122"/>
                           <a:cs typeface="Montserrat" pitchFamily="34" charset="-120"/>
                         </a:rPr>
-                        <a:t>[quality / price / new model]</a:t>
+                        <a:t>4.3%</a:t>
                       </a:r>
                       <a:endParaRPr lang="en-US" sz="1300" dirty="0">
                         <a:latin typeface="Montserrat" charset="0"/>
@@ -9189,7 +8104,7 @@
                       </a:endParaRPr>
                     </a:p>
                   </a:txBody>
-                  <a:tcPr marL="137160" marR="137160" marT="73152" marB="73152" anchor="ctr">
+                  <a:tcPr marL="137160" marR="137160" marT="54864" marB="54864" anchor="ctr">
                     <a:lnL w="12700" cap="flat" cmpd="sng" algn="ctr">
                       <a:solidFill>
                         <a:srgbClr val="EDE6DA"/>
@@ -9227,7 +8142,273 @@
                       <a:tailEnd type="none" w="med" len="med"/>
                     </a:lnB>
                     <a:solidFill>
-                      <a:srgbClr val="F7EBD3"/>
+                      <a:schemeClr val="bg1"/>
+                    </a:solidFill>
+                  </a:tcPr>
+                </a:tc>
+              </a:tr>
+              <a:tr h="512064">
+                <a:tc>
+                  <a:txBody>
+                    <a:bodyPr/>
+                    <a:lstStyle/>
+                    <a:p>
+                      <a:pPr indent="0" marL="0">
+                        <a:buNone/>
+                      </a:pPr>
+                      <a:r>
+                        <a:rPr lang="en-US" sz="1300" b="1" dirty="0">
+                          <a:solidFill>
+                            <a:schemeClr val="tx1"/>
+                          </a:solidFill>
+                          <a:latin typeface="Montserrat" pitchFamily="34" charset="0"/>
+                          <a:ea typeface="Montserrat" pitchFamily="34" charset="-122"/>
+                          <a:cs typeface="Montserrat" pitchFamily="34" charset="-120"/>
+                        </a:rPr>
+                        <a:t>Total  </a:t>
+                      </a:r>
+                      <a:pPr indent="0" marL="0">
+                        <a:buNone/>
+                      </a:pPr>
+                      <a:r>
+                        <a:rPr lang="en-US" sz="1300" b="1" dirty="0">
+                          <a:solidFill>
+                            <a:schemeClr val="tx1"/>
+                          </a:solidFill>
+                          <a:latin typeface="Microsoft YaHei" pitchFamily="34" charset="0"/>
+                          <a:ea typeface="Microsoft YaHei" pitchFamily="34" charset="-122"/>
+                          <a:cs typeface="Microsoft YaHei" pitchFamily="34" charset="-120"/>
+                        </a:rPr>
+                        <a:t>合计</a:t>
+                      </a:r>
+                      <a:endParaRPr lang="en-US" sz="1300" dirty="0">
+                        <a:latin typeface="Montserrat" charset="0"/>
+                        <a:ea typeface="Montserrat" charset="0"/>
+                        <a:cs typeface="Montserrat" charset="0"/>
+                      </a:endParaRPr>
+                    </a:p>
+                  </a:txBody>
+                  <a:tcPr marL="137160" marR="137160" marT="54864" marB="54864" anchor="ctr">
+                    <a:lnL w="12700" cap="flat" cmpd="sng" algn="ctr">
+                      <a:solidFill>
+                        <a:srgbClr val="EDE6DA"/>
+                      </a:solidFill>
+                      <a:prstDash val="solid"/>
+                      <a:round/>
+                      <a:headEnd type="none" w="med" len="med"/>
+                      <a:tailEnd type="none" w="med" len="med"/>
+                    </a:lnL>
+                    <a:lnR w="12700" cap="flat" cmpd="sng" algn="ctr">
+                      <a:solidFill>
+                        <a:srgbClr val="EDE6DA"/>
+                      </a:solidFill>
+                      <a:prstDash val="solid"/>
+                      <a:round/>
+                      <a:headEnd type="none" w="med" len="med"/>
+                      <a:tailEnd type="none" w="med" len="med"/>
+                    </a:lnR>
+                    <a:lnT w="12700" cap="flat" cmpd="sng" algn="ctr">
+                      <a:solidFill>
+                        <a:srgbClr val="EDE6DA"/>
+                      </a:solidFill>
+                      <a:prstDash val="solid"/>
+                      <a:round/>
+                      <a:headEnd type="none" w="med" len="med"/>
+                      <a:tailEnd type="none" w="med" len="med"/>
+                    </a:lnT>
+                    <a:lnB w="12700" cap="flat" cmpd="sng" algn="ctr">
+                      <a:solidFill>
+                        <a:srgbClr val="EDE6DA"/>
+                      </a:solidFill>
+                      <a:prstDash val="solid"/>
+                      <a:round/>
+                      <a:headEnd type="none" w="med" len="med"/>
+                      <a:tailEnd type="none" w="med" len="med"/>
+                    </a:lnB>
+                    <a:solidFill>
+                      <a:schemeClr val="accent3"/>
+                    </a:solidFill>
+                  </a:tcPr>
+                </a:tc>
+                <a:tc>
+                  <a:txBody>
+                    <a:bodyPr/>
+                    <a:lstStyle/>
+                    <a:p>
+                      <a:pPr indent="0" marL="0">
+                        <a:buNone/>
+                      </a:pPr>
+                      <a:endParaRPr lang="en-US" sz="1300" dirty="0">
+                        <a:latin typeface="Montserrat" charset="0"/>
+                        <a:ea typeface="Montserrat" charset="0"/>
+                        <a:cs typeface="Montserrat" charset="0"/>
+                      </a:endParaRPr>
+                    </a:p>
+                  </a:txBody>
+                  <a:tcPr marL="137160" marR="137160" marT="54864" marB="54864" anchor="ctr">
+                    <a:lnL w="12700" cap="flat" cmpd="sng" algn="ctr">
+                      <a:solidFill>
+                        <a:srgbClr val="EDE6DA"/>
+                      </a:solidFill>
+                      <a:prstDash val="solid"/>
+                      <a:round/>
+                      <a:headEnd type="none" w="med" len="med"/>
+                      <a:tailEnd type="none" w="med" len="med"/>
+                    </a:lnL>
+                    <a:lnR w="12700" cap="flat" cmpd="sng" algn="ctr">
+                      <a:solidFill>
+                        <a:srgbClr val="EDE6DA"/>
+                      </a:solidFill>
+                      <a:prstDash val="solid"/>
+                      <a:round/>
+                      <a:headEnd type="none" w="med" len="med"/>
+                      <a:tailEnd type="none" w="med" len="med"/>
+                    </a:lnR>
+                    <a:lnT w="12700" cap="flat" cmpd="sng" algn="ctr">
+                      <a:solidFill>
+                        <a:srgbClr val="EDE6DA"/>
+                      </a:solidFill>
+                      <a:prstDash val="solid"/>
+                      <a:round/>
+                      <a:headEnd type="none" w="med" len="med"/>
+                      <a:tailEnd type="none" w="med" len="med"/>
+                    </a:lnT>
+                    <a:lnB w="12700" cap="flat" cmpd="sng" algn="ctr">
+                      <a:solidFill>
+                        <a:srgbClr val="EDE6DA"/>
+                      </a:solidFill>
+                      <a:prstDash val="solid"/>
+                      <a:round/>
+                      <a:headEnd type="none" w="med" len="med"/>
+                      <a:tailEnd type="none" w="med" len="med"/>
+                    </a:lnB>
+                    <a:solidFill>
+                      <a:schemeClr val="accent3"/>
+                    </a:solidFill>
+                  </a:tcPr>
+                </a:tc>
+                <a:tc>
+                  <a:txBody>
+                    <a:bodyPr/>
+                    <a:lstStyle/>
+                    <a:p>
+                      <a:pPr algn="r" indent="0" marL="0">
+                        <a:buNone/>
+                      </a:pPr>
+                      <a:r>
+                        <a:rPr lang="en-US" sz="1300" b="1" dirty="0">
+                          <a:solidFill>
+                            <a:schemeClr val="tx1"/>
+                          </a:solidFill>
+                          <a:latin typeface="Montserrat" pitchFamily="34" charset="0"/>
+                          <a:ea typeface="Montserrat" pitchFamily="34" charset="-122"/>
+                          <a:cs typeface="Montserrat" pitchFamily="34" charset="-120"/>
+                        </a:rPr>
+                        <a:t>9,889</a:t>
+                      </a:r>
+                      <a:endParaRPr lang="en-US" sz="1300" dirty="0">
+                        <a:latin typeface="Montserrat" charset="0"/>
+                        <a:ea typeface="Montserrat" charset="0"/>
+                        <a:cs typeface="Montserrat" charset="0"/>
+                      </a:endParaRPr>
+                    </a:p>
+                  </a:txBody>
+                  <a:tcPr marL="137160" marR="137160" marT="54864" marB="54864" anchor="ctr">
+                    <a:lnL w="12700" cap="flat" cmpd="sng" algn="ctr">
+                      <a:solidFill>
+                        <a:srgbClr val="EDE6DA"/>
+                      </a:solidFill>
+                      <a:prstDash val="solid"/>
+                      <a:round/>
+                      <a:headEnd type="none" w="med" len="med"/>
+                      <a:tailEnd type="none" w="med" len="med"/>
+                    </a:lnL>
+                    <a:lnR w="12700" cap="flat" cmpd="sng" algn="ctr">
+                      <a:solidFill>
+                        <a:srgbClr val="EDE6DA"/>
+                      </a:solidFill>
+                      <a:prstDash val="solid"/>
+                      <a:round/>
+                      <a:headEnd type="none" w="med" len="med"/>
+                      <a:tailEnd type="none" w="med" len="med"/>
+                    </a:lnR>
+                    <a:lnT w="12700" cap="flat" cmpd="sng" algn="ctr">
+                      <a:solidFill>
+                        <a:srgbClr val="EDE6DA"/>
+                      </a:solidFill>
+                      <a:prstDash val="solid"/>
+                      <a:round/>
+                      <a:headEnd type="none" w="med" len="med"/>
+                      <a:tailEnd type="none" w="med" len="med"/>
+                    </a:lnT>
+                    <a:lnB w="12700" cap="flat" cmpd="sng" algn="ctr">
+                      <a:solidFill>
+                        <a:srgbClr val="EDE6DA"/>
+                      </a:solidFill>
+                      <a:prstDash val="solid"/>
+                      <a:round/>
+                      <a:headEnd type="none" w="med" len="med"/>
+                      <a:tailEnd type="none" w="med" len="med"/>
+                    </a:lnB>
+                    <a:solidFill>
+                      <a:schemeClr val="accent3"/>
+                    </a:solidFill>
+                  </a:tcPr>
+                </a:tc>
+                <a:tc>
+                  <a:txBody>
+                    <a:bodyPr/>
+                    <a:lstStyle/>
+                    <a:p>
+                      <a:pPr indent="0" marL="0">
+                        <a:buNone/>
+                      </a:pPr>
+                      <a:endParaRPr lang="en-US" sz="1300" dirty="0">
+                        <a:latin typeface="Montserrat" charset="0"/>
+                        <a:ea typeface="Montserrat" charset="0"/>
+                        <a:cs typeface="Montserrat" charset="0"/>
+                      </a:endParaRPr>
+                    </a:p>
+                  </a:txBody>
+                  <a:tcPr marL="137160" marR="137160" marT="54864" marB="54864" anchor="ctr">
+                    <a:lnL w="12700" cap="flat" cmpd="sng" algn="ctr">
+                      <a:solidFill>
+                        <a:srgbClr val="EDE6DA"/>
+                      </a:solidFill>
+                      <a:prstDash val="solid"/>
+                      <a:round/>
+                      <a:headEnd type="none" w="med" len="med"/>
+                      <a:tailEnd type="none" w="med" len="med"/>
+                    </a:lnL>
+                    <a:lnR w="12700" cap="flat" cmpd="sng" algn="ctr">
+                      <a:solidFill>
+                        <a:srgbClr val="EDE6DA"/>
+                      </a:solidFill>
+                      <a:prstDash val="solid"/>
+                      <a:round/>
+                      <a:headEnd type="none" w="med" len="med"/>
+                      <a:tailEnd type="none" w="med" len="med"/>
+                    </a:lnR>
+                    <a:lnT w="12700" cap="flat" cmpd="sng" algn="ctr">
+                      <a:solidFill>
+                        <a:srgbClr val="EDE6DA"/>
+                      </a:solidFill>
+                      <a:prstDash val="solid"/>
+                      <a:round/>
+                      <a:headEnd type="none" w="med" len="med"/>
+                      <a:tailEnd type="none" w="med" len="med"/>
+                    </a:lnT>
+                    <a:lnB w="12700" cap="flat" cmpd="sng" algn="ctr">
+                      <a:solidFill>
+                        <a:srgbClr val="EDE6DA"/>
+                      </a:solidFill>
+                      <a:prstDash val="solid"/>
+                      <a:round/>
+                      <a:headEnd type="none" w="med" len="med"/>
+                      <a:tailEnd type="none" w="med" len="med"/>
+                    </a:lnB>
+                    <a:solidFill>
+                      <a:schemeClr val="accent3"/>
                     </a:solidFill>
                   </a:tcPr>
                 </a:tc>
@@ -9238,18 +8419,226 @@
       </p:graphicFrame>
       <p:sp>
         <p:nvSpPr>
-          <p:cNvPr id="5" name="Data note"/>
+          <p:cNvPr id="5" name="Data source"/>
+          <p:cNvSpPr txBox="1"/>
+          <p:nvPr/>
+        </p:nvSpPr>
+        <p:spPr>
+          <a:xfrm>
+            <a:off x="548640" y="4690872"/>
+            <a:ext cx="11094415" cy="548640"/>
+          </a:xfrm>
+          <a:prstGeom prst="rect">
+            <a:avLst/>
+          </a:prstGeom>
+          <a:noFill/>
+          <a:ln/>
+        </p:spPr>
+        <p:txBody>
+          <a:bodyPr wrap="square" lIns="0" tIns="0" rIns="0" bIns="0" rtlCol="0" anchor="t"/>
+          <a:lstStyle/>
+          <a:p>
+            <a:pPr indent="0" marL="0">
+              <a:spcAft>
+                <a:spcPts val="300"/>
+              </a:spcAft>
+              <a:buNone/>
+            </a:pPr>
+            <a:r>
+              <a:rPr lang="en-US" sz="1000" dirty="0">
+                <a:solidFill>
+                  <a:schemeClr val="accent6"/>
+                </a:solidFill>
+              </a:rPr>
+              <a:t>* bol.com, 1 January to 15 October 2026. Return rate counts all return reasons. Webshop sales not included. We share our 2027 forecast in the meeting.</a:t>
+            </a:r>
+            <a:endParaRPr lang="en-US" sz="1000" dirty="0"/>
+          </a:p>
+          <a:p>
+            <a:pPr indent="0" marL="0">
+              <a:spcAft>
+                <a:spcPts val="300"/>
+              </a:spcAft>
+              <a:buNone/>
+            </a:pPr>
+            <a:r>
+              <a:rPr lang="en-US" sz="1000" dirty="0">
+                <a:solidFill>
+                  <a:schemeClr val="accent6"/>
+                </a:solidFill>
+                <a:latin typeface="Microsoft YaHei" pitchFamily="34" charset="0"/>
+                <a:ea typeface="Microsoft YaHei" pitchFamily="34" charset="-122"/>
+                <a:cs typeface="Microsoft YaHei" pitchFamily="34" charset="-120"/>
+              </a:rPr>
+              <a:t>* 数据来源：bol.com，2026年1月1日至10月15日。退货率包含所有退货原因，不含官网销量。2027年预测将在会议中分享。</a:t>
+            </a:r>
+            <a:endParaRPr lang="en-US" sz="1000" dirty="0"/>
+          </a:p>
+        </p:txBody>
+      </p:sp>
+      <p:sp>
+        <p:nvSpPr>
+          <p:cNvPr id="25" name="Slide Number Placeholder 0"/>
+          <p:cNvSpPr>
+            <a:spLocks noGrp="1"/>
+          </p:cNvSpPr>
+          <p:nvPr>
+            <p:ph type="sldNum" sz="quarter" idx="4294967295"/>
+          </p:nvPr>
+        </p:nvSpPr>
+        <p:spPr>
+          <a:xfrm>
+            <a:off x="11094415" y="6345936"/>
+            <a:ext cx="548640" cy="274320"/>
+          </a:xfrm>
+          <a:prstGeom prst="rect">
+            <a:avLst/>
+          </a:prstGeom>
+          <a:extLst>
+            <a:ext uri="{C572A759-6A51-4108-AA02-DFA0A04FC94B}">
+              <ma14:wrappingTextBoxFlag xmlns:ma14="http://schemas.microsoft.com/office/mac/drawingml/2011/main" val="0"/>
+            </a:ext>
+          </a:extLst>
+        </p:spPr>
+        <p:txBody>
+          <a:bodyPr lIns="0" tIns="0" rIns="0" bIns="0"/>
+          <a:lstStyle>
+            <a:lvl1pPr>
+              <a:defRPr sz="1000">
+                <a:solidFill>
+                  <a:schemeClr val="accent6"/>
+                </a:solidFill>
+              </a:defRPr>
+            </a:lvl1pPr>
+          </a:lstStyle>
+          <a:p>
+            <a:pPr algn="r"/>
+            <a:fld id="{F7021451-1387-4CA6-816F-3879F97B5CBC}" type="slidenum">
+              <a:rPr b="0" lang="en-US"/>
+              <a:t>6</a:t>
+            </a:fld>
+            <a:endParaRPr lang="en-US"/>
+          </a:p>
+        </p:txBody>
+      </p:sp>
+    </p:spTree>
+  </p:cSld>
+  <p:clrMapOvr>
+    <a:masterClrMapping/>
+  </p:clrMapOvr>
+</p:sld>
+</file>
+
+<file path=ppt/slides/slide7.xml><?xml version="1.0" encoding="utf-8"?>
+<p:sld xmlns:a="http://schemas.openxmlformats.org/drawingml/2006/main" xmlns:r="http://schemas.openxmlformats.org/officeDocument/2006/relationships" xmlns:p="http://schemas.openxmlformats.org/presentationml/2006/main">
+  <p:cSld name="Slide 7">
+    <p:spTree>
+      <p:nvGrpSpPr>
+        <p:cNvPr id="1" name=""/>
+        <p:cNvGrpSpPr/>
+        <p:nvPr/>
+      </p:nvGrpSpPr>
+      <p:grpSpPr>
+        <a:xfrm>
+          <a:off x="0" y="0"/>
+          <a:ext cx="0" cy="0"/>
+          <a:chOff x="0" y="0"/>
+          <a:chExt cx="0" cy="0"/>
+        </a:xfrm>
+      </p:grpSpPr>
+      <p:sp>
+        <p:nvSpPr>
+          <p:cNvPr id="2" name="Text 0"/>
           <p:cNvSpPr/>
-          <p:nvPr/>
-        </p:nvSpPr>
-        <p:spPr>
-          <a:xfrm>
-            <a:off x="548640" y="4462272"/>
-            <a:ext cx="11094415" cy="914400"/>
+          <p:nvPr>
+            <p:ph idx="100" type="title" hasCustomPrompt="1"/>
+          </p:nvPr>
+        </p:nvSpPr>
+        <p:spPr>
+          <a:xfrm>
+            <a:off x="548640" y="384048"/>
+            <a:ext cx="11094415" cy="603504"/>
+          </a:xfrm>
+          <a:prstGeom prst="rect">
+            <a:avLst/>
+          </a:prstGeom>
+          <a:noFill/>
+          <a:ln/>
+        </p:spPr>
+        <p:txBody>
+          <a:bodyPr wrap="square" lIns="0" tIns="0" rIns="0" bIns="0" rtlCol="0" anchor="b"/>
+          <a:lstStyle/>
+          <a:p>
+            <a:pPr algn="l" indent="0" marL="0">
+              <a:buNone/>
+            </a:pPr>
+            <a:r>
+              <a:rPr lang="en-US" sz="3200" b="1" dirty="0">
+                <a:solidFill>
+                  <a:schemeClr val="tx1"/>
+                </a:solidFill>
+              </a:rPr>
+              <a:t>What our customers tell us</a:t>
+            </a:r>
+            <a:endParaRPr lang="en-US" sz="3200" dirty="0"/>
+          </a:p>
+        </p:txBody>
+      </p:sp>
+      <p:sp>
+        <p:nvSpPr>
+          <p:cNvPr id="3" name="Text 0"/>
+          <p:cNvSpPr/>
+          <p:nvPr>
+            <p:ph idx="101" type="body" hasCustomPrompt="1"/>
+          </p:nvPr>
+        </p:nvSpPr>
+        <p:spPr>
+          <a:xfrm>
+            <a:off x="548640" y="1005840"/>
+            <a:ext cx="11094415" cy="438912"/>
+          </a:xfrm>
+          <a:prstGeom prst="rect">
+            <a:avLst/>
+          </a:prstGeom>
+          <a:noFill/>
+          <a:ln/>
+        </p:spPr>
+        <p:txBody>
+          <a:bodyPr wrap="square" lIns="0" tIns="0" rIns="0" bIns="0" rtlCol="0" anchor="t"/>
+          <a:lstStyle/>
+          <a:p>
+            <a:pPr algn="l" indent="0" marL="0">
+              <a:buNone/>
+            </a:pPr>
+            <a:r>
+              <a:rPr lang="en-US" sz="2000" b="1" dirty="0">
+                <a:solidFill>
+                  <a:schemeClr val="accent1"/>
+                </a:solidFill>
+                <a:latin typeface="Microsoft YaHei" pitchFamily="34" charset="0"/>
+                <a:ea typeface="Microsoft YaHei" pitchFamily="34" charset="-122"/>
+                <a:cs typeface="Microsoft YaHei" pitchFamily="34" charset="-120"/>
+              </a:rPr>
+              <a:t>客户反馈</a:t>
+            </a:r>
+            <a:endParaRPr lang="en-US" sz="2000" dirty="0"/>
+          </a:p>
+        </p:txBody>
+      </p:sp>
+      <p:sp>
+        <p:nvSpPr>
+          <p:cNvPr id="4" name="Stats card"/>
+          <p:cNvSpPr/>
+          <p:nvPr/>
+        </p:nvSpPr>
+        <p:spPr>
+          <a:xfrm>
+            <a:off x="548640" y="1645920"/>
+            <a:ext cx="3200400" cy="4251960"/>
           </a:xfrm>
           <a:prstGeom prst="roundRect">
             <a:avLst>
-              <a:gd name="adj" fmla="val 16000"/>
+              <a:gd name="adj" fmla="val 4571"/>
             </a:avLst>
           </a:prstGeom>
           <a:solidFill>
@@ -9258,40 +8647,16 @@
           <a:ln/>
         </p:spPr>
       </p:sp>
-      <p:pic>
-        <p:nvPicPr>
-          <p:cNvPr id="6" name="Data icon" descr="preencoded.png">    </p:cNvPr>
-          <p:cNvPicPr>
-            <a:picLocks noChangeAspect="1"/>
-          </p:cNvPicPr>
-          <p:nvPr/>
-        </p:nvPicPr>
-        <p:blipFill>
-          <a:blip r:embed="rId1"/>
-          <a:stretch>
-            <a:fillRect/>
-          </a:stretch>
-        </p:blipFill>
-        <p:spPr>
-          <a:xfrm>
-            <a:off x="822960" y="4690872"/>
-            <a:ext cx="457200" cy="457200"/>
-          </a:xfrm>
-          <a:prstGeom prst="rect">
-            <a:avLst/>
-          </a:prstGeom>
-        </p:spPr>
-      </p:pic>
-      <p:sp>
-        <p:nvSpPr>
-          <p:cNvPr id="7" name="Data text"/>
+      <p:sp>
+        <p:nvSpPr>
+          <p:cNvPr id="5" name="Stat value 1"/>
           <p:cNvSpPr txBox="1"/>
           <p:nvPr/>
         </p:nvSpPr>
         <p:spPr>
           <a:xfrm>
-            <a:off x="1508760" y="4572000"/>
-            <a:ext cx="9859975" cy="694944"/>
+            <a:off x="822960" y="1938528"/>
+            <a:ext cx="2743200" cy="548640"/>
           </a:xfrm>
           <a:prstGeom prst="rect">
             <a:avLst/>
@@ -9300,75 +8665,1035 @@
           <a:ln/>
         </p:spPr>
         <p:txBody>
-          <a:bodyPr wrap="square" lIns="0" tIns="0" rIns="0" bIns="0" rtlCol="0" anchor="ctr"/>
-          <a:lstStyle/>
-          <a:p>
-            <a:pPr indent="0" marL="0">
-              <a:spcAft>
-                <a:spcPts val="400"/>
-              </a:spcAft>
-              <a:buNone/>
-            </a:pPr>
-            <a:r>
-              <a:rPr lang="en-US" sz="1300" b="1" dirty="0">
+          <a:bodyPr wrap="square" lIns="0" tIns="0" rIns="0" bIns="0" rtlCol="0" anchor="t"/>
+          <a:lstStyle/>
+          <a:p>
+            <a:pPr indent="0" marL="0">
+              <a:buNone/>
+            </a:pPr>
+            <a:r>
+              <a:rPr lang="en-US" sz="3000" b="1" dirty="0">
                 <a:solidFill>
                   <a:schemeClr val="tx1"/>
                 </a:solidFill>
               </a:rPr>
-              <a:t>In the meeting we share the full data per product: </a:t>
-            </a:r>
-            <a:pPr indent="0" marL="0">
-              <a:spcAft>
-                <a:spcPts val="400"/>
-              </a:spcAft>
-              <a:buNone/>
-            </a:pPr>
-            <a:r>
-              <a:rPr lang="en-US" sz="1300" dirty="0">
-                <a:solidFill>
-                  <a:schemeClr val="tx1"/>
-                </a:solidFill>
-              </a:rPr>
-              <a:t>sales, customer reviews, returns and the main complaints.</a:t>
-            </a:r>
-            <a:endParaRPr lang="en-US" sz="1300" dirty="0"/>
-          </a:p>
-          <a:p>
-            <a:pPr indent="0" marL="0">
-              <a:spcAft>
-                <a:spcPts val="400"/>
-              </a:spcAft>
-              <a:buNone/>
-            </a:pPr>
-            <a:r>
-              <a:rPr lang="en-US" sz="1300" b="1" dirty="0">
-                <a:solidFill>
-                  <a:schemeClr val="accent4"/>
+              <a:t>9,889</a:t>
+            </a:r>
+            <a:endParaRPr lang="en-US" sz="3000" dirty="0"/>
+          </a:p>
+        </p:txBody>
+      </p:sp>
+      <p:sp>
+        <p:nvSpPr>
+          <p:cNvPr id="6" name="Stat label 1"/>
+          <p:cNvSpPr txBox="1"/>
+          <p:nvPr/>
+        </p:nvSpPr>
+        <p:spPr>
+          <a:xfrm>
+            <a:off x="822960" y="2505456"/>
+            <a:ext cx="2743200" cy="457200"/>
+          </a:xfrm>
+          <a:prstGeom prst="rect">
+            <a:avLst/>
+          </a:prstGeom>
+          <a:noFill/>
+          <a:ln/>
+        </p:spPr>
+        <p:txBody>
+          <a:bodyPr wrap="square" lIns="0" tIns="0" rIns="0" bIns="0" rtlCol="0" anchor="t"/>
+          <a:lstStyle/>
+          <a:p>
+            <a:pPr indent="0" marL="0">
+              <a:buNone/>
+            </a:pPr>
+            <a:r>
+              <a:rPr lang="en-US" sz="1100" dirty="0">
+                <a:solidFill>
+                  <a:schemeClr val="accent6"/>
+                </a:solidFill>
+              </a:rPr>
+              <a:t>units sold on bol.com in 2026</a:t>
+            </a:r>
+            <a:endParaRPr lang="en-US" sz="1100" dirty="0"/>
+          </a:p>
+          <a:p>
+            <a:pPr indent="0" marL="0">
+              <a:buNone/>
+            </a:pPr>
+            <a:r>
+              <a:rPr lang="en-US" sz="1100" dirty="0">
+                <a:solidFill>
+                  <a:schemeClr val="accent1"/>
                 </a:solidFill>
                 <a:latin typeface="Microsoft YaHei" pitchFamily="34" charset="0"/>
                 <a:ea typeface="Microsoft YaHei" pitchFamily="34" charset="-122"/>
                 <a:cs typeface="Microsoft YaHei" pitchFamily="34" charset="-120"/>
               </a:rPr>
-              <a:t>会议中我们将分享每款产品的完整数据：</a:t>
-            </a:r>
-            <a:pPr indent="0" marL="0">
-              <a:spcAft>
-                <a:spcPts val="400"/>
-              </a:spcAft>
-              <a:buNone/>
-            </a:pPr>
-            <a:r>
-              <a:rPr lang="en-US" sz="1300" dirty="0">
-                <a:solidFill>
-                  <a:schemeClr val="accent4"/>
+              <a:t>2026年bol.com销量</a:t>
+            </a:r>
+            <a:endParaRPr lang="en-US" sz="1100" dirty="0"/>
+          </a:p>
+        </p:txBody>
+      </p:sp>
+      <p:sp>
+        <p:nvSpPr>
+          <p:cNvPr id="7" name="Stat value 2"/>
+          <p:cNvSpPr txBox="1"/>
+          <p:nvPr/>
+        </p:nvSpPr>
+        <p:spPr>
+          <a:xfrm>
+            <a:off x="822960" y="3264408"/>
+            <a:ext cx="2743200" cy="548640"/>
+          </a:xfrm>
+          <a:prstGeom prst="rect">
+            <a:avLst/>
+          </a:prstGeom>
+          <a:noFill/>
+          <a:ln/>
+        </p:spPr>
+        <p:txBody>
+          <a:bodyPr wrap="square" lIns="0" tIns="0" rIns="0" bIns="0" rtlCol="0" anchor="t"/>
+          <a:lstStyle/>
+          <a:p>
+            <a:pPr indent="0" marL="0">
+              <a:buNone/>
+            </a:pPr>
+            <a:r>
+              <a:rPr lang="en-US" sz="3000" b="1" dirty="0">
+                <a:solidFill>
+                  <a:schemeClr val="tx1"/>
+                </a:solidFill>
+              </a:rPr>
+              <a:t>43</a:t>
+            </a:r>
+            <a:endParaRPr lang="en-US" sz="3000" dirty="0"/>
+          </a:p>
+        </p:txBody>
+      </p:sp>
+      <p:sp>
+        <p:nvSpPr>
+          <p:cNvPr id="8" name="Stat label 2"/>
+          <p:cNvSpPr txBox="1"/>
+          <p:nvPr/>
+        </p:nvSpPr>
+        <p:spPr>
+          <a:xfrm>
+            <a:off x="822960" y="3831336"/>
+            <a:ext cx="2743200" cy="457200"/>
+          </a:xfrm>
+          <a:prstGeom prst="rect">
+            <a:avLst/>
+          </a:prstGeom>
+          <a:noFill/>
+          <a:ln/>
+        </p:spPr>
+        <p:txBody>
+          <a:bodyPr wrap="square" lIns="0" tIns="0" rIns="0" bIns="0" rtlCol="0" anchor="t"/>
+          <a:lstStyle/>
+          <a:p>
+            <a:pPr indent="0" marL="0">
+              <a:buNone/>
+            </a:pPr>
+            <a:r>
+              <a:rPr lang="en-US" sz="1100" dirty="0">
+                <a:solidFill>
+                  <a:schemeClr val="accent6"/>
+                </a:solidFill>
+              </a:rPr>
+              <a:t>critical reviews (1 to 3 stars)</a:t>
+            </a:r>
+            <a:endParaRPr lang="en-US" sz="1100" dirty="0"/>
+          </a:p>
+          <a:p>
+            <a:pPr indent="0" marL="0">
+              <a:buNone/>
+            </a:pPr>
+            <a:r>
+              <a:rPr lang="en-US" sz="1100" dirty="0">
+                <a:solidFill>
+                  <a:schemeClr val="accent1"/>
                 </a:solidFill>
                 <a:latin typeface="Microsoft YaHei" pitchFamily="34" charset="0"/>
                 <a:ea typeface="Microsoft YaHei" pitchFamily="34" charset="-122"/>
                 <a:cs typeface="Microsoft YaHei" pitchFamily="34" charset="-120"/>
               </a:rPr>
-              <a:t>销量、客户评价、退货情况以及主要问题。</a:t>
-            </a:r>
-            <a:endParaRPr lang="en-US" sz="1300" dirty="0"/>
+              <a:t>差评数（1至3星）</a:t>
+            </a:r>
+            <a:endParaRPr lang="en-US" sz="1100" dirty="0"/>
+          </a:p>
+        </p:txBody>
+      </p:sp>
+      <p:sp>
+        <p:nvSpPr>
+          <p:cNvPr id="9" name="Stat value 3"/>
+          <p:cNvSpPr txBox="1"/>
+          <p:nvPr/>
+        </p:nvSpPr>
+        <p:spPr>
+          <a:xfrm>
+            <a:off x="822960" y="4590288"/>
+            <a:ext cx="2743200" cy="548640"/>
+          </a:xfrm>
+          <a:prstGeom prst="rect">
+            <a:avLst/>
+          </a:prstGeom>
+          <a:noFill/>
+          <a:ln/>
+        </p:spPr>
+        <p:txBody>
+          <a:bodyPr wrap="square" lIns="0" tIns="0" rIns="0" bIns="0" rtlCol="0" anchor="t"/>
+          <a:lstStyle/>
+          <a:p>
+            <a:pPr indent="0" marL="0">
+              <a:buNone/>
+            </a:pPr>
+            <a:r>
+              <a:rPr lang="en-US" sz="3000" b="1" dirty="0">
+                <a:solidFill>
+                  <a:schemeClr val="tx1"/>
+                </a:solidFill>
+              </a:rPr>
+              <a:t>4.3</a:t>
+            </a:r>
+            <a:endParaRPr lang="en-US" sz="3000" dirty="0"/>
+          </a:p>
+        </p:txBody>
+      </p:sp>
+      <p:sp>
+        <p:nvSpPr>
+          <p:cNvPr id="10" name="Stat label 3"/>
+          <p:cNvSpPr txBox="1"/>
+          <p:nvPr/>
+        </p:nvSpPr>
+        <p:spPr>
+          <a:xfrm>
+            <a:off x="822960" y="5157216"/>
+            <a:ext cx="2743200" cy="457200"/>
+          </a:xfrm>
+          <a:prstGeom prst="rect">
+            <a:avLst/>
+          </a:prstGeom>
+          <a:noFill/>
+          <a:ln/>
+        </p:spPr>
+        <p:txBody>
+          <a:bodyPr wrap="square" lIns="0" tIns="0" rIns="0" bIns="0" rtlCol="0" anchor="t"/>
+          <a:lstStyle/>
+          <a:p>
+            <a:pPr indent="0" marL="0">
+              <a:buNone/>
+            </a:pPr>
+            <a:r>
+              <a:rPr lang="en-US" sz="1100" dirty="0">
+                <a:solidFill>
+                  <a:schemeClr val="accent6"/>
+                </a:solidFill>
+              </a:rPr>
+              <a:t>critical reviews per 1,000 units</a:t>
+            </a:r>
+            <a:endParaRPr lang="en-US" sz="1100" dirty="0"/>
+          </a:p>
+          <a:p>
+            <a:pPr indent="0" marL="0">
+              <a:buNone/>
+            </a:pPr>
+            <a:r>
+              <a:rPr lang="en-US" sz="1100" dirty="0">
+                <a:solidFill>
+                  <a:schemeClr val="accent1"/>
+                </a:solidFill>
+                <a:latin typeface="Microsoft YaHei" pitchFamily="34" charset="0"/>
+                <a:ea typeface="Microsoft YaHei" pitchFamily="34" charset="-122"/>
+                <a:cs typeface="Microsoft YaHei" pitchFamily="34" charset="-120"/>
+              </a:rPr>
+              <a:t>每千件产品的差评数</a:t>
+            </a:r>
+            <a:endParaRPr lang="en-US" sz="1100" dirty="0"/>
+          </a:p>
+        </p:txBody>
+      </p:sp>
+      <p:sp>
+        <p:nvSpPr>
+          <p:cNvPr id="11" name="Theme 1"/>
+          <p:cNvSpPr txBox="1"/>
+          <p:nvPr/>
+        </p:nvSpPr>
+        <p:spPr>
+          <a:xfrm>
+            <a:off x="4114800" y="1645920"/>
+            <a:ext cx="6705295" cy="256032"/>
+          </a:xfrm>
+          <a:prstGeom prst="rect">
+            <a:avLst/>
+          </a:prstGeom>
+          <a:noFill/>
+          <a:ln/>
+        </p:spPr>
+        <p:txBody>
+          <a:bodyPr wrap="square" lIns="0" tIns="0" rIns="0" bIns="0" rtlCol="0" anchor="t"/>
+          <a:lstStyle/>
+          <a:p>
+            <a:pPr indent="0" marL="0">
+              <a:buNone/>
+            </a:pPr>
+            <a:r>
+              <a:rPr lang="en-US" sz="1350" b="1" dirty="0">
+                <a:solidFill>
+                  <a:schemeClr val="tx1"/>
+                </a:solidFill>
+              </a:rPr>
+              <a:t>Shaving and trimming result</a:t>
+            </a:r>
+            <a:pPr indent="0" marL="0">
+              <a:buNone/>
+            </a:pPr>
+            <a:r>
+              <a:rPr lang="en-US" sz="1250" dirty="0">
+                <a:solidFill>
+                  <a:schemeClr val="accent1"/>
+                </a:solidFill>
+                <a:latin typeface="Microsoft YaHei" pitchFamily="34" charset="0"/>
+                <a:ea typeface="Microsoft YaHei" pitchFamily="34" charset="-122"/>
+                <a:cs typeface="Microsoft YaHei" pitchFamily="34" charset="-120"/>
+              </a:rPr>
+              <a:t>   剃须与修剪效果</a:t>
+            </a:r>
+            <a:endParaRPr lang="en-US" sz="1350" dirty="0"/>
+          </a:p>
+        </p:txBody>
+      </p:sp>
+      <p:sp>
+        <p:nvSpPr>
+          <p:cNvPr id="12" name="Theme count 1"/>
+          <p:cNvSpPr txBox="1"/>
+          <p:nvPr/>
+        </p:nvSpPr>
+        <p:spPr>
+          <a:xfrm>
+            <a:off x="10820095" y="1627632"/>
+            <a:ext cx="822960" cy="292608"/>
+          </a:xfrm>
+          <a:prstGeom prst="rect">
+            <a:avLst/>
+          </a:prstGeom>
+          <a:noFill/>
+          <a:ln/>
+        </p:spPr>
+        <p:txBody>
+          <a:bodyPr wrap="square" lIns="0" tIns="0" rIns="0" bIns="0" rtlCol="0" anchor="t"/>
+          <a:lstStyle/>
+          <a:p>
+            <a:pPr algn="r" indent="0" marL="0">
+              <a:buNone/>
+            </a:pPr>
+            <a:r>
+              <a:rPr lang="en-US" sz="1600" b="1" dirty="0">
+                <a:solidFill>
+                  <a:schemeClr val="tx1"/>
+                </a:solidFill>
+              </a:rPr>
+              <a:t>25</a:t>
+            </a:r>
+            <a:endParaRPr lang="en-US" sz="1600" dirty="0"/>
+          </a:p>
+        </p:txBody>
+      </p:sp>
+      <p:sp>
+        <p:nvSpPr>
+          <p:cNvPr id="13" name="Theme track 1"/>
+          <p:cNvSpPr/>
+          <p:nvPr/>
+        </p:nvSpPr>
+        <p:spPr>
+          <a:xfrm>
+            <a:off x="4114800" y="1947672"/>
+            <a:ext cx="7528255" cy="91440"/>
+          </a:xfrm>
+          <a:prstGeom prst="roundRect">
+            <a:avLst>
+              <a:gd name="adj" fmla="val 50000"/>
+            </a:avLst>
+          </a:prstGeom>
+          <a:solidFill>
+            <a:schemeClr val="accent3"/>
+          </a:solidFill>
+          <a:ln/>
+        </p:spPr>
+      </p:sp>
+      <p:sp>
+        <p:nvSpPr>
+          <p:cNvPr id="14" name="Theme bar 1"/>
+          <p:cNvSpPr/>
+          <p:nvPr/>
+        </p:nvSpPr>
+        <p:spPr>
+          <a:xfrm>
+            <a:off x="4114800" y="1947672"/>
+            <a:ext cx="7528255" cy="91440"/>
+          </a:xfrm>
+          <a:prstGeom prst="roundRect">
+            <a:avLst>
+              <a:gd name="adj" fmla="val 50000"/>
+            </a:avLst>
+          </a:prstGeom>
+          <a:solidFill>
+            <a:schemeClr val="accent1"/>
+          </a:solidFill>
+          <a:ln/>
+        </p:spPr>
+      </p:sp>
+      <p:sp>
+        <p:nvSpPr>
+          <p:cNvPr id="15" name="Theme quote 1"/>
+          <p:cNvSpPr txBox="1"/>
+          <p:nvPr/>
+        </p:nvSpPr>
+        <p:spPr>
+          <a:xfrm>
+            <a:off x="4114800" y="2075688"/>
+            <a:ext cx="7528255" cy="329184"/>
+          </a:xfrm>
+          <a:prstGeom prst="rect">
+            <a:avLst/>
+          </a:prstGeom>
+          <a:noFill/>
+          <a:ln/>
+        </p:spPr>
+        <p:txBody>
+          <a:bodyPr wrap="square" lIns="0" tIns="0" rIns="0" bIns="0" rtlCol="0" anchor="t"/>
+          <a:lstStyle/>
+          <a:p>
+            <a:pPr indent="0" marL="0">
+              <a:buNone/>
+            </a:pPr>
+            <a:r>
+              <a:rPr lang="en-US" sz="1000" i="1" dirty="0">
+                <a:solidFill>
+                  <a:schemeClr val="tx1"/>
+                </a:solidFill>
+              </a:rPr>
+              <a:t>“It pulls the hairs out instead of cutting them. Painful.”</a:t>
+            </a:r>
+            <a:br/>
+            <a:pPr indent="0" marL="0">
+              <a:buNone/>
+            </a:pPr>
+            <a:r>
+              <a:rPr lang="en-US" sz="1000" dirty="0">
+                <a:solidFill>
+                  <a:schemeClr val="accent6"/>
+                </a:solidFill>
+                <a:latin typeface="Microsoft YaHei" pitchFamily="34" charset="0"/>
+                <a:ea typeface="Microsoft YaHei" pitchFamily="34" charset="-122"/>
+                <a:cs typeface="Microsoft YaHei" pitchFamily="34" charset="-120"/>
+              </a:rPr>
+              <a:t>它不是把胡须剪断，而是把胡须拔出来，很疼。</a:t>
+            </a:r>
+            <a:endParaRPr lang="en-US" sz="1000" dirty="0"/>
+          </a:p>
+        </p:txBody>
+      </p:sp>
+      <p:sp>
+        <p:nvSpPr>
+          <p:cNvPr id="16" name="Theme 2"/>
+          <p:cNvSpPr txBox="1"/>
+          <p:nvPr/>
+        </p:nvSpPr>
+        <p:spPr>
+          <a:xfrm>
+            <a:off x="4114800" y="2606040"/>
+            <a:ext cx="6705295" cy="256032"/>
+          </a:xfrm>
+          <a:prstGeom prst="rect">
+            <a:avLst/>
+          </a:prstGeom>
+          <a:noFill/>
+          <a:ln/>
+        </p:spPr>
+        <p:txBody>
+          <a:bodyPr wrap="square" lIns="0" tIns="0" rIns="0" bIns="0" rtlCol="0" anchor="t"/>
+          <a:lstStyle/>
+          <a:p>
+            <a:pPr indent="0" marL="0">
+              <a:buNone/>
+            </a:pPr>
+            <a:r>
+              <a:rPr lang="en-US" sz="1350" b="1" dirty="0">
+                <a:solidFill>
+                  <a:schemeClr val="tx1"/>
+                </a:solidFill>
+              </a:rPr>
+              <a:t>Build quality and durability</a:t>
+            </a:r>
+            <a:pPr indent="0" marL="0">
+              <a:buNone/>
+            </a:pPr>
+            <a:r>
+              <a:rPr lang="en-US" sz="1250" dirty="0">
+                <a:solidFill>
+                  <a:schemeClr val="accent1"/>
+                </a:solidFill>
+                <a:latin typeface="Microsoft YaHei" pitchFamily="34" charset="0"/>
+                <a:ea typeface="Microsoft YaHei" pitchFamily="34" charset="-122"/>
+                <a:cs typeface="Microsoft YaHei" pitchFamily="34" charset="-120"/>
+              </a:rPr>
+              <a:t>   做工与耐用性</a:t>
+            </a:r>
+            <a:endParaRPr lang="en-US" sz="1350" dirty="0"/>
+          </a:p>
+        </p:txBody>
+      </p:sp>
+      <p:sp>
+        <p:nvSpPr>
+          <p:cNvPr id="17" name="Theme count 2"/>
+          <p:cNvSpPr txBox="1"/>
+          <p:nvPr/>
+        </p:nvSpPr>
+        <p:spPr>
+          <a:xfrm>
+            <a:off x="10820095" y="2587752"/>
+            <a:ext cx="822960" cy="292608"/>
+          </a:xfrm>
+          <a:prstGeom prst="rect">
+            <a:avLst/>
+          </a:prstGeom>
+          <a:noFill/>
+          <a:ln/>
+        </p:spPr>
+        <p:txBody>
+          <a:bodyPr wrap="square" lIns="0" tIns="0" rIns="0" bIns="0" rtlCol="0" anchor="t"/>
+          <a:lstStyle/>
+          <a:p>
+            <a:pPr algn="r" indent="0" marL="0">
+              <a:buNone/>
+            </a:pPr>
+            <a:r>
+              <a:rPr lang="en-US" sz="1600" b="1" dirty="0">
+                <a:solidFill>
+                  <a:schemeClr val="tx1"/>
+                </a:solidFill>
+              </a:rPr>
+              <a:t>11</a:t>
+            </a:r>
+            <a:endParaRPr lang="en-US" sz="1600" dirty="0"/>
+          </a:p>
+        </p:txBody>
+      </p:sp>
+      <p:sp>
+        <p:nvSpPr>
+          <p:cNvPr id="18" name="Theme track 2"/>
+          <p:cNvSpPr/>
+          <p:nvPr/>
+        </p:nvSpPr>
+        <p:spPr>
+          <a:xfrm>
+            <a:off x="4114800" y="2907792"/>
+            <a:ext cx="7528255" cy="91440"/>
+          </a:xfrm>
+          <a:prstGeom prst="roundRect">
+            <a:avLst>
+              <a:gd name="adj" fmla="val 50000"/>
+            </a:avLst>
+          </a:prstGeom>
+          <a:solidFill>
+            <a:schemeClr val="accent3"/>
+          </a:solidFill>
+          <a:ln/>
+        </p:spPr>
+      </p:sp>
+      <p:sp>
+        <p:nvSpPr>
+          <p:cNvPr id="19" name="Theme bar 2"/>
+          <p:cNvSpPr/>
+          <p:nvPr/>
+        </p:nvSpPr>
+        <p:spPr>
+          <a:xfrm>
+            <a:off x="4114800" y="2907792"/>
+            <a:ext cx="3312432" cy="91440"/>
+          </a:xfrm>
+          <a:prstGeom prst="roundRect">
+            <a:avLst>
+              <a:gd name="adj" fmla="val 50000"/>
+            </a:avLst>
+          </a:prstGeom>
+          <a:solidFill>
+            <a:schemeClr val="accent1"/>
+          </a:solidFill>
+          <a:ln/>
+        </p:spPr>
+      </p:sp>
+      <p:sp>
+        <p:nvSpPr>
+          <p:cNvPr id="20" name="Theme quote 2"/>
+          <p:cNvSpPr txBox="1"/>
+          <p:nvPr/>
+        </p:nvSpPr>
+        <p:spPr>
+          <a:xfrm>
+            <a:off x="4114800" y="3035808"/>
+            <a:ext cx="7528255" cy="329184"/>
+          </a:xfrm>
+          <a:prstGeom prst="rect">
+            <a:avLst/>
+          </a:prstGeom>
+          <a:noFill/>
+          <a:ln/>
+        </p:spPr>
+        <p:txBody>
+          <a:bodyPr wrap="square" lIns="0" tIns="0" rIns="0" bIns="0" rtlCol="0" anchor="t"/>
+          <a:lstStyle/>
+          <a:p>
+            <a:pPr indent="0" marL="0">
+              <a:buNone/>
+            </a:pPr>
+            <a:r>
+              <a:rPr lang="en-US" sz="1000" i="1" dirty="0">
+                <a:solidFill>
+                  <a:schemeClr val="tx1"/>
+                </a:solidFill>
+              </a:rPr>
+              <a:t>“The shaving head is loose and falls out of the holder.”</a:t>
+            </a:r>
+            <a:br/>
+            <a:pPr indent="0" marL="0">
+              <a:buNone/>
+            </a:pPr>
+            <a:r>
+              <a:rPr lang="en-US" sz="1000" dirty="0">
+                <a:solidFill>
+                  <a:schemeClr val="accent6"/>
+                </a:solidFill>
+                <a:latin typeface="Microsoft YaHei" pitchFamily="34" charset="0"/>
+                <a:ea typeface="Microsoft YaHei" pitchFamily="34" charset="-122"/>
+                <a:cs typeface="Microsoft YaHei" pitchFamily="34" charset="-120"/>
+              </a:rPr>
+              <a:t>刀头不牢固，容易从刀架上掉出来。</a:t>
+            </a:r>
+            <a:endParaRPr lang="en-US" sz="1000" dirty="0"/>
+          </a:p>
+        </p:txBody>
+      </p:sp>
+      <p:sp>
+        <p:nvSpPr>
+          <p:cNvPr id="21" name="Theme 3"/>
+          <p:cNvSpPr txBox="1"/>
+          <p:nvPr/>
+        </p:nvSpPr>
+        <p:spPr>
+          <a:xfrm>
+            <a:off x="4114800" y="3566160"/>
+            <a:ext cx="6705295" cy="256032"/>
+          </a:xfrm>
+          <a:prstGeom prst="rect">
+            <a:avLst/>
+          </a:prstGeom>
+          <a:noFill/>
+          <a:ln/>
+        </p:spPr>
+        <p:txBody>
+          <a:bodyPr wrap="square" lIns="0" tIns="0" rIns="0" bIns="0" rtlCol="0" anchor="t"/>
+          <a:lstStyle/>
+          <a:p>
+            <a:pPr indent="0" marL="0">
+              <a:buNone/>
+            </a:pPr>
+            <a:r>
+              <a:rPr lang="en-US" sz="1350" b="1" dirty="0">
+                <a:solidFill>
+                  <a:schemeClr val="tx1"/>
+                </a:solidFill>
+              </a:rPr>
+              <a:t>Battery and charging</a:t>
+            </a:r>
+            <a:pPr indent="0" marL="0">
+              <a:buNone/>
+            </a:pPr>
+            <a:r>
+              <a:rPr lang="en-US" sz="1250" dirty="0">
+                <a:solidFill>
+                  <a:schemeClr val="accent1"/>
+                </a:solidFill>
+                <a:latin typeface="Microsoft YaHei" pitchFamily="34" charset="0"/>
+                <a:ea typeface="Microsoft YaHei" pitchFamily="34" charset="-122"/>
+                <a:cs typeface="Microsoft YaHei" pitchFamily="34" charset="-120"/>
+              </a:rPr>
+              <a:t>   电池与充电</a:t>
+            </a:r>
+            <a:endParaRPr lang="en-US" sz="1350" dirty="0"/>
+          </a:p>
+        </p:txBody>
+      </p:sp>
+      <p:sp>
+        <p:nvSpPr>
+          <p:cNvPr id="22" name="Theme count 3"/>
+          <p:cNvSpPr txBox="1"/>
+          <p:nvPr/>
+        </p:nvSpPr>
+        <p:spPr>
+          <a:xfrm>
+            <a:off x="10820095" y="3547872"/>
+            <a:ext cx="822960" cy="292608"/>
+          </a:xfrm>
+          <a:prstGeom prst="rect">
+            <a:avLst/>
+          </a:prstGeom>
+          <a:noFill/>
+          <a:ln/>
+        </p:spPr>
+        <p:txBody>
+          <a:bodyPr wrap="square" lIns="0" tIns="0" rIns="0" bIns="0" rtlCol="0" anchor="t"/>
+          <a:lstStyle/>
+          <a:p>
+            <a:pPr algn="r" indent="0" marL="0">
+              <a:buNone/>
+            </a:pPr>
+            <a:r>
+              <a:rPr lang="en-US" sz="1600" b="1" dirty="0">
+                <a:solidFill>
+                  <a:schemeClr val="tx1"/>
+                </a:solidFill>
+              </a:rPr>
+              <a:t>8</a:t>
+            </a:r>
+            <a:endParaRPr lang="en-US" sz="1600" dirty="0"/>
+          </a:p>
+        </p:txBody>
+      </p:sp>
+      <p:sp>
+        <p:nvSpPr>
+          <p:cNvPr id="23" name="Theme track 3"/>
+          <p:cNvSpPr/>
+          <p:nvPr/>
+        </p:nvSpPr>
+        <p:spPr>
+          <a:xfrm>
+            <a:off x="4114800" y="3867912"/>
+            <a:ext cx="7528255" cy="91440"/>
+          </a:xfrm>
+          <a:prstGeom prst="roundRect">
+            <a:avLst>
+              <a:gd name="adj" fmla="val 50000"/>
+            </a:avLst>
+          </a:prstGeom>
+          <a:solidFill>
+            <a:schemeClr val="accent3"/>
+          </a:solidFill>
+          <a:ln/>
+        </p:spPr>
+      </p:sp>
+      <p:sp>
+        <p:nvSpPr>
+          <p:cNvPr id="24" name="Theme bar 3"/>
+          <p:cNvSpPr/>
+          <p:nvPr/>
+        </p:nvSpPr>
+        <p:spPr>
+          <a:xfrm>
+            <a:off x="4114800" y="3867912"/>
+            <a:ext cx="2409042" cy="91440"/>
+          </a:xfrm>
+          <a:prstGeom prst="roundRect">
+            <a:avLst>
+              <a:gd name="adj" fmla="val 50000"/>
+            </a:avLst>
+          </a:prstGeom>
+          <a:solidFill>
+            <a:schemeClr val="accent1"/>
+          </a:solidFill>
+          <a:ln/>
+        </p:spPr>
+      </p:sp>
+      <p:sp>
+        <p:nvSpPr>
+          <p:cNvPr id="25" name="Theme quote 3"/>
+          <p:cNvSpPr txBox="1"/>
+          <p:nvPr/>
+        </p:nvSpPr>
+        <p:spPr>
+          <a:xfrm>
+            <a:off x="4114800" y="3995928"/>
+            <a:ext cx="7528255" cy="329184"/>
+          </a:xfrm>
+          <a:prstGeom prst="rect">
+            <a:avLst/>
+          </a:prstGeom>
+          <a:noFill/>
+          <a:ln/>
+        </p:spPr>
+        <p:txBody>
+          <a:bodyPr wrap="square" lIns="0" tIns="0" rIns="0" bIns="0" rtlCol="0" anchor="t"/>
+          <a:lstStyle/>
+          <a:p>
+            <a:pPr indent="0" marL="0">
+              <a:buNone/>
+            </a:pPr>
+            <a:r>
+              <a:rPr lang="en-US" sz="1000" i="1" dirty="0">
+                <a:solidFill>
+                  <a:schemeClr val="tx1"/>
+                </a:solidFill>
+              </a:rPr>
+              <a:t>“Runs 60 minutes at most instead of 90, and charging takes an hour longer.”</a:t>
+            </a:r>
+            <a:br/>
+            <a:pPr indent="0" marL="0">
+              <a:buNone/>
+            </a:pPr>
+            <a:r>
+              <a:rPr lang="en-US" sz="1000" dirty="0">
+                <a:solidFill>
+                  <a:schemeClr val="accent6"/>
+                </a:solidFill>
+                <a:latin typeface="Microsoft YaHei" pitchFamily="34" charset="0"/>
+                <a:ea typeface="Microsoft YaHei" pitchFamily="34" charset="-122"/>
+                <a:cs typeface="Microsoft YaHei" pitchFamily="34" charset="-120"/>
+              </a:rPr>
+              <a:t>最多只能用60分钟，而不是90分钟，充电还要多花一个小时。</a:t>
+            </a:r>
+            <a:endParaRPr lang="en-US" sz="1000" dirty="0"/>
+          </a:p>
+        </p:txBody>
+      </p:sp>
+      <p:sp>
+        <p:nvSpPr>
+          <p:cNvPr id="26" name="Theme 4"/>
+          <p:cNvSpPr txBox="1"/>
+          <p:nvPr/>
+        </p:nvSpPr>
+        <p:spPr>
+          <a:xfrm>
+            <a:off x="4114800" y="4526280"/>
+            <a:ext cx="6705295" cy="256032"/>
+          </a:xfrm>
+          <a:prstGeom prst="rect">
+            <a:avLst/>
+          </a:prstGeom>
+          <a:noFill/>
+          <a:ln/>
+        </p:spPr>
+        <p:txBody>
+          <a:bodyPr wrap="square" lIns="0" tIns="0" rIns="0" bIns="0" rtlCol="0" anchor="t"/>
+          <a:lstStyle/>
+          <a:p>
+            <a:pPr indent="0" marL="0">
+              <a:buNone/>
+            </a:pPr>
+            <a:r>
+              <a:rPr lang="en-US" sz="1350" b="1" dirty="0">
+                <a:solidFill>
+                  <a:schemeClr val="tx1"/>
+                </a:solidFill>
+              </a:rPr>
+              <a:t>Missing or unsuitable accessories</a:t>
+            </a:r>
+            <a:pPr indent="0" marL="0">
+              <a:buNone/>
+            </a:pPr>
+            <a:r>
+              <a:rPr lang="en-US" sz="1250" dirty="0">
+                <a:solidFill>
+                  <a:schemeClr val="accent1"/>
+                </a:solidFill>
+                <a:latin typeface="Microsoft YaHei" pitchFamily="34" charset="0"/>
+                <a:ea typeface="Microsoft YaHei" pitchFamily="34" charset="-122"/>
+                <a:cs typeface="Microsoft YaHei" pitchFamily="34" charset="-120"/>
+              </a:rPr>
+              <a:t>   配件缺失或不合适</a:t>
+            </a:r>
+            <a:endParaRPr lang="en-US" sz="1350" dirty="0"/>
+          </a:p>
+        </p:txBody>
+      </p:sp>
+      <p:sp>
+        <p:nvSpPr>
+          <p:cNvPr id="27" name="Theme count 4"/>
+          <p:cNvSpPr txBox="1"/>
+          <p:nvPr/>
+        </p:nvSpPr>
+        <p:spPr>
+          <a:xfrm>
+            <a:off x="10820095" y="4507992"/>
+            <a:ext cx="822960" cy="292608"/>
+          </a:xfrm>
+          <a:prstGeom prst="rect">
+            <a:avLst/>
+          </a:prstGeom>
+          <a:noFill/>
+          <a:ln/>
+        </p:spPr>
+        <p:txBody>
+          <a:bodyPr wrap="square" lIns="0" tIns="0" rIns="0" bIns="0" rtlCol="0" anchor="t"/>
+          <a:lstStyle/>
+          <a:p>
+            <a:pPr algn="r" indent="0" marL="0">
+              <a:buNone/>
+            </a:pPr>
+            <a:r>
+              <a:rPr lang="en-US" sz="1600" b="1" dirty="0">
+                <a:solidFill>
+                  <a:schemeClr val="tx1"/>
+                </a:solidFill>
+              </a:rPr>
+              <a:t>3</a:t>
+            </a:r>
+            <a:endParaRPr lang="en-US" sz="1600" dirty="0"/>
+          </a:p>
+        </p:txBody>
+      </p:sp>
+      <p:sp>
+        <p:nvSpPr>
+          <p:cNvPr id="28" name="Theme track 4"/>
+          <p:cNvSpPr/>
+          <p:nvPr/>
+        </p:nvSpPr>
+        <p:spPr>
+          <a:xfrm>
+            <a:off x="4114800" y="4828032"/>
+            <a:ext cx="7528255" cy="91440"/>
+          </a:xfrm>
+          <a:prstGeom prst="roundRect">
+            <a:avLst>
+              <a:gd name="adj" fmla="val 50000"/>
+            </a:avLst>
+          </a:prstGeom>
+          <a:solidFill>
+            <a:schemeClr val="accent3"/>
+          </a:solidFill>
+          <a:ln/>
+        </p:spPr>
+      </p:sp>
+      <p:sp>
+        <p:nvSpPr>
+          <p:cNvPr id="29" name="Theme bar 4"/>
+          <p:cNvSpPr/>
+          <p:nvPr/>
+        </p:nvSpPr>
+        <p:spPr>
+          <a:xfrm>
+            <a:off x="4114800" y="4828032"/>
+            <a:ext cx="903391" cy="91440"/>
+          </a:xfrm>
+          <a:prstGeom prst="roundRect">
+            <a:avLst>
+              <a:gd name="adj" fmla="val 50000"/>
+            </a:avLst>
+          </a:prstGeom>
+          <a:solidFill>
+            <a:schemeClr val="accent1"/>
+          </a:solidFill>
+          <a:ln/>
+        </p:spPr>
+      </p:sp>
+      <p:sp>
+        <p:nvSpPr>
+          <p:cNvPr id="30" name="Theme quote 4"/>
+          <p:cNvSpPr txBox="1"/>
+          <p:nvPr/>
+        </p:nvSpPr>
+        <p:spPr>
+          <a:xfrm>
+            <a:off x="4114800" y="4956048"/>
+            <a:ext cx="7528255" cy="329184"/>
+          </a:xfrm>
+          <a:prstGeom prst="rect">
+            <a:avLst/>
+          </a:prstGeom>
+          <a:noFill/>
+          <a:ln/>
+        </p:spPr>
+        <p:txBody>
+          <a:bodyPr wrap="square" lIns="0" tIns="0" rIns="0" bIns="0" rtlCol="0" anchor="t"/>
+          <a:lstStyle/>
+          <a:p>
+            <a:pPr indent="0" marL="0">
+              <a:buNone/>
+            </a:pPr>
+            <a:r>
+              <a:rPr lang="en-US" sz="1000" i="1" dirty="0">
+                <a:solidFill>
+                  <a:schemeClr val="tx1"/>
+                </a:solidFill>
+              </a:rPr>
+              <a:t>“The charging cable was missing from the box.”</a:t>
+            </a:r>
+            <a:br/>
+            <a:pPr indent="0" marL="0">
+              <a:buNone/>
+            </a:pPr>
+            <a:r>
+              <a:rPr lang="en-US" sz="1000" dirty="0">
+                <a:solidFill>
+                  <a:schemeClr val="accent6"/>
+                </a:solidFill>
+                <a:latin typeface="Microsoft YaHei" pitchFamily="34" charset="0"/>
+                <a:ea typeface="Microsoft YaHei" pitchFamily="34" charset="-122"/>
+                <a:cs typeface="Microsoft YaHei" pitchFamily="34" charset="-120"/>
+              </a:rPr>
+              <a:t>包装里缺少充电线。</a:t>
+            </a:r>
+            <a:endParaRPr lang="en-US" sz="1000" dirty="0"/>
+          </a:p>
+        </p:txBody>
+      </p:sp>
+      <p:sp>
+        <p:nvSpPr>
+          <p:cNvPr id="31" name="Review source"/>
+          <p:cNvSpPr txBox="1"/>
+          <p:nvPr/>
+        </p:nvSpPr>
+        <p:spPr>
+          <a:xfrm>
+            <a:off x="548640" y="5989320"/>
+            <a:ext cx="11094415" cy="329184"/>
+          </a:xfrm>
+          <a:prstGeom prst="rect">
+            <a:avLst/>
+          </a:prstGeom>
+          <a:noFill/>
+          <a:ln/>
+        </p:spPr>
+        <p:txBody>
+          <a:bodyPr wrap="square" lIns="0" tIns="0" rIns="0" bIns="0" rtlCol="0" anchor="t"/>
+          <a:lstStyle/>
+          <a:p>
+            <a:pPr indent="0" marL="0">
+              <a:spcAft>
+                <a:spcPts val="100"/>
+              </a:spcAft>
+              <a:buNone/>
+            </a:pPr>
+            <a:r>
+              <a:rPr lang="en-US" sz="900" dirty="0">
+                <a:solidFill>
+                  <a:schemeClr val="accent6"/>
+                </a:solidFill>
+              </a:rPr>
+              <a:t>Source: bol.com reviews with 1 to 3 stars on your products, January to October 2026. One review can mention several topics.</a:t>
+            </a:r>
+            <a:endParaRPr lang="en-US" sz="900" dirty="0"/>
+          </a:p>
+          <a:p>
+            <a:pPr indent="0" marL="0">
+              <a:spcAft>
+                <a:spcPts val="100"/>
+              </a:spcAft>
+              <a:buNone/>
+            </a:pPr>
+            <a:r>
+              <a:rPr lang="en-US" sz="900" dirty="0">
+                <a:solidFill>
+                  <a:schemeClr val="accent6"/>
+                </a:solidFill>
+                <a:latin typeface="Microsoft YaHei" pitchFamily="34" charset="0"/>
+                <a:ea typeface="Microsoft YaHei" pitchFamily="34" charset="-122"/>
+                <a:cs typeface="Microsoft YaHei" pitchFamily="34" charset="-120"/>
+              </a:rPr>
+              <a:t>数据来源：2026年1月至10月bol.com上贵司产品的1至3星评价，一条评价可能涉及多个问题。</a:t>
+            </a:r>
+            <a:endParaRPr lang="en-US" sz="900" dirty="0"/>
           </a:p>
         </p:txBody>
       </p:sp>
@@ -9474,7 +9799,7 @@
                   <a:schemeClr val="bg1"/>
                 </a:solidFill>
               </a:rPr>
-              <a:t>What we would love to see</a:t>
+              <a:t>What we want to improve together</a:t>
             </a:r>
             <a:endParaRPr lang="en-US" sz="3200" dirty="0"/>
           </a:p>
@@ -9515,7 +9840,7 @@
                 <a:ea typeface="Microsoft YaHei" pitchFamily="34" charset="-122"/>
                 <a:cs typeface="Microsoft YaHei" pitchFamily="34" charset="-120"/>
               </a:rPr>
-              <a:t>我们最期待看到的</a:t>
+              <a:t>我们希望共同改进的方向</a:t>
             </a:r>
             <a:endParaRPr lang="en-US" sz="2000" dirty="0"/>
           </a:p>
@@ -9523,18 +9848,18 @@
       </p:sp>
       <p:sp>
         <p:nvSpPr>
-          <p:cNvPr id="4" name="Ask card 1"/>
+          <p:cNvPr id="4" name="Priority card 1"/>
           <p:cNvSpPr/>
           <p:nvPr/>
         </p:nvSpPr>
         <p:spPr>
           <a:xfrm>
-            <a:off x="548640" y="1783080"/>
-            <a:ext cx="6675120" cy="1691640"/>
+            <a:off x="548640" y="1755648"/>
+            <a:ext cx="3515258" cy="3639312"/>
           </a:xfrm>
           <a:prstGeom prst="roundRect">
             <a:avLst>
-              <a:gd name="adj" fmla="val 8649"/>
+              <a:gd name="adj" fmla="val 4162"/>
             </a:avLst>
           </a:prstGeom>
           <a:solidFill>
@@ -9545,13 +9870,13 @@
       </p:sp>
       <p:sp>
         <p:nvSpPr>
-          <p:cNvPr id="5" name="Ask badge 1"/>
+          <p:cNvPr id="5" name="Priority badge 1"/>
           <p:cNvSpPr/>
           <p:nvPr/>
         </p:nvSpPr>
         <p:spPr>
           <a:xfrm>
-            <a:off x="822960" y="2057400"/>
+            <a:off x="822960" y="2029968"/>
             <a:ext cx="658368" cy="658368"/>
           </a:xfrm>
           <a:prstGeom prst="ellipse">
@@ -9565,7 +9890,7 @@
       </p:sp>
       <p:pic>
         <p:nvPicPr>
-          <p:cNvPr id="6" name="Ask icon 1" descr="preencoded.png">    </p:cNvPr>
+          <p:cNvPr id="6" name="Priority icon 1" descr="preencoded.png">    </p:cNvPr>
           <p:cNvPicPr>
             <a:picLocks noChangeAspect="1"/>
           </p:cNvPicPr>
@@ -9579,7 +9904,7 @@
         </p:blipFill>
         <p:spPr>
           <a:xfrm>
-            <a:off x="969264" y="2203704"/>
+            <a:off x="969264" y="2176272"/>
             <a:ext cx="365760" cy="365760"/>
           </a:xfrm>
           <a:prstGeom prst="rect">
@@ -9589,14 +9914,14 @@
       </p:pic>
       <p:sp>
         <p:nvSpPr>
-          <p:cNvPr id="7" name="Ask text 1"/>
+          <p:cNvPr id="7" name="Priority title 1"/>
           <p:cNvSpPr txBox="1"/>
           <p:nvPr/>
         </p:nvSpPr>
         <p:spPr>
           <a:xfrm>
-            <a:off x="1691640" y="2057400"/>
-            <a:ext cx="5303520" cy="1280160"/>
+            <a:off x="1645920" y="1993392"/>
+            <a:ext cx="2235098" cy="777240"/>
           </a:xfrm>
           <a:prstGeom prst="rect">
             <a:avLst/>
@@ -9610,26 +9935,29 @@
           <a:p>
             <a:pPr indent="0" marL="0">
               <a:spcAft>
-                <a:spcPts val="500"/>
-              </a:spcAft>
-              <a:buNone/>
-            </a:pPr>
-            <a:r>
-              <a:rPr lang="en-US" sz="1800" b="1" dirty="0">
+                <a:spcPts val="100"/>
+              </a:spcAft>
+              <a:buNone/>
+            </a:pPr>
+            <a:r>
+              <a:rPr lang="en-US" sz="2000" b="1" dirty="0">
                 <a:solidFill>
                   <a:schemeClr val="bg1"/>
                 </a:solidFill>
               </a:rPr>
-              <a:t>Samples</a:t>
-            </a:r>
-            <a:pPr indent="0" marL="0">
-              <a:spcAft>
-                <a:spcPts val="500"/>
-              </a:spcAft>
-              <a:buNone/>
-            </a:pPr>
-            <a:r>
-              <a:rPr lang="en-US" sz="1600" b="1" dirty="0">
+              <a:t>Better quality</a:t>
+            </a:r>
+            <a:endParaRPr lang="en-US" sz="2000" dirty="0"/>
+          </a:p>
+          <a:p>
+            <a:pPr indent="0" marL="0">
+              <a:spcAft>
+                <a:spcPts val="100"/>
+              </a:spcAft>
+              <a:buNone/>
+            </a:pPr>
+            <a:r>
+              <a:rPr lang="en-US" sz="1700" b="1" dirty="0">
                 <a:solidFill>
                   <a:schemeClr val="accent2"/>
                 </a:solidFill>
@@ -9637,63 +9965,245 @@
                 <a:ea typeface="Microsoft YaHei" pitchFamily="34" charset="-122"/>
                 <a:cs typeface="Microsoft YaHei" pitchFamily="34" charset="-120"/>
               </a:rPr>
-              <a:t>  样品</a:t>
-            </a:r>
-            <a:endParaRPr lang="en-US" sz="1800" dirty="0"/>
-          </a:p>
-          <a:p>
-            <a:pPr indent="0" marL="0">
-              <a:spcAft>
-                <a:spcPts val="500"/>
-              </a:spcAft>
-              <a:buNone/>
-            </a:pPr>
-            <a:r>
-              <a:rPr lang="en-US" sz="1300" dirty="0">
-                <a:solidFill>
-                  <a:schemeClr val="bg1"/>
-                </a:solidFill>
-              </a:rPr>
-              <a:t>New models and improved batteries. We like to hold and test them ourselves.</a:t>
-            </a:r>
-            <a:endParaRPr lang="en-US" sz="1800" dirty="0"/>
-          </a:p>
-          <a:p>
-            <a:pPr indent="0" marL="0">
-              <a:spcAft>
-                <a:spcPts val="500"/>
-              </a:spcAft>
-              <a:buNone/>
-            </a:pPr>
-            <a:r>
-              <a:rPr lang="en-US" sz="1300" dirty="0">
-                <a:solidFill>
-                  <a:schemeClr val="accent3"/>
+              <a:t>更好的品质</a:t>
+            </a:r>
+            <a:endParaRPr lang="en-US" sz="2000" dirty="0"/>
+          </a:p>
+        </p:txBody>
+      </p:sp>
+      <p:sp>
+        <p:nvSpPr>
+          <p:cNvPr id="8" name="Priority focus 1"/>
+          <p:cNvSpPr txBox="1"/>
+          <p:nvPr/>
+        </p:nvSpPr>
+        <p:spPr>
+          <a:xfrm>
+            <a:off x="822960" y="2871216"/>
+            <a:ext cx="3058058" cy="457200"/>
+          </a:xfrm>
+          <a:prstGeom prst="rect">
+            <a:avLst/>
+          </a:prstGeom>
+          <a:noFill/>
+          <a:ln/>
+        </p:spPr>
+        <p:txBody>
+          <a:bodyPr wrap="square" lIns="0" tIns="0" rIns="0" bIns="0" rtlCol="0" anchor="t"/>
+          <a:lstStyle/>
+          <a:p>
+            <a:pPr indent="0" marL="0">
+              <a:spcAft>
+                <a:spcPts val="100"/>
+              </a:spcAft>
+              <a:buNone/>
+            </a:pPr>
+            <a:r>
+              <a:rPr lang="en-US" sz="1000" b="1" spc="100" kern="0" dirty="0">
+                <a:solidFill>
+                  <a:schemeClr val="accent2"/>
+                </a:solidFill>
+              </a:rPr>
+              <a:t>FOCUS: BATTERIES &amp; CHARGING</a:t>
+            </a:r>
+            <a:endParaRPr lang="en-US" sz="1000" dirty="0"/>
+          </a:p>
+          <a:p>
+            <a:pPr indent="0" marL="0">
+              <a:spcAft>
+                <a:spcPts val="100"/>
+              </a:spcAft>
+              <a:buNone/>
+            </a:pPr>
+            <a:r>
+              <a:rPr lang="en-US" sz="1100" b="1" dirty="0">
+                <a:solidFill>
+                  <a:schemeClr val="accent2"/>
                 </a:solidFill>
                 <a:latin typeface="Microsoft YaHei" pitchFamily="34" charset="0"/>
                 <a:ea typeface="Microsoft YaHei" pitchFamily="34" charset="-122"/>
                 <a:cs typeface="Microsoft YaHei" pitchFamily="34" charset="-120"/>
               </a:rPr>
-              <a:t>新款产品和改进后的电池。我们希望亲手体验和测试。</a:t>
-            </a:r>
-            <a:endParaRPr lang="en-US" sz="1800" dirty="0"/>
-          </a:p>
-        </p:txBody>
-      </p:sp>
-      <p:sp>
-        <p:nvSpPr>
-          <p:cNvPr id="8" name="Ask card 2"/>
+              <a:t>重点：电池与充电</a:t>
+            </a:r>
+            <a:endParaRPr lang="en-US" sz="1000" dirty="0"/>
+          </a:p>
+        </p:txBody>
+      </p:sp>
+      <p:sp>
+        <p:nvSpPr>
+          <p:cNvPr id="9" name="Priority points 1"/>
+          <p:cNvSpPr txBox="1"/>
+          <p:nvPr/>
+        </p:nvSpPr>
+        <p:spPr>
+          <a:xfrm>
+            <a:off x="822960" y="3474720"/>
+            <a:ext cx="3058058" cy="1828800"/>
+          </a:xfrm>
+          <a:prstGeom prst="rect">
+            <a:avLst/>
+          </a:prstGeom>
+          <a:noFill/>
+          <a:ln/>
+        </p:spPr>
+        <p:txBody>
+          <a:bodyPr wrap="square" lIns="0" tIns="0" rIns="0" bIns="0" rtlCol="0" anchor="t"/>
+          <a:lstStyle/>
+          <a:p>
+            <a:pPr indent="0" marL="0">
+              <a:spcAft>
+                <a:spcPts val="800"/>
+              </a:spcAft>
+              <a:buNone/>
+            </a:pPr>
+            <a:r>
+              <a:rPr lang="en-US" sz="1400" dirty="0">
+                <a:solidFill>
+                  <a:schemeClr val="bg1"/>
+                </a:solidFill>
+              </a:rPr>
+              <a:t>Longer battery life and lifespan</a:t>
+            </a:r>
+            <a:br/>
+            <a:pPr indent="0" marL="0">
+              <a:spcAft>
+                <a:spcPts val="800"/>
+              </a:spcAft>
+              <a:buNone/>
+            </a:pPr>
+            <a:r>
+              <a:rPr lang="en-US" sz="1300" dirty="0">
+                <a:solidFill>
+                  <a:schemeClr val="accent3"/>
+                </a:solidFill>
+                <a:latin typeface="Microsoft YaHei" pitchFamily="34" charset="0"/>
+                <a:ea typeface="Microsoft YaHei" pitchFamily="34" charset="-122"/>
+                <a:cs typeface="Microsoft YaHei" pitchFamily="34" charset="-120"/>
+              </a:rPr>
+              <a:t>续航更长，电池寿命更长</a:t>
+            </a:r>
+            <a:endParaRPr lang="en-US" sz="1400" dirty="0"/>
+          </a:p>
+          <a:p>
+            <a:pPr indent="0" marL="0">
+              <a:spcAft>
+                <a:spcPts val="800"/>
+              </a:spcAft>
+              <a:buNone/>
+            </a:pPr>
+            <a:r>
+              <a:rPr lang="en-US" sz="1400" dirty="0">
+                <a:solidFill>
+                  <a:schemeClr val="bg1"/>
+                </a:solidFill>
+              </a:rPr>
+              <a:t>Fixed-cable adapter as standard</a:t>
+            </a:r>
+            <a:br/>
+            <a:pPr indent="0" marL="0">
+              <a:spcAft>
+                <a:spcPts val="800"/>
+              </a:spcAft>
+              <a:buNone/>
+            </a:pPr>
+            <a:r>
+              <a:rPr lang="en-US" sz="1300" dirty="0">
+                <a:solidFill>
+                  <a:schemeClr val="accent3"/>
+                </a:solidFill>
+                <a:latin typeface="Microsoft YaHei" pitchFamily="34" charset="0"/>
+                <a:ea typeface="Microsoft YaHei" pitchFamily="34" charset="-122"/>
+                <a:cs typeface="Microsoft YaHei" pitchFamily="34" charset="-120"/>
+              </a:rPr>
+              <a:t>今后标配线缆固定的一体式适配器</a:t>
+            </a:r>
+            <a:br/>
+            <a:pPr indent="0" marL="0">
+              <a:spcAft>
+                <a:spcPts val="800"/>
+              </a:spcAft>
+              <a:buNone/>
+            </a:pPr>
+            <a:r>
+              <a:rPr lang="en-US" sz="1100" dirty="0">
+                <a:solidFill>
+                  <a:schemeClr val="accent2"/>
+                </a:solidFill>
+              </a:rPr>
+              <a:t>So the right adapter is always used</a:t>
+            </a:r>
+            <a:br/>
+            <a:pPr indent="0" marL="0">
+              <a:spcAft>
+                <a:spcPts val="800"/>
+              </a:spcAft>
+              <a:buNone/>
+            </a:pPr>
+            <a:r>
+              <a:rPr lang="en-US" sz="1100" dirty="0">
+                <a:solidFill>
+                  <a:schemeClr val="accent2"/>
+                </a:solidFill>
+                <a:latin typeface="Microsoft YaHei" pitchFamily="34" charset="0"/>
+                <a:ea typeface="Microsoft YaHei" pitchFamily="34" charset="-122"/>
+                <a:cs typeface="Microsoft YaHei" pitchFamily="34" charset="-120"/>
+              </a:rPr>
+              <a:t>确保客户始终使用与设备匹配的适配器</a:t>
+            </a:r>
+            <a:endParaRPr lang="en-US" sz="1400" dirty="0"/>
+          </a:p>
+          <a:p>
+            <a:pPr indent="0" marL="0">
+              <a:spcAft>
+                <a:spcPts val="800"/>
+              </a:spcAft>
+              <a:buNone/>
+            </a:pPr>
+            <a:r>
+              <a:rPr lang="en-US" sz="1400" dirty="0">
+                <a:solidFill>
+                  <a:schemeClr val="bg1"/>
+                </a:solidFill>
+              </a:rPr>
+              <a:t>Fewer defects and returns</a:t>
+            </a:r>
+            <a:br/>
+            <a:pPr indent="0" marL="0">
+              <a:spcAft>
+                <a:spcPts val="800"/>
+              </a:spcAft>
+              <a:buNone/>
+            </a:pPr>
+            <a:r>
+              <a:rPr lang="en-US" sz="1300" dirty="0">
+                <a:solidFill>
+                  <a:schemeClr val="accent3"/>
+                </a:solidFill>
+                <a:latin typeface="Microsoft YaHei" pitchFamily="34" charset="0"/>
+                <a:ea typeface="Microsoft YaHei" pitchFamily="34" charset="-122"/>
+                <a:cs typeface="Microsoft YaHei" pitchFamily="34" charset="-120"/>
+              </a:rPr>
+              <a:t>减少故障和退货</a:t>
+            </a:r>
+            <a:endParaRPr lang="en-US" sz="1400" dirty="0"/>
+          </a:p>
+        </p:txBody>
+      </p:sp>
+      <p:sp>
+        <p:nvSpPr>
+          <p:cNvPr id="10" name="Priority card 2"/>
           <p:cNvSpPr/>
           <p:nvPr/>
         </p:nvSpPr>
         <p:spPr>
           <a:xfrm>
-            <a:off x="548640" y="3703320"/>
-            <a:ext cx="6675120" cy="1691640"/>
+            <a:off x="4338218" y="1755648"/>
+            <a:ext cx="3515258" cy="3639312"/>
           </a:xfrm>
           <a:prstGeom prst="roundRect">
             <a:avLst>
-              <a:gd name="adj" fmla="val 8649"/>
+              <a:gd name="adj" fmla="val 4162"/>
             </a:avLst>
           </a:prstGeom>
           <a:solidFill>
@@ -9704,13 +10214,13 @@
       </p:sp>
       <p:sp>
         <p:nvSpPr>
-          <p:cNvPr id="9" name="Ask badge 2"/>
+          <p:cNvPr id="11" name="Priority badge 2"/>
           <p:cNvSpPr/>
           <p:nvPr/>
         </p:nvSpPr>
         <p:spPr>
           <a:xfrm>
-            <a:off x="822960" y="3977640"/>
+            <a:off x="4612538" y="2029968"/>
             <a:ext cx="658368" cy="658368"/>
           </a:xfrm>
           <a:prstGeom prst="ellipse">
@@ -9724,7 +10234,7 @@
       </p:sp>
       <p:pic>
         <p:nvPicPr>
-          <p:cNvPr id="10" name="Ask icon 2" descr="preencoded.png">    </p:cNvPr>
+          <p:cNvPr id="12" name="Priority icon 2" descr="preencoded.png">    </p:cNvPr>
           <p:cNvPicPr>
             <a:picLocks noChangeAspect="1"/>
           </p:cNvPicPr>
@@ -9738,6 +10248,1026 @@
         </p:blipFill>
         <p:spPr>
           <a:xfrm>
+            <a:off x="4758842" y="2176272"/>
+            <a:ext cx="365760" cy="365760"/>
+          </a:xfrm>
+          <a:prstGeom prst="rect">
+            <a:avLst/>
+          </a:prstGeom>
+        </p:spPr>
+      </p:pic>
+      <p:sp>
+        <p:nvSpPr>
+          <p:cNvPr id="13" name="Priority title 2"/>
+          <p:cNvSpPr txBox="1"/>
+          <p:nvPr/>
+        </p:nvSpPr>
+        <p:spPr>
+          <a:xfrm>
+            <a:off x="5435498" y="1993392"/>
+            <a:ext cx="2235098" cy="777240"/>
+          </a:xfrm>
+          <a:prstGeom prst="rect">
+            <a:avLst/>
+          </a:prstGeom>
+          <a:noFill/>
+          <a:ln/>
+        </p:spPr>
+        <p:txBody>
+          <a:bodyPr wrap="square" lIns="0" tIns="0" rIns="0" bIns="0" rtlCol="0" anchor="t"/>
+          <a:lstStyle/>
+          <a:p>
+            <a:pPr indent="0" marL="0">
+              <a:spcAft>
+                <a:spcPts val="100"/>
+              </a:spcAft>
+              <a:buNone/>
+            </a:pPr>
+            <a:r>
+              <a:rPr lang="en-US" sz="2000" b="1" dirty="0">
+                <a:solidFill>
+                  <a:schemeClr val="bg1"/>
+                </a:solidFill>
+              </a:rPr>
+              <a:t>Better prices</a:t>
+            </a:r>
+            <a:endParaRPr lang="en-US" sz="2000" dirty="0"/>
+          </a:p>
+          <a:p>
+            <a:pPr indent="0" marL="0">
+              <a:spcAft>
+                <a:spcPts val="100"/>
+              </a:spcAft>
+              <a:buNone/>
+            </a:pPr>
+            <a:r>
+              <a:rPr lang="en-US" sz="1700" b="1" dirty="0">
+                <a:solidFill>
+                  <a:schemeClr val="accent2"/>
+                </a:solidFill>
+                <a:latin typeface="Microsoft YaHei" pitchFamily="34" charset="0"/>
+                <a:ea typeface="Microsoft YaHei" pitchFamily="34" charset="-122"/>
+                <a:cs typeface="Microsoft YaHei" pitchFamily="34" charset="-120"/>
+              </a:rPr>
+              <a:t>更优的价格</a:t>
+            </a:r>
+            <a:endParaRPr lang="en-US" sz="2000" dirty="0"/>
+          </a:p>
+        </p:txBody>
+      </p:sp>
+      <p:sp>
+        <p:nvSpPr>
+          <p:cNvPr id="14" name="Priority focus 2"/>
+          <p:cNvSpPr txBox="1"/>
+          <p:nvPr/>
+        </p:nvSpPr>
+        <p:spPr>
+          <a:xfrm>
+            <a:off x="4612538" y="2871216"/>
+            <a:ext cx="3058058" cy="457200"/>
+          </a:xfrm>
+          <a:prstGeom prst="rect">
+            <a:avLst/>
+          </a:prstGeom>
+          <a:noFill/>
+          <a:ln/>
+        </p:spPr>
+        <p:txBody>
+          <a:bodyPr wrap="square" lIns="0" tIns="0" rIns="0" bIns="0" rtlCol="0" anchor="t"/>
+          <a:lstStyle/>
+          <a:p>
+            <a:pPr indent="0" marL="0">
+              <a:spcAft>
+                <a:spcPts val="100"/>
+              </a:spcAft>
+              <a:buNone/>
+            </a:pPr>
+            <a:r>
+              <a:rPr lang="en-US" sz="1000" b="1" spc="100" kern="0" dirty="0">
+                <a:solidFill>
+                  <a:schemeClr val="accent2"/>
+                </a:solidFill>
+              </a:rPr>
+              <a:t>FOCUS: CURRENT RANGE</a:t>
+            </a:r>
+            <a:endParaRPr lang="en-US" sz="1000" dirty="0"/>
+          </a:p>
+          <a:p>
+            <a:pPr indent="0" marL="0">
+              <a:spcAft>
+                <a:spcPts val="100"/>
+              </a:spcAft>
+              <a:buNone/>
+            </a:pPr>
+            <a:r>
+              <a:rPr lang="en-US" sz="1100" b="1" dirty="0">
+                <a:solidFill>
+                  <a:schemeClr val="accent2"/>
+                </a:solidFill>
+                <a:latin typeface="Microsoft YaHei" pitchFamily="34" charset="0"/>
+                <a:ea typeface="Microsoft YaHei" pitchFamily="34" charset="-122"/>
+                <a:cs typeface="Microsoft YaHei" pitchFamily="34" charset="-120"/>
+              </a:rPr>
+              <a:t>重点：现有产品</a:t>
+            </a:r>
+            <a:endParaRPr lang="en-US" sz="1000" dirty="0"/>
+          </a:p>
+        </p:txBody>
+      </p:sp>
+      <p:sp>
+        <p:nvSpPr>
+          <p:cNvPr id="15" name="Priority points 2"/>
+          <p:cNvSpPr txBox="1"/>
+          <p:nvPr/>
+        </p:nvSpPr>
+        <p:spPr>
+          <a:xfrm>
+            <a:off x="4612538" y="3474720"/>
+            <a:ext cx="3058058" cy="1828800"/>
+          </a:xfrm>
+          <a:prstGeom prst="rect">
+            <a:avLst/>
+          </a:prstGeom>
+          <a:noFill/>
+          <a:ln/>
+        </p:spPr>
+        <p:txBody>
+          <a:bodyPr wrap="square" lIns="0" tIns="0" rIns="0" bIns="0" rtlCol="0" anchor="t"/>
+          <a:lstStyle/>
+          <a:p>
+            <a:pPr indent="0" marL="0">
+              <a:spcAft>
+                <a:spcPts val="800"/>
+              </a:spcAft>
+              <a:buNone/>
+            </a:pPr>
+            <a:r>
+              <a:rPr lang="en-US" sz="1400" dirty="0">
+                <a:solidFill>
+                  <a:schemeClr val="bg1"/>
+                </a:solidFill>
+              </a:rPr>
+              <a:t>Lower purchase prices</a:t>
+            </a:r>
+            <a:br/>
+            <a:pPr indent="0" marL="0">
+              <a:spcAft>
+                <a:spcPts val="800"/>
+              </a:spcAft>
+              <a:buNone/>
+            </a:pPr>
+            <a:r>
+              <a:rPr lang="en-US" sz="1300" dirty="0">
+                <a:solidFill>
+                  <a:schemeClr val="accent3"/>
+                </a:solidFill>
+                <a:latin typeface="Microsoft YaHei" pitchFamily="34" charset="0"/>
+                <a:ea typeface="Microsoft YaHei" pitchFamily="34" charset="-122"/>
+                <a:cs typeface="Microsoft YaHei" pitchFamily="34" charset="-120"/>
+              </a:rPr>
+              <a:t>降低现有产品的采购价格</a:t>
+            </a:r>
+            <a:endParaRPr lang="en-US" sz="1400" dirty="0"/>
+          </a:p>
+          <a:p>
+            <a:pPr indent="0" marL="0">
+              <a:spcAft>
+                <a:spcPts val="800"/>
+              </a:spcAft>
+              <a:buNone/>
+            </a:pPr>
+            <a:r>
+              <a:rPr lang="en-US" sz="1400" dirty="0">
+                <a:solidFill>
+                  <a:schemeClr val="bg1"/>
+                </a:solidFill>
+              </a:rPr>
+              <a:t>Cost ideas that keep the quality</a:t>
+            </a:r>
+            <a:br/>
+            <a:pPr indent="0" marL="0">
+              <a:spcAft>
+                <a:spcPts val="800"/>
+              </a:spcAft>
+              <a:buNone/>
+            </a:pPr>
+            <a:r>
+              <a:rPr lang="en-US" sz="1300" dirty="0">
+                <a:solidFill>
+                  <a:schemeClr val="accent3"/>
+                </a:solidFill>
+                <a:latin typeface="Microsoft YaHei" pitchFamily="34" charset="0"/>
+                <a:ea typeface="Microsoft YaHei" pitchFamily="34" charset="-122"/>
+                <a:cs typeface="Microsoft YaHei" pitchFamily="34" charset="-120"/>
+              </a:rPr>
+              <a:t>在保证品质前提下的降本方案</a:t>
+            </a:r>
+            <a:endParaRPr lang="en-US" sz="1400" dirty="0"/>
+          </a:p>
+          <a:p>
+            <a:pPr indent="0" marL="0">
+              <a:spcAft>
+                <a:spcPts val="800"/>
+              </a:spcAft>
+              <a:buNone/>
+            </a:pPr>
+            <a:r>
+              <a:rPr lang="en-US" sz="1400" dirty="0">
+                <a:solidFill>
+                  <a:schemeClr val="bg1"/>
+                </a:solidFill>
+              </a:rPr>
+              <a:t>Prices based on 2027 volumes</a:t>
+            </a:r>
+            <a:br/>
+            <a:pPr indent="0" marL="0">
+              <a:spcAft>
+                <a:spcPts val="800"/>
+              </a:spcAft>
+              <a:buNone/>
+            </a:pPr>
+            <a:r>
+              <a:rPr lang="en-US" sz="1300" dirty="0">
+                <a:solidFill>
+                  <a:schemeClr val="accent3"/>
+                </a:solidFill>
+                <a:latin typeface="Microsoft YaHei" pitchFamily="34" charset="0"/>
+                <a:ea typeface="Microsoft YaHei" pitchFamily="34" charset="-122"/>
+                <a:cs typeface="Microsoft YaHei" pitchFamily="34" charset="-120"/>
+              </a:rPr>
+              <a:t>基于 2027 年采购量报价</a:t>
+            </a:r>
+            <a:endParaRPr lang="en-US" sz="1400" dirty="0"/>
+          </a:p>
+        </p:txBody>
+      </p:sp>
+      <p:sp>
+        <p:nvSpPr>
+          <p:cNvPr id="16" name="Priority card 3"/>
+          <p:cNvSpPr/>
+          <p:nvPr/>
+        </p:nvSpPr>
+        <p:spPr>
+          <a:xfrm>
+            <a:off x="8127797" y="1755648"/>
+            <a:ext cx="3515258" cy="3639312"/>
+          </a:xfrm>
+          <a:prstGeom prst="roundRect">
+            <a:avLst>
+              <a:gd name="adj" fmla="val 4162"/>
+            </a:avLst>
+          </a:prstGeom>
+          <a:solidFill>
+            <a:srgbClr val="24221F"/>
+          </a:solidFill>
+          <a:ln/>
+        </p:spPr>
+      </p:sp>
+      <p:sp>
+        <p:nvSpPr>
+          <p:cNvPr id="17" name="Priority badge 3"/>
+          <p:cNvSpPr/>
+          <p:nvPr/>
+        </p:nvSpPr>
+        <p:spPr>
+          <a:xfrm>
+            <a:off x="8402117" y="2029968"/>
+            <a:ext cx="658368" cy="658368"/>
+          </a:xfrm>
+          <a:prstGeom prst="ellipse">
+            <a:avLst/>
+          </a:prstGeom>
+          <a:solidFill>
+            <a:schemeClr val="accent2"/>
+          </a:solidFill>
+          <a:ln/>
+        </p:spPr>
+      </p:sp>
+      <p:pic>
+        <p:nvPicPr>
+          <p:cNvPr id="18" name="Priority icon 3" descr="preencoded.png">    </p:cNvPr>
+          <p:cNvPicPr>
+            <a:picLocks noChangeAspect="1"/>
+          </p:cNvPicPr>
+          <p:nvPr/>
+        </p:nvPicPr>
+        <p:blipFill>
+          <a:blip r:embed="rId3"/>
+          <a:stretch>
+            <a:fillRect/>
+          </a:stretch>
+        </p:blipFill>
+        <p:spPr>
+          <a:xfrm>
+            <a:off x="8548421" y="2176272"/>
+            <a:ext cx="365760" cy="365760"/>
+          </a:xfrm>
+          <a:prstGeom prst="rect">
+            <a:avLst/>
+          </a:prstGeom>
+        </p:spPr>
+      </p:pic>
+      <p:sp>
+        <p:nvSpPr>
+          <p:cNvPr id="19" name="Priority title 3"/>
+          <p:cNvSpPr txBox="1"/>
+          <p:nvPr/>
+        </p:nvSpPr>
+        <p:spPr>
+          <a:xfrm>
+            <a:off x="9225077" y="1993392"/>
+            <a:ext cx="2235098" cy="777240"/>
+          </a:xfrm>
+          <a:prstGeom prst="rect">
+            <a:avLst/>
+          </a:prstGeom>
+          <a:noFill/>
+          <a:ln/>
+        </p:spPr>
+        <p:txBody>
+          <a:bodyPr wrap="square" lIns="0" tIns="0" rIns="0" bIns="0" rtlCol="0" anchor="t"/>
+          <a:lstStyle/>
+          <a:p>
+            <a:pPr indent="0" marL="0">
+              <a:spcAft>
+                <a:spcPts val="100"/>
+              </a:spcAft>
+              <a:buNone/>
+            </a:pPr>
+            <a:r>
+              <a:rPr lang="en-US" sz="2000" b="1" dirty="0">
+                <a:solidFill>
+                  <a:schemeClr val="bg1"/>
+                </a:solidFill>
+              </a:rPr>
+              <a:t>New models</a:t>
+            </a:r>
+            <a:endParaRPr lang="en-US" sz="2000" dirty="0"/>
+          </a:p>
+          <a:p>
+            <a:pPr indent="0" marL="0">
+              <a:spcAft>
+                <a:spcPts val="100"/>
+              </a:spcAft>
+              <a:buNone/>
+            </a:pPr>
+            <a:r>
+              <a:rPr lang="en-US" sz="1700" b="1" dirty="0">
+                <a:solidFill>
+                  <a:schemeClr val="accent2"/>
+                </a:solidFill>
+                <a:latin typeface="Microsoft YaHei" pitchFamily="34" charset="0"/>
+                <a:ea typeface="Microsoft YaHei" pitchFamily="34" charset="-122"/>
+                <a:cs typeface="Microsoft YaHei" pitchFamily="34" charset="-120"/>
+              </a:rPr>
+              <a:t>新款产品</a:t>
+            </a:r>
+            <a:endParaRPr lang="en-US" sz="2000" dirty="0"/>
+          </a:p>
+        </p:txBody>
+      </p:sp>
+      <p:sp>
+        <p:nvSpPr>
+          <p:cNvPr id="20" name="Priority focus 3"/>
+          <p:cNvSpPr txBox="1"/>
+          <p:nvPr/>
+        </p:nvSpPr>
+        <p:spPr>
+          <a:xfrm>
+            <a:off x="8402117" y="2871216"/>
+            <a:ext cx="3058058" cy="457200"/>
+          </a:xfrm>
+          <a:prstGeom prst="rect">
+            <a:avLst/>
+          </a:prstGeom>
+          <a:noFill/>
+          <a:ln/>
+        </p:spPr>
+        <p:txBody>
+          <a:bodyPr wrap="square" lIns="0" tIns="0" rIns="0" bIns="0" rtlCol="0" anchor="t"/>
+          <a:lstStyle/>
+          <a:p>
+            <a:pPr indent="0" marL="0">
+              <a:spcAft>
+                <a:spcPts val="100"/>
+              </a:spcAft>
+              <a:buNone/>
+            </a:pPr>
+            <a:r>
+              <a:rPr lang="en-US" sz="1000" b="1" spc="100" kern="0" dirty="0">
+                <a:solidFill>
+                  <a:schemeClr val="accent2"/>
+                </a:solidFill>
+              </a:rPr>
+              <a:t>FOCUS: CO-DEVELOPMENT</a:t>
+            </a:r>
+            <a:endParaRPr lang="en-US" sz="1000" dirty="0"/>
+          </a:p>
+          <a:p>
+            <a:pPr indent="0" marL="0">
+              <a:spcAft>
+                <a:spcPts val="100"/>
+              </a:spcAft>
+              <a:buNone/>
+            </a:pPr>
+            <a:r>
+              <a:rPr lang="en-US" sz="1100" b="1" dirty="0">
+                <a:solidFill>
+                  <a:schemeClr val="accent2"/>
+                </a:solidFill>
+                <a:latin typeface="Microsoft YaHei" pitchFamily="34" charset="0"/>
+                <a:ea typeface="Microsoft YaHei" pitchFamily="34" charset="-122"/>
+                <a:cs typeface="Microsoft YaHei" pitchFamily="34" charset="-120"/>
+              </a:rPr>
+              <a:t>重点：共同开发</a:t>
+            </a:r>
+            <a:endParaRPr lang="en-US" sz="1000" dirty="0"/>
+          </a:p>
+        </p:txBody>
+      </p:sp>
+      <p:sp>
+        <p:nvSpPr>
+          <p:cNvPr id="21" name="Priority points 3"/>
+          <p:cNvSpPr txBox="1"/>
+          <p:nvPr/>
+        </p:nvSpPr>
+        <p:spPr>
+          <a:xfrm>
+            <a:off x="8402117" y="3474720"/>
+            <a:ext cx="3058058" cy="1828800"/>
+          </a:xfrm>
+          <a:prstGeom prst="rect">
+            <a:avLst/>
+          </a:prstGeom>
+          <a:noFill/>
+          <a:ln/>
+        </p:spPr>
+        <p:txBody>
+          <a:bodyPr wrap="square" lIns="0" tIns="0" rIns="0" bIns="0" rtlCol="0" anchor="t"/>
+          <a:lstStyle/>
+          <a:p>
+            <a:pPr indent="0" marL="0">
+              <a:spcAft>
+                <a:spcPts val="800"/>
+              </a:spcAft>
+              <a:buNone/>
+            </a:pPr>
+            <a:r>
+              <a:rPr lang="en-US" sz="1400" dirty="0">
+                <a:solidFill>
+                  <a:schemeClr val="bg1"/>
+                </a:solidFill>
+              </a:rPr>
+              <a:t>Develop new models together</a:t>
+            </a:r>
+            <a:br/>
+            <a:pPr indent="0" marL="0">
+              <a:spcAft>
+                <a:spcPts val="800"/>
+              </a:spcAft>
+              <a:buNone/>
+            </a:pPr>
+            <a:r>
+              <a:rPr lang="en-US" sz="1300" dirty="0">
+                <a:solidFill>
+                  <a:schemeClr val="accent3"/>
+                </a:solidFill>
+                <a:latin typeface="Microsoft YaHei" pitchFamily="34" charset="0"/>
+                <a:ea typeface="Microsoft YaHei" pitchFamily="34" charset="-122"/>
+                <a:cs typeface="Microsoft YaHei" pitchFamily="34" charset="-120"/>
+              </a:rPr>
+              <a:t>共同开发新款产品</a:t>
+            </a:r>
+            <a:endParaRPr lang="en-US" sz="1400" dirty="0"/>
+          </a:p>
+          <a:p>
+            <a:pPr indent="0" marL="0">
+              <a:spcAft>
+                <a:spcPts val="800"/>
+              </a:spcAft>
+              <a:buNone/>
+            </a:pPr>
+            <a:r>
+              <a:rPr lang="en-US" sz="1400" dirty="0">
+                <a:solidFill>
+                  <a:schemeClr val="bg1"/>
+                </a:solidFill>
+              </a:rPr>
+              <a:t>Upgrades of our best-sellers</a:t>
+            </a:r>
+            <a:br/>
+            <a:pPr indent="0" marL="0">
+              <a:spcAft>
+                <a:spcPts val="800"/>
+              </a:spcAft>
+              <a:buNone/>
+            </a:pPr>
+            <a:r>
+              <a:rPr lang="en-US" sz="1300" dirty="0">
+                <a:solidFill>
+                  <a:schemeClr val="accent3"/>
+                </a:solidFill>
+                <a:latin typeface="Microsoft YaHei" pitchFamily="34" charset="0"/>
+                <a:ea typeface="Microsoft YaHei" pitchFamily="34" charset="-122"/>
+                <a:cs typeface="Microsoft YaHei" pitchFamily="34" charset="-120"/>
+              </a:rPr>
+              <a:t>升级我们的畅销款</a:t>
+            </a:r>
+            <a:endParaRPr lang="en-US" sz="1400" dirty="0"/>
+          </a:p>
+          <a:p>
+            <a:pPr indent="0" marL="0">
+              <a:spcAft>
+                <a:spcPts val="800"/>
+              </a:spcAft>
+              <a:buNone/>
+            </a:pPr>
+            <a:r>
+              <a:rPr lang="en-US" sz="1400" dirty="0">
+                <a:solidFill>
+                  <a:schemeClr val="bg1"/>
+                </a:solidFill>
+              </a:rPr>
+              <a:t>Your newest technology</a:t>
+            </a:r>
+            <a:br/>
+            <a:pPr indent="0" marL="0">
+              <a:spcAft>
+                <a:spcPts val="800"/>
+              </a:spcAft>
+              <a:buNone/>
+            </a:pPr>
+            <a:r>
+              <a:rPr lang="en-US" sz="1300" dirty="0">
+                <a:solidFill>
+                  <a:schemeClr val="accent3"/>
+                </a:solidFill>
+                <a:latin typeface="Microsoft YaHei" pitchFamily="34" charset="0"/>
+                <a:ea typeface="Microsoft YaHei" pitchFamily="34" charset="-122"/>
+                <a:cs typeface="Microsoft YaHei" pitchFamily="34" charset="-120"/>
+              </a:rPr>
+              <a:t>贵司的最新技术</a:t>
+            </a:r>
+            <a:endParaRPr lang="en-US" sz="1400" dirty="0"/>
+          </a:p>
+        </p:txBody>
+      </p:sp>
+      <p:sp>
+        <p:nvSpPr>
+          <p:cNvPr id="22" name="Why it matters"/>
+          <p:cNvSpPr txBox="1"/>
+          <p:nvPr/>
+        </p:nvSpPr>
+        <p:spPr>
+          <a:xfrm>
+            <a:off x="548640" y="5559552"/>
+            <a:ext cx="11094415" cy="621792"/>
+          </a:xfrm>
+          <a:prstGeom prst="rect">
+            <a:avLst/>
+          </a:prstGeom>
+          <a:noFill/>
+          <a:ln/>
+        </p:spPr>
+        <p:txBody>
+          <a:bodyPr wrap="square" lIns="0" tIns="0" rIns="0" bIns="0" rtlCol="0" anchor="t"/>
+          <a:lstStyle/>
+          <a:p>
+            <a:pPr indent="0" marL="0">
+              <a:spcAft>
+                <a:spcPts val="300"/>
+              </a:spcAft>
+              <a:buNone/>
+            </a:pPr>
+            <a:r>
+              <a:rPr lang="en-US" sz="1300" b="1" dirty="0">
+                <a:solidFill>
+                  <a:schemeClr val="accent2"/>
+                </a:solidFill>
+              </a:rPr>
+              <a:t>Why this matters: </a:t>
+            </a:r>
+            <a:pPr indent="0" marL="0">
+              <a:spcAft>
+                <a:spcPts val="300"/>
+              </a:spcAft>
+              <a:buNone/>
+            </a:pPr>
+            <a:r>
+              <a:rPr lang="en-US" sz="1300" dirty="0">
+                <a:solidFill>
+                  <a:schemeClr val="bg1"/>
+                </a:solidFill>
+              </a:rPr>
+              <a:t>our customers get a 100-day trial and a 2-year warranty, so every weak battery becomes a return and a bad review.</a:t>
+            </a:r>
+            <a:endParaRPr lang="en-US" sz="1300" dirty="0"/>
+          </a:p>
+          <a:p>
+            <a:pPr indent="0" marL="0">
+              <a:spcAft>
+                <a:spcPts val="300"/>
+              </a:spcAft>
+              <a:buNone/>
+            </a:pPr>
+            <a:r>
+              <a:rPr lang="en-US" sz="1300" b="1" dirty="0">
+                <a:solidFill>
+                  <a:schemeClr val="accent2"/>
+                </a:solidFill>
+                <a:latin typeface="Microsoft YaHei" pitchFamily="34" charset="0"/>
+                <a:ea typeface="Microsoft YaHei" pitchFamily="34" charset="-122"/>
+                <a:cs typeface="Microsoft YaHei" pitchFamily="34" charset="-120"/>
+              </a:rPr>
+              <a:t>原因：</a:t>
+            </a:r>
+            <a:pPr indent="0" marL="0">
+              <a:spcAft>
+                <a:spcPts val="300"/>
+              </a:spcAft>
+              <a:buNone/>
+            </a:pPr>
+            <a:r>
+              <a:rPr lang="en-US" sz="1300" dirty="0">
+                <a:solidFill>
+                  <a:schemeClr val="accent3"/>
+                </a:solidFill>
+                <a:latin typeface="Microsoft YaHei" pitchFamily="34" charset="0"/>
+                <a:ea typeface="Microsoft YaHei" pitchFamily="34" charset="-122"/>
+                <a:cs typeface="Microsoft YaHei" pitchFamily="34" charset="-120"/>
+              </a:rPr>
+              <a:t>我们为客户提供 100 天试用和 2 年保修，每一个电池问题都会变成退货和差评。</a:t>
+            </a:r>
+            <a:endParaRPr lang="en-US" sz="1300" dirty="0"/>
+          </a:p>
+        </p:txBody>
+      </p:sp>
+      <p:sp>
+        <p:nvSpPr>
+          <p:cNvPr id="25" name="Slide Number Placeholder 0"/>
+          <p:cNvSpPr>
+            <a:spLocks noGrp="1"/>
+          </p:cNvSpPr>
+          <p:nvPr>
+            <p:ph type="sldNum" sz="quarter" idx="4294967295"/>
+          </p:nvPr>
+        </p:nvSpPr>
+        <p:spPr>
+          <a:xfrm>
+            <a:off x="11094415" y="6345936"/>
+            <a:ext cx="548640" cy="274320"/>
+          </a:xfrm>
+          <a:prstGeom prst="rect">
+            <a:avLst/>
+          </a:prstGeom>
+          <a:extLst>
+            <a:ext uri="{C572A759-6A51-4108-AA02-DFA0A04FC94B}">
+              <ma14:wrappingTextBoxFlag xmlns:ma14="http://schemas.microsoft.com/office/mac/drawingml/2011/main" val="0"/>
+            </a:ext>
+          </a:extLst>
+        </p:spPr>
+        <p:txBody>
+          <a:bodyPr lIns="0" tIns="0" rIns="0" bIns="0"/>
+          <a:lstStyle>
+            <a:lvl1pPr>
+              <a:defRPr sz="1000">
+                <a:solidFill>
+                  <a:schemeClr val="accent3"/>
+                </a:solidFill>
+              </a:defRPr>
+            </a:lvl1pPr>
+          </a:lstStyle>
+          <a:p>
+            <a:pPr algn="r"/>
+            <a:fld id="{F7021451-1387-4CA6-816F-3879F97B5CBC}" type="slidenum">
+              <a:rPr b="0" lang="en-US"/>
+              <a:t>8</a:t>
+            </a:fld>
+            <a:endParaRPr lang="en-US"/>
+          </a:p>
+        </p:txBody>
+      </p:sp>
+    </p:spTree>
+  </p:cSld>
+  <p:clrMapOvr>
+    <a:masterClrMapping/>
+  </p:clrMapOvr>
+</p:sld>
+</file>
+
+<file path=ppt/slides/slide9.xml><?xml version="1.0" encoding="utf-8"?>
+<p:sld xmlns:a="http://schemas.openxmlformats.org/drawingml/2006/main" xmlns:r="http://schemas.openxmlformats.org/officeDocument/2006/relationships" xmlns:p="http://schemas.openxmlformats.org/presentationml/2006/main">
+  <p:cSld name="Slide 9">
+    <p:spTree>
+      <p:nvGrpSpPr>
+        <p:cNvPr id="1" name=""/>
+        <p:cNvGrpSpPr/>
+        <p:nvPr/>
+      </p:nvGrpSpPr>
+      <p:grpSpPr>
+        <a:xfrm>
+          <a:off x="0" y="0"/>
+          <a:ext cx="0" cy="0"/>
+          <a:chOff x="0" y="0"/>
+          <a:chExt cx="0" cy="0"/>
+        </a:xfrm>
+      </p:grpSpPr>
+      <p:sp>
+        <p:nvSpPr>
+          <p:cNvPr id="2" name="Text 0"/>
+          <p:cNvSpPr/>
+          <p:nvPr>
+            <p:ph idx="100" type="title" hasCustomPrompt="1"/>
+          </p:nvPr>
+        </p:nvSpPr>
+        <p:spPr>
+          <a:xfrm>
+            <a:off x="548640" y="384048"/>
+            <a:ext cx="11094415" cy="603504"/>
+          </a:xfrm>
+          <a:prstGeom prst="rect">
+            <a:avLst/>
+          </a:prstGeom>
+          <a:noFill/>
+          <a:ln/>
+        </p:spPr>
+        <p:txBody>
+          <a:bodyPr wrap="square" lIns="0" tIns="0" rIns="0" bIns="0" rtlCol="0" anchor="b"/>
+          <a:lstStyle/>
+          <a:p>
+            <a:pPr algn="l" indent="0" marL="0">
+              <a:buNone/>
+            </a:pPr>
+            <a:r>
+              <a:rPr lang="en-US" sz="3200" b="1" dirty="0">
+                <a:solidFill>
+                  <a:schemeClr val="bg1"/>
+                </a:solidFill>
+              </a:rPr>
+              <a:t>What we would love to see</a:t>
+            </a:r>
+            <a:endParaRPr lang="en-US" sz="3200" dirty="0"/>
+          </a:p>
+        </p:txBody>
+      </p:sp>
+      <p:sp>
+        <p:nvSpPr>
+          <p:cNvPr id="3" name="Text 0"/>
+          <p:cNvSpPr/>
+          <p:nvPr>
+            <p:ph idx="101" type="body" hasCustomPrompt="1"/>
+          </p:nvPr>
+        </p:nvSpPr>
+        <p:spPr>
+          <a:xfrm>
+            <a:off x="548640" y="1005840"/>
+            <a:ext cx="11094415" cy="438912"/>
+          </a:xfrm>
+          <a:prstGeom prst="rect">
+            <a:avLst/>
+          </a:prstGeom>
+          <a:noFill/>
+          <a:ln/>
+        </p:spPr>
+        <p:txBody>
+          <a:bodyPr wrap="square" lIns="0" tIns="0" rIns="0" bIns="0" rtlCol="0" anchor="t"/>
+          <a:lstStyle/>
+          <a:p>
+            <a:pPr algn="l" indent="0" marL="0">
+              <a:buNone/>
+            </a:pPr>
+            <a:r>
+              <a:rPr lang="en-US" sz="2000" b="1" dirty="0">
+                <a:solidFill>
+                  <a:schemeClr val="accent2"/>
+                </a:solidFill>
+                <a:latin typeface="Microsoft YaHei" pitchFamily="34" charset="0"/>
+                <a:ea typeface="Microsoft YaHei" pitchFamily="34" charset="-122"/>
+                <a:cs typeface="Microsoft YaHei" pitchFamily="34" charset="-120"/>
+              </a:rPr>
+              <a:t>我们最期待看到的</a:t>
+            </a:r>
+            <a:endParaRPr lang="en-US" sz="2000" dirty="0"/>
+          </a:p>
+        </p:txBody>
+      </p:sp>
+      <p:sp>
+        <p:nvSpPr>
+          <p:cNvPr id="4" name="Ask card 1"/>
+          <p:cNvSpPr/>
+          <p:nvPr/>
+        </p:nvSpPr>
+        <p:spPr>
+          <a:xfrm>
+            <a:off x="548640" y="1783080"/>
+            <a:ext cx="6675120" cy="1691640"/>
+          </a:xfrm>
+          <a:prstGeom prst="roundRect">
+            <a:avLst>
+              <a:gd name="adj" fmla="val 8649"/>
+            </a:avLst>
+          </a:prstGeom>
+          <a:solidFill>
+            <a:srgbClr val="24221F"/>
+          </a:solidFill>
+          <a:ln/>
+        </p:spPr>
+      </p:sp>
+      <p:sp>
+        <p:nvSpPr>
+          <p:cNvPr id="5" name="Ask badge 1"/>
+          <p:cNvSpPr/>
+          <p:nvPr/>
+        </p:nvSpPr>
+        <p:spPr>
+          <a:xfrm>
+            <a:off x="822960" y="2057400"/>
+            <a:ext cx="658368" cy="658368"/>
+          </a:xfrm>
+          <a:prstGeom prst="ellipse">
+            <a:avLst/>
+          </a:prstGeom>
+          <a:solidFill>
+            <a:schemeClr val="accent2"/>
+          </a:solidFill>
+          <a:ln/>
+        </p:spPr>
+      </p:sp>
+      <p:pic>
+        <p:nvPicPr>
+          <p:cNvPr id="6" name="Ask icon 1" descr="preencoded.png">    </p:cNvPr>
+          <p:cNvPicPr>
+            <a:picLocks noChangeAspect="1"/>
+          </p:cNvPicPr>
+          <p:nvPr/>
+        </p:nvPicPr>
+        <p:blipFill>
+          <a:blip r:embed="rId1"/>
+          <a:stretch>
+            <a:fillRect/>
+          </a:stretch>
+        </p:blipFill>
+        <p:spPr>
+          <a:xfrm>
+            <a:off x="969264" y="2203704"/>
+            <a:ext cx="365760" cy="365760"/>
+          </a:xfrm>
+          <a:prstGeom prst="rect">
+            <a:avLst/>
+          </a:prstGeom>
+        </p:spPr>
+      </p:pic>
+      <p:sp>
+        <p:nvSpPr>
+          <p:cNvPr id="7" name="Ask text 1"/>
+          <p:cNvSpPr txBox="1"/>
+          <p:nvPr/>
+        </p:nvSpPr>
+        <p:spPr>
+          <a:xfrm>
+            <a:off x="1691640" y="2057400"/>
+            <a:ext cx="5303520" cy="1280160"/>
+          </a:xfrm>
+          <a:prstGeom prst="rect">
+            <a:avLst/>
+          </a:prstGeom>
+          <a:noFill/>
+          <a:ln/>
+        </p:spPr>
+        <p:txBody>
+          <a:bodyPr wrap="square" lIns="0" tIns="0" rIns="0" bIns="0" rtlCol="0" anchor="t"/>
+          <a:lstStyle/>
+          <a:p>
+            <a:pPr indent="0" marL="0">
+              <a:spcAft>
+                <a:spcPts val="500"/>
+              </a:spcAft>
+              <a:buNone/>
+            </a:pPr>
+            <a:r>
+              <a:rPr lang="en-US" sz="1800" b="1" dirty="0">
+                <a:solidFill>
+                  <a:schemeClr val="bg1"/>
+                </a:solidFill>
+              </a:rPr>
+              <a:t>Samples</a:t>
+            </a:r>
+            <a:pPr indent="0" marL="0">
+              <a:spcAft>
+                <a:spcPts val="500"/>
+              </a:spcAft>
+              <a:buNone/>
+            </a:pPr>
+            <a:r>
+              <a:rPr lang="en-US" sz="1600" b="1" dirty="0">
+                <a:solidFill>
+                  <a:schemeClr val="accent2"/>
+                </a:solidFill>
+                <a:latin typeface="Microsoft YaHei" pitchFamily="34" charset="0"/>
+                <a:ea typeface="Microsoft YaHei" pitchFamily="34" charset="-122"/>
+                <a:cs typeface="Microsoft YaHei" pitchFamily="34" charset="-120"/>
+              </a:rPr>
+              <a:t>  样品</a:t>
+            </a:r>
+            <a:endParaRPr lang="en-US" sz="1800" dirty="0"/>
+          </a:p>
+          <a:p>
+            <a:pPr indent="0" marL="0">
+              <a:spcAft>
+                <a:spcPts val="500"/>
+              </a:spcAft>
+              <a:buNone/>
+            </a:pPr>
+            <a:r>
+              <a:rPr lang="en-US" sz="1300" dirty="0">
+                <a:solidFill>
+                  <a:schemeClr val="bg1"/>
+                </a:solidFill>
+              </a:rPr>
+              <a:t>New models and improved batteries. We like to hold and test them ourselves.</a:t>
+            </a:r>
+            <a:endParaRPr lang="en-US" sz="1800" dirty="0"/>
+          </a:p>
+          <a:p>
+            <a:pPr indent="0" marL="0">
+              <a:spcAft>
+                <a:spcPts val="500"/>
+              </a:spcAft>
+              <a:buNone/>
+            </a:pPr>
+            <a:r>
+              <a:rPr lang="en-US" sz="1300" dirty="0">
+                <a:solidFill>
+                  <a:schemeClr val="accent3"/>
+                </a:solidFill>
+                <a:latin typeface="Microsoft YaHei" pitchFamily="34" charset="0"/>
+                <a:ea typeface="Microsoft YaHei" pitchFamily="34" charset="-122"/>
+                <a:cs typeface="Microsoft YaHei" pitchFamily="34" charset="-120"/>
+              </a:rPr>
+              <a:t>新款产品和改进后的电池。我们希望亲手体验和测试。</a:t>
+            </a:r>
+            <a:endParaRPr lang="en-US" sz="1800" dirty="0"/>
+          </a:p>
+        </p:txBody>
+      </p:sp>
+      <p:sp>
+        <p:nvSpPr>
+          <p:cNvPr id="8" name="Ask card 2"/>
+          <p:cNvSpPr/>
+          <p:nvPr/>
+        </p:nvSpPr>
+        <p:spPr>
+          <a:xfrm>
+            <a:off x="548640" y="3703320"/>
+            <a:ext cx="6675120" cy="1691640"/>
+          </a:xfrm>
+          <a:prstGeom prst="roundRect">
+            <a:avLst>
+              <a:gd name="adj" fmla="val 8649"/>
+            </a:avLst>
+          </a:prstGeom>
+          <a:solidFill>
+            <a:srgbClr val="24221F"/>
+          </a:solidFill>
+          <a:ln/>
+        </p:spPr>
+      </p:sp>
+      <p:sp>
+        <p:nvSpPr>
+          <p:cNvPr id="9" name="Ask badge 2"/>
+          <p:cNvSpPr/>
+          <p:nvPr/>
+        </p:nvSpPr>
+        <p:spPr>
+          <a:xfrm>
+            <a:off x="822960" y="3977640"/>
+            <a:ext cx="658368" cy="658368"/>
+          </a:xfrm>
+          <a:prstGeom prst="ellipse">
+            <a:avLst/>
+          </a:prstGeom>
+          <a:solidFill>
+            <a:schemeClr val="accent2"/>
+          </a:solidFill>
+          <a:ln/>
+        </p:spPr>
+      </p:sp>
+      <p:pic>
+        <p:nvPicPr>
+          <p:cNvPr id="10" name="Ask icon 2" descr="preencoded.png">    </p:cNvPr>
+          <p:cNvPicPr>
+            <a:picLocks noChangeAspect="1"/>
+          </p:cNvPicPr>
+          <p:nvPr/>
+        </p:nvPicPr>
+        <p:blipFill>
+          <a:blip r:embed="rId2"/>
+          <a:stretch>
+            <a:fillRect/>
+          </a:stretch>
+        </p:blipFill>
+        <p:spPr>
+          <a:xfrm>
             <a:off x="969264" y="4123944"/>
             <a:ext cx="365760" cy="365760"/>
           </a:xfrm>
@@ -10178,7 +11708,7 @@
             <a:pPr algn="r"/>
             <a:fld id="{F7021451-1387-4CA6-816F-3879F97B5CBC}" type="slidenum">
               <a:rPr b="0" lang="en-US"/>
-              <a:t>8</a:t>
+              <a:t>9</a:t>
             </a:fld>
             <a:endParaRPr lang="en-US"/>
           </a:p>
